--- a/output/wordlabs-replace-3day.pptx
+++ b/output/wordlabs-replace-3day.pptx
@@ -4279,7 +4279,7 @@
                 <a:ea typeface="Calibri" pitchFamily="34" charset="-122"/>
                 <a:cs typeface="Calibri" pitchFamily="34" charset="-120"/>
               </a:rPr>
-              <a:t>Origin: Latin: replacere</a:t>
+              <a:t>Origin: Latin: placea</a:t>
             </a:r>
             <a:endParaRPr lang="en-US" sz="1300" dirty="0"/>
           </a:p>
@@ -6040,7 +6040,7 @@
                 <a:ea typeface="Calibri" pitchFamily="34" charset="-122"/>
                 <a:cs typeface="Calibri" pitchFamily="34" charset="-120"/>
               </a:rPr>
-              <a:t>The coach chose a </a:t>
+              <a:t>The school organised a </a:t>
             </a:r>
             <a:pPr algn="l" indent="0" marL="0">
               <a:buNone/>
@@ -6071,7 +6071,7 @@
                 <a:ea typeface="Calibri" pitchFamily="34" charset="-122"/>
                 <a:cs typeface="Calibri" pitchFamily="34" charset="-120"/>
               </a:rPr>
-              <a:t> player, carefully </a:t>
+              <a:t> goalkeeper, but nobody could believe how quickly she was </a:t>
             </a:r>
             <a:pPr algn="l" indent="0" marL="0">
               <a:buNone/>
@@ -6102,7 +6102,7 @@
                 <a:ea typeface="Calibri" pitchFamily="34" charset="-122"/>
                 <a:cs typeface="Calibri" pitchFamily="34" charset="-120"/>
               </a:rPr>
-              <a:t> the injured captain before the final whistle.</a:t>
+              <a:t> the injured captain.</a:t>
             </a:r>
             <a:endParaRPr lang="en-US" sz="1800" dirty="0"/>
           </a:p>
@@ -7972,7 +7972,7 @@
                 <a:ea typeface="Calibri" pitchFamily="34" charset="-122"/>
                 <a:cs typeface="Calibri" pitchFamily="34" charset="-120"/>
               </a:rPr>
-              <a:t>put in position</a:t>
+              <a:t>a position or location</a:t>
             </a:r>
             <a:endParaRPr lang="en-US" sz="850" dirty="0"/>
           </a:p>
@@ -8084,7 +8084,7 @@
                 <a:ea typeface="Calibri" pitchFamily="34" charset="-122"/>
                 <a:cs typeface="Calibri" pitchFamily="34" charset="-120"/>
               </a:rPr>
-              <a:t>result or action</a:t>
+              <a:t>result or action (noun)</a:t>
             </a:r>
             <a:endParaRPr lang="en-US" sz="850" dirty="0"/>
           </a:p>
@@ -9069,7 +9069,7 @@
                 <a:ea typeface="Calibri" pitchFamily="34" charset="-122"/>
                 <a:cs typeface="Calibri" pitchFamily="34" charset="-120"/>
               </a:rPr>
-              <a:t>put in position</a:t>
+              <a:t>a position or location</a:t>
             </a:r>
             <a:endParaRPr lang="en-US" sz="850" dirty="0"/>
           </a:p>
@@ -9181,7 +9181,7 @@
                 <a:ea typeface="Calibri" pitchFamily="34" charset="-122"/>
                 <a:cs typeface="Calibri" pitchFamily="34" charset="-120"/>
               </a:rPr>
-              <a:t>result or action</a:t>
+              <a:t>result or action (noun)</a:t>
             </a:r>
             <a:endParaRPr lang="en-US" sz="850" dirty="0"/>
           </a:p>
@@ -10403,7 +10403,7 @@
                 <a:ea typeface="Calibri" pitchFamily="34" charset="-122"/>
                 <a:cs typeface="Calibri" pitchFamily="34" charset="-120"/>
               </a:rPr>
-              <a:t>put in position</a:t>
+              <a:t>a position or location</a:t>
             </a:r>
             <a:endParaRPr lang="en-US" sz="850" dirty="0"/>
           </a:p>
@@ -10515,7 +10515,7 @@
                 <a:ea typeface="Calibri" pitchFamily="34" charset="-122"/>
                 <a:cs typeface="Calibri" pitchFamily="34" charset="-120"/>
               </a:rPr>
-              <a:t>result or action</a:t>
+              <a:t>result or action (noun)</a:t>
             </a:r>
             <a:endParaRPr lang="en-US" sz="850" dirty="0"/>
           </a:p>
@@ -13224,7 +13224,7 @@
                 <a:ea typeface="Calibri" pitchFamily="34" charset="-122"/>
                 <a:cs typeface="Calibri" pitchFamily="34" charset="-120"/>
               </a:rPr>
-              <a:t>put in position</a:t>
+              <a:t>a position or location</a:t>
             </a:r>
             <a:endParaRPr lang="en-US" sz="850" dirty="0"/>
           </a:p>
@@ -13232,7 +13232,46 @@
       </p:sp>
       <p:sp>
         <p:nvSpPr>
-          <p:cNvPr id="22" name="Shape 20"/>
+          <p:cNvPr id="22" name="Text 20"/>
+          <p:cNvSpPr/>
+          <p:nvPr/>
+        </p:nvSpPr>
+        <p:spPr>
+          <a:xfrm>
+            <a:off x="4370832" y="2752344"/>
+            <a:ext cx="1828800" cy="182880"/>
+          </a:xfrm>
+          <a:prstGeom prst="rect">
+            <a:avLst/>
+          </a:prstGeom>
+          <a:noFill/>
+          <a:ln/>
+        </p:spPr>
+        <p:txBody>
+          <a:bodyPr wrap="square" lIns="0" tIns="0" rIns="0" bIns="0" rtlCol="0" anchor="t"/>
+          <a:lstStyle/>
+          <a:p>
+            <a:pPr algn="ctr" indent="0" marL="0">
+              <a:buNone/>
+            </a:pPr>
+            <a:r>
+              <a:rPr lang="en-US" sz="700" i="1" dirty="0">
+                <a:solidFill>
+                  <a:srgbClr val="94A3B8"/>
+                </a:solidFill>
+                <a:latin typeface="Calibri" pitchFamily="34" charset="0"/>
+                <a:ea typeface="Calibri" pitchFamily="34" charset="-122"/>
+                <a:cs typeface="Calibri" pitchFamily="34" charset="-120"/>
+              </a:rPr>
+              <a:t>'e' dropped before vowel suffix</a:t>
+            </a:r>
+            <a:endParaRPr lang="en-US" sz="700" dirty="0"/>
+          </a:p>
+        </p:txBody>
+      </p:sp>
+      <p:sp>
+        <p:nvSpPr>
+          <p:cNvPr id="23" name="Shape 21"/>
           <p:cNvSpPr/>
           <p:nvPr/>
         </p:nvSpPr>
@@ -13266,7 +13305,7 @@
       </p:sp>
       <p:sp>
         <p:nvSpPr>
-          <p:cNvPr id="23" name="Text 21"/>
+          <p:cNvPr id="24" name="Text 22"/>
           <p:cNvSpPr/>
           <p:nvPr/>
         </p:nvSpPr>
@@ -13305,7 +13344,7 @@
       </p:sp>
       <p:sp>
         <p:nvSpPr>
-          <p:cNvPr id="24" name="Text 22"/>
+          <p:cNvPr id="25" name="Text 23"/>
           <p:cNvSpPr/>
           <p:nvPr/>
         </p:nvSpPr>
@@ -13336,48 +13375,9 @@
                 <a:ea typeface="Calibri" pitchFamily="34" charset="-122"/>
                 <a:cs typeface="Calibri" pitchFamily="34" charset="-120"/>
               </a:rPr>
-              <a:t>ongoing action</a:t>
+              <a:t>ongoing action (verb)</a:t>
             </a:r>
             <a:endParaRPr lang="en-US" sz="850" dirty="0"/>
-          </a:p>
-        </p:txBody>
-      </p:sp>
-      <p:sp>
-        <p:nvSpPr>
-          <p:cNvPr id="25" name="Text 23"/>
-          <p:cNvSpPr/>
-          <p:nvPr/>
-        </p:nvSpPr>
-        <p:spPr>
-          <a:xfrm>
-            <a:off x="6519672" y="2752344"/>
-            <a:ext cx="1828800" cy="182880"/>
-          </a:xfrm>
-          <a:prstGeom prst="rect">
-            <a:avLst/>
-          </a:prstGeom>
-          <a:noFill/>
-          <a:ln/>
-        </p:spPr>
-        <p:txBody>
-          <a:bodyPr wrap="square" lIns="0" tIns="0" rIns="0" bIns="0" rtlCol="0" anchor="t"/>
-          <a:lstStyle/>
-          <a:p>
-            <a:pPr algn="ctr" indent="0" marL="0">
-              <a:buNone/>
-            </a:pPr>
-            <a:r>
-              <a:rPr lang="en-US" sz="700" i="1" dirty="0">
-                <a:solidFill>
-                  <a:srgbClr val="94A3B8"/>
-                </a:solidFill>
-                <a:latin typeface="Calibri" pitchFamily="34" charset="0"/>
-                <a:ea typeface="Calibri" pitchFamily="34" charset="-122"/>
-                <a:cs typeface="Calibri" pitchFamily="34" charset="-120"/>
-              </a:rPr>
-              <a:t>'e' dropped before vowel suffix</a:t>
-            </a:r>
-            <a:endParaRPr lang="en-US" sz="700" dirty="0"/>
           </a:p>
         </p:txBody>
       </p:sp>
@@ -14360,7 +14360,7 @@
                 <a:ea typeface="Calibri" pitchFamily="34" charset="-122"/>
                 <a:cs typeface="Calibri" pitchFamily="34" charset="-120"/>
               </a:rPr>
-              <a:t>put in position</a:t>
+              <a:t>a position or location</a:t>
             </a:r>
             <a:endParaRPr lang="en-US" sz="850" dirty="0"/>
           </a:p>
@@ -14368,7 +14368,46 @@
       </p:sp>
       <p:sp>
         <p:nvSpPr>
-          <p:cNvPr id="22" name="Shape 20"/>
+          <p:cNvPr id="22" name="Text 20"/>
+          <p:cNvSpPr/>
+          <p:nvPr/>
+        </p:nvSpPr>
+        <p:spPr>
+          <a:xfrm>
+            <a:off x="4370832" y="2752344"/>
+            <a:ext cx="1828800" cy="182880"/>
+          </a:xfrm>
+          <a:prstGeom prst="rect">
+            <a:avLst/>
+          </a:prstGeom>
+          <a:noFill/>
+          <a:ln/>
+        </p:spPr>
+        <p:txBody>
+          <a:bodyPr wrap="square" lIns="0" tIns="0" rIns="0" bIns="0" rtlCol="0" anchor="t"/>
+          <a:lstStyle/>
+          <a:p>
+            <a:pPr algn="ctr" indent="0" marL="0">
+              <a:buNone/>
+            </a:pPr>
+            <a:r>
+              <a:rPr lang="en-US" sz="700" i="1" dirty="0">
+                <a:solidFill>
+                  <a:srgbClr val="94A3B8"/>
+                </a:solidFill>
+                <a:latin typeface="Calibri" pitchFamily="34" charset="0"/>
+                <a:ea typeface="Calibri" pitchFamily="34" charset="-122"/>
+                <a:cs typeface="Calibri" pitchFamily="34" charset="-120"/>
+              </a:rPr>
+              <a:t>'e' dropped before vowel suffix</a:t>
+            </a:r>
+            <a:endParaRPr lang="en-US" sz="700" dirty="0"/>
+          </a:p>
+        </p:txBody>
+      </p:sp>
+      <p:sp>
+        <p:nvSpPr>
+          <p:cNvPr id="23" name="Shape 21"/>
           <p:cNvSpPr/>
           <p:nvPr/>
         </p:nvSpPr>
@@ -14402,7 +14441,7 @@
       </p:sp>
       <p:sp>
         <p:nvSpPr>
-          <p:cNvPr id="23" name="Text 21"/>
+          <p:cNvPr id="24" name="Text 22"/>
           <p:cNvSpPr/>
           <p:nvPr/>
         </p:nvSpPr>
@@ -14441,7 +14480,7 @@
       </p:sp>
       <p:sp>
         <p:nvSpPr>
-          <p:cNvPr id="24" name="Text 22"/>
+          <p:cNvPr id="25" name="Text 23"/>
           <p:cNvSpPr/>
           <p:nvPr/>
         </p:nvSpPr>
@@ -14472,48 +14511,9 @@
                 <a:ea typeface="Calibri" pitchFamily="34" charset="-122"/>
                 <a:cs typeface="Calibri" pitchFamily="34" charset="-120"/>
               </a:rPr>
-              <a:t>ongoing action</a:t>
+              <a:t>ongoing action (verb)</a:t>
             </a:r>
             <a:endParaRPr lang="en-US" sz="850" dirty="0"/>
-          </a:p>
-        </p:txBody>
-      </p:sp>
-      <p:sp>
-        <p:nvSpPr>
-          <p:cNvPr id="25" name="Text 23"/>
-          <p:cNvSpPr/>
-          <p:nvPr/>
-        </p:nvSpPr>
-        <p:spPr>
-          <a:xfrm>
-            <a:off x="6519672" y="2752344"/>
-            <a:ext cx="1828800" cy="182880"/>
-          </a:xfrm>
-          <a:prstGeom prst="rect">
-            <a:avLst/>
-          </a:prstGeom>
-          <a:noFill/>
-          <a:ln/>
-        </p:spPr>
-        <p:txBody>
-          <a:bodyPr wrap="square" lIns="0" tIns="0" rIns="0" bIns="0" rtlCol="0" anchor="t"/>
-          <a:lstStyle/>
-          <a:p>
-            <a:pPr algn="ctr" indent="0" marL="0">
-              <a:buNone/>
-            </a:pPr>
-            <a:r>
-              <a:rPr lang="en-US" sz="700" i="1" dirty="0">
-                <a:solidFill>
-                  <a:srgbClr val="94A3B8"/>
-                </a:solidFill>
-                <a:latin typeface="Calibri" pitchFamily="34" charset="0"/>
-                <a:ea typeface="Calibri" pitchFamily="34" charset="-122"/>
-                <a:cs typeface="Calibri" pitchFamily="34" charset="-120"/>
-              </a:rPr>
-              <a:t>'e' dropped before vowel suffix</a:t>
-            </a:r>
-            <a:endParaRPr lang="en-US" sz="700" dirty="0"/>
           </a:p>
         </p:txBody>
       </p:sp>
@@ -14775,7 +14775,7 @@
                 <a:ea typeface="Trebuchet MS" pitchFamily="34" charset="-122"/>
                 <a:cs typeface="Trebuchet MS" pitchFamily="34" charset="-120"/>
               </a:rPr>
-              <a:t>pla</a:t>
+              <a:t>plac</a:t>
             </a:r>
             <a:endParaRPr lang="en-US" sz="1400" dirty="0"/>
           </a:p>
@@ -14880,7 +14880,7 @@
                 <a:ea typeface="Trebuchet MS" pitchFamily="34" charset="-122"/>
                 <a:cs typeface="Trebuchet MS" pitchFamily="34" charset="-120"/>
               </a:rPr>
-              <a:t>cing</a:t>
+              <a:t>ing</a:t>
             </a:r>
             <a:endParaRPr lang="en-US" sz="1400" dirty="0"/>
           </a:p>
@@ -15998,7 +15998,7 @@
                 <a:ea typeface="Calibri" pitchFamily="34" charset="-122"/>
                 <a:cs typeface="Calibri" pitchFamily="34" charset="-120"/>
               </a:rPr>
-              <a:t>put in position</a:t>
+              <a:t>a position or location</a:t>
             </a:r>
             <a:endParaRPr lang="en-US" sz="850" dirty="0"/>
           </a:p>
@@ -16006,7 +16006,46 @@
       </p:sp>
       <p:sp>
         <p:nvSpPr>
-          <p:cNvPr id="22" name="Shape 20"/>
+          <p:cNvPr id="22" name="Text 20"/>
+          <p:cNvSpPr/>
+          <p:nvPr/>
+        </p:nvSpPr>
+        <p:spPr>
+          <a:xfrm>
+            <a:off x="4370832" y="2752344"/>
+            <a:ext cx="1828800" cy="182880"/>
+          </a:xfrm>
+          <a:prstGeom prst="rect">
+            <a:avLst/>
+          </a:prstGeom>
+          <a:noFill/>
+          <a:ln/>
+        </p:spPr>
+        <p:txBody>
+          <a:bodyPr wrap="square" lIns="0" tIns="0" rIns="0" bIns="0" rtlCol="0" anchor="t"/>
+          <a:lstStyle/>
+          <a:p>
+            <a:pPr algn="ctr" indent="0" marL="0">
+              <a:buNone/>
+            </a:pPr>
+            <a:r>
+              <a:rPr lang="en-US" sz="700" i="1" dirty="0">
+                <a:solidFill>
+                  <a:srgbClr val="94A3B8"/>
+                </a:solidFill>
+                <a:latin typeface="Calibri" pitchFamily="34" charset="0"/>
+                <a:ea typeface="Calibri" pitchFamily="34" charset="-122"/>
+                <a:cs typeface="Calibri" pitchFamily="34" charset="-120"/>
+              </a:rPr>
+              <a:t>'e' dropped before vowel suffix</a:t>
+            </a:r>
+            <a:endParaRPr lang="en-US" sz="700" dirty="0"/>
+          </a:p>
+        </p:txBody>
+      </p:sp>
+      <p:sp>
+        <p:nvSpPr>
+          <p:cNvPr id="23" name="Shape 21"/>
           <p:cNvSpPr/>
           <p:nvPr/>
         </p:nvSpPr>
@@ -16040,7 +16079,7 @@
       </p:sp>
       <p:sp>
         <p:nvSpPr>
-          <p:cNvPr id="23" name="Text 21"/>
+          <p:cNvPr id="24" name="Text 22"/>
           <p:cNvSpPr/>
           <p:nvPr/>
         </p:nvSpPr>
@@ -16079,7 +16118,7 @@
       </p:sp>
       <p:sp>
         <p:nvSpPr>
-          <p:cNvPr id="24" name="Text 22"/>
+          <p:cNvPr id="25" name="Text 23"/>
           <p:cNvSpPr/>
           <p:nvPr/>
         </p:nvSpPr>
@@ -16110,48 +16149,9 @@
                 <a:ea typeface="Calibri" pitchFamily="34" charset="-122"/>
                 <a:cs typeface="Calibri" pitchFamily="34" charset="-120"/>
               </a:rPr>
-              <a:t>ongoing action</a:t>
+              <a:t>ongoing action (verb)</a:t>
             </a:r>
             <a:endParaRPr lang="en-US" sz="850" dirty="0"/>
-          </a:p>
-        </p:txBody>
-      </p:sp>
-      <p:sp>
-        <p:nvSpPr>
-          <p:cNvPr id="25" name="Text 23"/>
-          <p:cNvSpPr/>
-          <p:nvPr/>
-        </p:nvSpPr>
-        <p:spPr>
-          <a:xfrm>
-            <a:off x="6519672" y="2752344"/>
-            <a:ext cx="1828800" cy="182880"/>
-          </a:xfrm>
-          <a:prstGeom prst="rect">
-            <a:avLst/>
-          </a:prstGeom>
-          <a:noFill/>
-          <a:ln/>
-        </p:spPr>
-        <p:txBody>
-          <a:bodyPr wrap="square" lIns="0" tIns="0" rIns="0" bIns="0" rtlCol="0" anchor="t"/>
-          <a:lstStyle/>
-          <a:p>
-            <a:pPr algn="ctr" indent="0" marL="0">
-              <a:buNone/>
-            </a:pPr>
-            <a:r>
-              <a:rPr lang="en-US" sz="700" i="1" dirty="0">
-                <a:solidFill>
-                  <a:srgbClr val="94A3B8"/>
-                </a:solidFill>
-                <a:latin typeface="Calibri" pitchFamily="34" charset="0"/>
-                <a:ea typeface="Calibri" pitchFamily="34" charset="-122"/>
-                <a:cs typeface="Calibri" pitchFamily="34" charset="-120"/>
-              </a:rPr>
-              <a:t>'e' dropped before vowel suffix</a:t>
-            </a:r>
-            <a:endParaRPr lang="en-US" sz="700" dirty="0"/>
           </a:p>
         </p:txBody>
       </p:sp>
@@ -16413,7 +16413,7 @@
                 <a:ea typeface="Trebuchet MS" pitchFamily="34" charset="-122"/>
                 <a:cs typeface="Trebuchet MS" pitchFamily="34" charset="-120"/>
               </a:rPr>
-              <a:t>pla</a:t>
+              <a:t>plac</a:t>
             </a:r>
             <a:endParaRPr lang="en-US" sz="1400" dirty="0"/>
           </a:p>
@@ -16518,7 +16518,7 @@
                 <a:ea typeface="Trebuchet MS" pitchFamily="34" charset="-122"/>
                 <a:cs typeface="Trebuchet MS" pitchFamily="34" charset="-120"/>
               </a:rPr>
-              <a:t>cing</a:t>
+              <a:t>ing</a:t>
             </a:r>
             <a:endParaRPr lang="en-US" sz="1400" dirty="0"/>
           </a:p>
@@ -18504,7 +18504,7 @@
                 <a:ea typeface="Calibri" pitchFamily="34" charset="-122"/>
                 <a:cs typeface="Calibri" pitchFamily="34" charset="-120"/>
               </a:rPr>
-              <a:t>The museum curator said the ancient vase was </a:t>
+              <a:t>The coach said the players were </a:t>
             </a:r>
             <a:pPr algn="l" indent="0" marL="0">
               <a:buNone/>
@@ -18535,7 +18535,7 @@
                 <a:ea typeface="Calibri" pitchFamily="34" charset="-122"/>
                 <a:cs typeface="Calibri" pitchFamily="34" charset="-120"/>
               </a:rPr>
-              <a:t>, so finding a suitable </a:t>
+              <a:t>; however, the </a:t>
             </a:r>
             <a:pPr algn="l" indent="0" marL="0">
               <a:buNone/>
@@ -18552,7 +18552,7 @@
                 <a:ea typeface="Calibri" pitchFamily="34" charset="-122"/>
                 <a:cs typeface="Calibri" pitchFamily="34" charset="-120"/>
               </a:rPr>
-              <a:t>replacement</a:t>
+              <a:t>replaceable</a:t>
             </a:r>
             <a:pPr algn="l" indent="0" marL="0">
               <a:buNone/>
@@ -18566,7 +18566,7 @@
                 <a:ea typeface="Calibri" pitchFamily="34" charset="-122"/>
                 <a:cs typeface="Calibri" pitchFamily="34" charset="-120"/>
               </a:rPr>
-              <a:t> was impossible, and </a:t>
+              <a:t> equipment, including old jerseys, was </a:t>
             </a:r>
             <a:pPr algn="l" indent="0" marL="0">
               <a:buNone/>
@@ -18583,7 +18583,7 @@
                 <a:ea typeface="Calibri" pitchFamily="34" charset="-122"/>
                 <a:cs typeface="Calibri" pitchFamily="34" charset="-120"/>
               </a:rPr>
-              <a:t>replacing</a:t>
+              <a:t>replaced</a:t>
             </a:r>
             <a:pPr algn="l" indent="0" marL="0">
               <a:buNone/>
@@ -18597,7 +18597,7 @@
                 <a:ea typeface="Calibri" pitchFamily="34" charset="-122"/>
                 <a:cs typeface="Calibri" pitchFamily="34" charset="-120"/>
               </a:rPr>
-              <a:t> it with a copy would be dishonest.</a:t>
+              <a:t> before the finals.</a:t>
             </a:r>
             <a:endParaRPr lang="en-US" sz="1800" dirty="0"/>
           </a:p>
@@ -18880,7 +18880,7 @@
                 <a:ea typeface="Trebuchet MS" pitchFamily="34" charset="-122"/>
                 <a:cs typeface="Trebuchet MS" pitchFamily="34" charset="-120"/>
               </a:rPr>
-              <a:t>replacement</a:t>
+              <a:t>replaceable</a:t>
             </a:r>
             <a:endParaRPr lang="en-US" sz="1400" dirty="0"/>
           </a:p>
@@ -19008,7 +19008,7 @@
                 <a:ea typeface="Trebuchet MS" pitchFamily="34" charset="-122"/>
                 <a:cs typeface="Trebuchet MS" pitchFamily="34" charset="-120"/>
               </a:rPr>
-              <a:t>replacing</a:t>
+              <a:t>replaced</a:t>
             </a:r>
             <a:endParaRPr lang="en-US" sz="1400" dirty="0"/>
           </a:p>
@@ -20746,7 +20746,7 @@
                 <a:ea typeface="Calibri" pitchFamily="34" charset="-122"/>
                 <a:cs typeface="Calibri" pitchFamily="34" charset="-120"/>
               </a:rPr>
-              <a:t>put in position</a:t>
+              <a:t>a position or location</a:t>
             </a:r>
             <a:endParaRPr lang="en-US" sz="850" dirty="0"/>
           </a:p>
@@ -20866,57 +20866,150 @@
       </p:sp>
       <p:sp>
         <p:nvSpPr>
-          <p:cNvPr id="29" name="Text 27"/>
-          <p:cNvSpPr/>
-          <p:nvPr/>
-        </p:nvSpPr>
-        <p:spPr>
-          <a:xfrm>
-            <a:off x="6998818" y="2752344"/>
-            <a:ext cx="1581912" cy="182880"/>
-          </a:xfrm>
-          <a:prstGeom prst="rect">
-            <a:avLst/>
-          </a:prstGeom>
-          <a:noFill/>
-          <a:ln/>
-        </p:spPr>
-        <p:txBody>
-          <a:bodyPr wrap="square" lIns="0" tIns="0" rIns="0" bIns="0" rtlCol="0" anchor="t"/>
-          <a:lstStyle/>
-          <a:p>
-            <a:pPr algn="ctr" indent="0" marL="0">
-              <a:buNone/>
-            </a:pPr>
-            <a:r>
-              <a:rPr lang="en-US" sz="700" i="1" dirty="0">
-                <a:solidFill>
-                  <a:srgbClr val="94A3B8"/>
+          <p:cNvPr id="29" name="Shape 27"/>
+          <p:cNvSpPr/>
+          <p:nvPr/>
+        </p:nvSpPr>
+        <p:spPr>
+          <a:xfrm>
+            <a:off x="365760" y="3273552"/>
+            <a:ext cx="1371600" cy="658368"/>
+          </a:xfrm>
+          <a:prstGeom prst="rect">
+            <a:avLst>
+              <a:gd name="adj" fmla="val 8333"/>
+            </a:avLst>
+          </a:prstGeom>
+          <a:solidFill>
+            <a:srgbClr val="E2E8F0"/>
+          </a:solidFill>
+          <a:ln w="12700">
+            <a:solidFill>
+              <a:srgbClr val="E2E8F0"/>
+            </a:solidFill>
+            <a:prstDash val="solid"/>
+          </a:ln>
+        </p:spPr>
+      </p:sp>
+      <p:sp>
+        <p:nvSpPr>
+          <p:cNvPr id="30" name="Text 28"/>
+          <p:cNvSpPr/>
+          <p:nvPr/>
+        </p:nvSpPr>
+        <p:spPr>
+          <a:xfrm>
+            <a:off x="365760" y="3273552"/>
+            <a:ext cx="1371600" cy="658368"/>
+          </a:xfrm>
+          <a:prstGeom prst="rect">
+            <a:avLst/>
+          </a:prstGeom>
+          <a:noFill/>
+          <a:ln/>
+        </p:spPr>
+        <p:txBody>
+          <a:bodyPr wrap="square" lIns="0" tIns="0" rIns="0" bIns="0" rtlCol="0" anchor="ctr"/>
+          <a:lstStyle/>
+          <a:p>
+            <a:pPr algn="ctr" indent="0" marL="0">
+              <a:buNone/>
+            </a:pPr>
+            <a:r>
+              <a:rPr lang="en-US" sz="1100" b="1" dirty="0">
+                <a:solidFill>
+                  <a:srgbClr val="475569"/>
+                </a:solidFill>
+                <a:latin typeface="Trebuchet MS" pitchFamily="34" charset="0"/>
+                <a:ea typeface="Trebuchet MS" pitchFamily="34" charset="-122"/>
+                <a:cs typeface="Trebuchet MS" pitchFamily="34" charset="-120"/>
+              </a:rPr>
+              <a:t>Syllables</a:t>
+            </a:r>
+            <a:endParaRPr lang="en-US" sz="1100" dirty="0"/>
+          </a:p>
+        </p:txBody>
+      </p:sp>
+      <p:sp>
+        <p:nvSpPr>
+          <p:cNvPr id="31" name="Shape 29"/>
+          <p:cNvSpPr/>
+          <p:nvPr/>
+        </p:nvSpPr>
+        <p:spPr>
+          <a:xfrm>
+            <a:off x="1874520" y="3273552"/>
+            <a:ext cx="6903720" cy="658368"/>
+          </a:xfrm>
+          <a:prstGeom prst="rect">
+            <a:avLst>
+              <a:gd name="adj" fmla="val 8333"/>
+            </a:avLst>
+          </a:prstGeom>
+          <a:solidFill>
+            <a:srgbClr val="F8FAFC"/>
+          </a:solidFill>
+          <a:ln w="12700">
+            <a:solidFill>
+              <a:srgbClr val="E2E8F0"/>
+            </a:solidFill>
+            <a:prstDash val="dash"/>
+          </a:ln>
+        </p:spPr>
+      </p:sp>
+      <p:sp>
+        <p:nvSpPr>
+          <p:cNvPr id="32" name="Text 30"/>
+          <p:cNvSpPr/>
+          <p:nvPr/>
+        </p:nvSpPr>
+        <p:spPr>
+          <a:xfrm>
+            <a:off x="1874520" y="3273552"/>
+            <a:ext cx="6903720" cy="658368"/>
+          </a:xfrm>
+          <a:prstGeom prst="rect">
+            <a:avLst/>
+          </a:prstGeom>
+          <a:noFill/>
+          <a:ln/>
+        </p:spPr>
+        <p:txBody>
+          <a:bodyPr wrap="square" rtlCol="0" anchor="ctr"/>
+          <a:lstStyle/>
+          <a:p>
+            <a:pPr algn="ctr" indent="0" marL="0">
+              <a:buNone/>
+            </a:pPr>
+            <a:r>
+              <a:rPr lang="en-US" sz="1100" i="1" dirty="0">
+                <a:solidFill>
+                  <a:srgbClr val="CBD5E1"/>
                 </a:solidFill>
                 <a:latin typeface="Calibri" pitchFamily="34" charset="0"/>
                 <a:ea typeface="Calibri" pitchFamily="34" charset="-122"/>
                 <a:cs typeface="Calibri" pitchFamily="34" charset="-120"/>
               </a:rPr>
-              <a:t>'e' dropped before vowel suffix</a:t>
-            </a:r>
-            <a:endParaRPr lang="en-US" sz="700" dirty="0"/>
-          </a:p>
-        </p:txBody>
-      </p:sp>
-      <p:sp>
-        <p:nvSpPr>
-          <p:cNvPr id="30" name="Shape 28"/>
-          <p:cNvSpPr/>
-          <p:nvPr/>
-        </p:nvSpPr>
-        <p:spPr>
-          <a:xfrm>
-            <a:off x="365760" y="3273552"/>
-            <a:ext cx="1371600" cy="658368"/>
+              <a:t>Write here...</a:t>
+            </a:r>
+            <a:endParaRPr lang="en-US" sz="1100" dirty="0"/>
+          </a:p>
+        </p:txBody>
+      </p:sp>
+      <p:sp>
+        <p:nvSpPr>
+          <p:cNvPr id="33" name="Shape 31"/>
+          <p:cNvSpPr/>
+          <p:nvPr/>
+        </p:nvSpPr>
+        <p:spPr>
+          <a:xfrm>
+            <a:off x="365760" y="4096512"/>
+            <a:ext cx="1371600" cy="804672"/>
           </a:xfrm>
           <a:prstGeom prst="rect">
             <a:avLst>
-              <a:gd name="adj" fmla="val 8333"/>
+              <a:gd name="adj" fmla="val 6818"/>
             </a:avLst>
           </a:prstGeom>
           <a:solidFill>
@@ -20932,14 +21025,14 @@
       </p:sp>
       <p:sp>
         <p:nvSpPr>
-          <p:cNvPr id="31" name="Text 29"/>
-          <p:cNvSpPr/>
-          <p:nvPr/>
-        </p:nvSpPr>
-        <p:spPr>
-          <a:xfrm>
-            <a:off x="365760" y="3273552"/>
-            <a:ext cx="1371600" cy="658368"/>
+          <p:cNvPr id="34" name="Text 32"/>
+          <p:cNvSpPr/>
+          <p:nvPr/>
+        </p:nvSpPr>
+        <p:spPr>
+          <a:xfrm>
+            <a:off x="365760" y="4096512"/>
+            <a:ext cx="1371600" cy="804672"/>
           </a:xfrm>
           <a:prstGeom prst="rect">
             <a:avLst/>
@@ -20963,7 +21056,7 @@
                 <a:ea typeface="Trebuchet MS" pitchFamily="34" charset="-122"/>
                 <a:cs typeface="Trebuchet MS" pitchFamily="34" charset="-120"/>
               </a:rPr>
-              <a:t>Syllables</a:t>
+              <a:t>Phonemes</a:t>
             </a:r>
             <a:endParaRPr lang="en-US" sz="1100" dirty="0"/>
           </a:p>
@@ -20971,80 +21064,14 @@
       </p:sp>
       <p:sp>
         <p:nvSpPr>
-          <p:cNvPr id="32" name="Shape 30"/>
-          <p:cNvSpPr/>
-          <p:nvPr/>
-        </p:nvSpPr>
-        <p:spPr>
-          <a:xfrm>
-            <a:off x="1874520" y="3273552"/>
-            <a:ext cx="6903720" cy="658368"/>
-          </a:xfrm>
-          <a:prstGeom prst="rect">
-            <a:avLst>
-              <a:gd name="adj" fmla="val 8333"/>
-            </a:avLst>
-          </a:prstGeom>
-          <a:solidFill>
-            <a:srgbClr val="F8FAFC"/>
-          </a:solidFill>
-          <a:ln w="12700">
-            <a:solidFill>
-              <a:srgbClr val="E2E8F0"/>
-            </a:solidFill>
-            <a:prstDash val="dash"/>
-          </a:ln>
-        </p:spPr>
-      </p:sp>
-      <p:sp>
-        <p:nvSpPr>
-          <p:cNvPr id="33" name="Text 31"/>
-          <p:cNvSpPr/>
-          <p:nvPr/>
-        </p:nvSpPr>
-        <p:spPr>
-          <a:xfrm>
-            <a:off x="1874520" y="3273552"/>
-            <a:ext cx="6903720" cy="658368"/>
-          </a:xfrm>
-          <a:prstGeom prst="rect">
-            <a:avLst/>
-          </a:prstGeom>
-          <a:noFill/>
-          <a:ln/>
-        </p:spPr>
-        <p:txBody>
-          <a:bodyPr wrap="square" rtlCol="0" anchor="ctr"/>
-          <a:lstStyle/>
-          <a:p>
-            <a:pPr algn="ctr" indent="0" marL="0">
-              <a:buNone/>
-            </a:pPr>
-            <a:r>
-              <a:rPr lang="en-US" sz="1100" i="1" dirty="0">
-                <a:solidFill>
-                  <a:srgbClr val="CBD5E1"/>
-                </a:solidFill>
-                <a:latin typeface="Calibri" pitchFamily="34" charset="0"/>
-                <a:ea typeface="Calibri" pitchFamily="34" charset="-122"/>
-                <a:cs typeface="Calibri" pitchFamily="34" charset="-120"/>
-              </a:rPr>
-              <a:t>Write here...</a:t>
-            </a:r>
-            <a:endParaRPr lang="en-US" sz="1100" dirty="0"/>
-          </a:p>
-        </p:txBody>
-      </p:sp>
-      <p:sp>
-        <p:nvSpPr>
-          <p:cNvPr id="34" name="Shape 32"/>
-          <p:cNvSpPr/>
-          <p:nvPr/>
-        </p:nvSpPr>
-        <p:spPr>
-          <a:xfrm>
-            <a:off x="365760" y="4096512"/>
-            <a:ext cx="1371600" cy="804672"/>
+          <p:cNvPr id="35" name="Shape 33"/>
+          <p:cNvSpPr/>
+          <p:nvPr/>
+        </p:nvSpPr>
+        <p:spPr>
+          <a:xfrm>
+            <a:off x="1874520" y="4096512"/>
+            <a:ext cx="6903720" cy="804672"/>
           </a:xfrm>
           <a:prstGeom prst="rect">
             <a:avLst>
@@ -21052,85 +21079,19 @@
             </a:avLst>
           </a:prstGeom>
           <a:solidFill>
-            <a:srgbClr val="E2E8F0"/>
+            <a:srgbClr val="F8FAFC"/>
           </a:solidFill>
           <a:ln w="12700">
             <a:solidFill>
               <a:srgbClr val="E2E8F0"/>
             </a:solidFill>
-            <a:prstDash val="solid"/>
-          </a:ln>
-        </p:spPr>
-      </p:sp>
-      <p:sp>
-        <p:nvSpPr>
-          <p:cNvPr id="35" name="Text 33"/>
-          <p:cNvSpPr/>
-          <p:nvPr/>
-        </p:nvSpPr>
-        <p:spPr>
-          <a:xfrm>
-            <a:off x="365760" y="4096512"/>
-            <a:ext cx="1371600" cy="804672"/>
-          </a:xfrm>
-          <a:prstGeom prst="rect">
-            <a:avLst/>
-          </a:prstGeom>
-          <a:noFill/>
-          <a:ln/>
-        </p:spPr>
-        <p:txBody>
-          <a:bodyPr wrap="square" lIns="0" tIns="0" rIns="0" bIns="0" rtlCol="0" anchor="ctr"/>
-          <a:lstStyle/>
-          <a:p>
-            <a:pPr algn="ctr" indent="0" marL="0">
-              <a:buNone/>
-            </a:pPr>
-            <a:r>
-              <a:rPr lang="en-US" sz="1100" b="1" dirty="0">
-                <a:solidFill>
-                  <a:srgbClr val="475569"/>
-                </a:solidFill>
-                <a:latin typeface="Trebuchet MS" pitchFamily="34" charset="0"/>
-                <a:ea typeface="Trebuchet MS" pitchFamily="34" charset="-122"/>
-                <a:cs typeface="Trebuchet MS" pitchFamily="34" charset="-120"/>
-              </a:rPr>
-              <a:t>Phonemes</a:t>
-            </a:r>
-            <a:endParaRPr lang="en-US" sz="1100" dirty="0"/>
-          </a:p>
-        </p:txBody>
-      </p:sp>
-      <p:sp>
-        <p:nvSpPr>
-          <p:cNvPr id="36" name="Shape 34"/>
-          <p:cNvSpPr/>
-          <p:nvPr/>
-        </p:nvSpPr>
-        <p:spPr>
-          <a:xfrm>
-            <a:off x="1874520" y="4096512"/>
-            <a:ext cx="6903720" cy="804672"/>
-          </a:xfrm>
-          <a:prstGeom prst="rect">
-            <a:avLst>
-              <a:gd name="adj" fmla="val 6818"/>
-            </a:avLst>
-          </a:prstGeom>
-          <a:solidFill>
-            <a:srgbClr val="F8FAFC"/>
-          </a:solidFill>
-          <a:ln w="12700">
-            <a:solidFill>
-              <a:srgbClr val="E2E8F0"/>
-            </a:solidFill>
             <a:prstDash val="dash"/>
           </a:ln>
         </p:spPr>
       </p:sp>
       <p:sp>
         <p:nvSpPr>
-          <p:cNvPr id="37" name="Text 35"/>
+          <p:cNvPr id="36" name="Text 34"/>
           <p:cNvSpPr/>
           <p:nvPr/>
         </p:nvSpPr>
@@ -22033,7 +21994,7 @@
                 <a:ea typeface="Calibri" pitchFamily="34" charset="-122"/>
                 <a:cs typeface="Calibri" pitchFamily="34" charset="-120"/>
               </a:rPr>
-              <a:t>put in position</a:t>
+              <a:t>a position or location</a:t>
             </a:r>
             <a:endParaRPr lang="en-US" sz="850" dirty="0"/>
           </a:p>
@@ -22153,46 +22114,7 @@
       </p:sp>
       <p:sp>
         <p:nvSpPr>
-          <p:cNvPr id="29" name="Text 27"/>
-          <p:cNvSpPr/>
-          <p:nvPr/>
-        </p:nvSpPr>
-        <p:spPr>
-          <a:xfrm>
-            <a:off x="6998818" y="2752344"/>
-            <a:ext cx="1581912" cy="182880"/>
-          </a:xfrm>
-          <a:prstGeom prst="rect">
-            <a:avLst/>
-          </a:prstGeom>
-          <a:noFill/>
-          <a:ln/>
-        </p:spPr>
-        <p:txBody>
-          <a:bodyPr wrap="square" lIns="0" tIns="0" rIns="0" bIns="0" rtlCol="0" anchor="t"/>
-          <a:lstStyle/>
-          <a:p>
-            <a:pPr algn="ctr" indent="0" marL="0">
-              <a:buNone/>
-            </a:pPr>
-            <a:r>
-              <a:rPr lang="en-US" sz="700" i="1" dirty="0">
-                <a:solidFill>
-                  <a:srgbClr val="94A3B8"/>
-                </a:solidFill>
-                <a:latin typeface="Calibri" pitchFamily="34" charset="0"/>
-                <a:ea typeface="Calibri" pitchFamily="34" charset="-122"/>
-                <a:cs typeface="Calibri" pitchFamily="34" charset="-120"/>
-              </a:rPr>
-              <a:t>'e' dropped before vowel suffix</a:t>
-            </a:r>
-            <a:endParaRPr lang="en-US" sz="700" dirty="0"/>
-          </a:p>
-        </p:txBody>
-      </p:sp>
-      <p:sp>
-        <p:nvSpPr>
-          <p:cNvPr id="30" name="Shape 28"/>
+          <p:cNvPr id="29" name="Shape 27"/>
           <p:cNvSpPr/>
           <p:nvPr/>
         </p:nvSpPr>
@@ -22219,7 +22141,7 @@
       </p:sp>
       <p:sp>
         <p:nvSpPr>
-          <p:cNvPr id="31" name="Text 29"/>
+          <p:cNvPr id="30" name="Text 28"/>
           <p:cNvSpPr/>
           <p:nvPr/>
         </p:nvSpPr>
@@ -22258,7 +22180,7 @@
       </p:sp>
       <p:sp>
         <p:nvSpPr>
-          <p:cNvPr id="32" name="Shape 30"/>
+          <p:cNvPr id="31" name="Shape 29"/>
           <p:cNvSpPr/>
           <p:nvPr/>
         </p:nvSpPr>
@@ -22285,7 +22207,7 @@
       </p:sp>
       <p:sp>
         <p:nvSpPr>
-          <p:cNvPr id="33" name="Shape 31"/>
+          <p:cNvPr id="32" name="Shape 30"/>
           <p:cNvSpPr/>
           <p:nvPr/>
         </p:nvSpPr>
@@ -22312,7 +22234,7 @@
       </p:sp>
       <p:sp>
         <p:nvSpPr>
-          <p:cNvPr id="34" name="Text 32"/>
+          <p:cNvPr id="33" name="Text 31"/>
           <p:cNvSpPr/>
           <p:nvPr/>
         </p:nvSpPr>
@@ -22351,7 +22273,7 @@
       </p:sp>
       <p:sp>
         <p:nvSpPr>
-          <p:cNvPr id="35" name="Text 33"/>
+          <p:cNvPr id="34" name="Text 32"/>
           <p:cNvSpPr/>
           <p:nvPr/>
         </p:nvSpPr>
@@ -22390,7 +22312,7 @@
       </p:sp>
       <p:sp>
         <p:nvSpPr>
-          <p:cNvPr id="36" name="Shape 34"/>
+          <p:cNvPr id="35" name="Shape 33"/>
           <p:cNvSpPr/>
           <p:nvPr/>
         </p:nvSpPr>
@@ -22417,7 +22339,7 @@
       </p:sp>
       <p:sp>
         <p:nvSpPr>
-          <p:cNvPr id="37" name="Text 35"/>
+          <p:cNvPr id="36" name="Text 34"/>
           <p:cNvSpPr/>
           <p:nvPr/>
         </p:nvSpPr>
@@ -22456,7 +22378,7 @@
       </p:sp>
       <p:sp>
         <p:nvSpPr>
-          <p:cNvPr id="38" name="Text 36"/>
+          <p:cNvPr id="37" name="Text 35"/>
           <p:cNvSpPr/>
           <p:nvPr/>
         </p:nvSpPr>
@@ -22495,7 +22417,7 @@
       </p:sp>
       <p:sp>
         <p:nvSpPr>
-          <p:cNvPr id="39" name="Shape 37"/>
+          <p:cNvPr id="38" name="Shape 36"/>
           <p:cNvSpPr/>
           <p:nvPr/>
         </p:nvSpPr>
@@ -22522,7 +22444,7 @@
       </p:sp>
       <p:sp>
         <p:nvSpPr>
-          <p:cNvPr id="40" name="Text 38"/>
+          <p:cNvPr id="39" name="Text 37"/>
           <p:cNvSpPr/>
           <p:nvPr/>
         </p:nvSpPr>
@@ -22561,7 +22483,7 @@
       </p:sp>
       <p:sp>
         <p:nvSpPr>
-          <p:cNvPr id="41" name="Text 39"/>
+          <p:cNvPr id="40" name="Text 38"/>
           <p:cNvSpPr/>
           <p:nvPr/>
         </p:nvSpPr>
@@ -22600,7 +22522,7 @@
       </p:sp>
       <p:sp>
         <p:nvSpPr>
-          <p:cNvPr id="42" name="Shape 40"/>
+          <p:cNvPr id="41" name="Shape 39"/>
           <p:cNvSpPr/>
           <p:nvPr/>
         </p:nvSpPr>
@@ -22627,7 +22549,7 @@
       </p:sp>
       <p:sp>
         <p:nvSpPr>
-          <p:cNvPr id="43" name="Text 41"/>
+          <p:cNvPr id="42" name="Text 40"/>
           <p:cNvSpPr/>
           <p:nvPr/>
         </p:nvSpPr>
@@ -22666,7 +22588,7 @@
       </p:sp>
       <p:sp>
         <p:nvSpPr>
-          <p:cNvPr id="44" name="Text 42"/>
+          <p:cNvPr id="43" name="Text 41"/>
           <p:cNvSpPr/>
           <p:nvPr/>
         </p:nvSpPr>
@@ -22705,7 +22627,7 @@
       </p:sp>
       <p:sp>
         <p:nvSpPr>
-          <p:cNvPr id="45" name="Shape 43"/>
+          <p:cNvPr id="44" name="Shape 42"/>
           <p:cNvSpPr/>
           <p:nvPr/>
         </p:nvSpPr>
@@ -22732,7 +22654,7 @@
       </p:sp>
       <p:sp>
         <p:nvSpPr>
-          <p:cNvPr id="46" name="Text 44"/>
+          <p:cNvPr id="45" name="Text 43"/>
           <p:cNvSpPr/>
           <p:nvPr/>
         </p:nvSpPr>
@@ -22771,7 +22693,7 @@
       </p:sp>
       <p:sp>
         <p:nvSpPr>
-          <p:cNvPr id="47" name="Shape 45"/>
+          <p:cNvPr id="46" name="Shape 44"/>
           <p:cNvSpPr/>
           <p:nvPr/>
         </p:nvSpPr>
@@ -22798,7 +22720,7 @@
       </p:sp>
       <p:sp>
         <p:nvSpPr>
-          <p:cNvPr id="48" name="Text 46"/>
+          <p:cNvPr id="47" name="Text 45"/>
           <p:cNvSpPr/>
           <p:nvPr/>
         </p:nvSpPr>
@@ -22837,7 +22759,7 @@
       </p:sp>
       <p:sp>
         <p:nvSpPr>
-          <p:cNvPr id="49" name="Shape 47"/>
+          <p:cNvPr id="48" name="Shape 46"/>
           <p:cNvSpPr/>
           <p:nvPr/>
         </p:nvSpPr>
@@ -22864,7 +22786,7 @@
       </p:sp>
       <p:sp>
         <p:nvSpPr>
-          <p:cNvPr id="50" name="Text 48"/>
+          <p:cNvPr id="49" name="Text 47"/>
           <p:cNvSpPr/>
           <p:nvPr/>
         </p:nvSpPr>
@@ -23767,7 +23689,7 @@
                 <a:ea typeface="Calibri" pitchFamily="34" charset="-122"/>
                 <a:cs typeface="Calibri" pitchFamily="34" charset="-120"/>
               </a:rPr>
-              <a:t>put in position</a:t>
+              <a:t>a position or location</a:t>
             </a:r>
             <a:endParaRPr lang="en-US" sz="850" dirty="0"/>
           </a:p>
@@ -23887,14 +23809,1214 @@
       </p:sp>
       <p:sp>
         <p:nvSpPr>
-          <p:cNvPr id="29" name="Text 27"/>
-          <p:cNvSpPr/>
-          <p:nvPr/>
-        </p:nvSpPr>
-        <p:spPr>
-          <a:xfrm>
-            <a:off x="6998818" y="2752344"/>
-            <a:ext cx="1581912" cy="182880"/>
+          <p:cNvPr id="29" name="Shape 27"/>
+          <p:cNvSpPr/>
+          <p:nvPr/>
+        </p:nvSpPr>
+        <p:spPr>
+          <a:xfrm>
+            <a:off x="365760" y="3273552"/>
+            <a:ext cx="1371600" cy="658368"/>
+          </a:xfrm>
+          <a:prstGeom prst="rect">
+            <a:avLst>
+              <a:gd name="adj" fmla="val 8333"/>
+            </a:avLst>
+          </a:prstGeom>
+          <a:solidFill>
+            <a:srgbClr val="E2E8F0"/>
+          </a:solidFill>
+          <a:ln w="12700">
+            <a:solidFill>
+              <a:srgbClr val="E2E8F0"/>
+            </a:solidFill>
+            <a:prstDash val="solid"/>
+          </a:ln>
+        </p:spPr>
+      </p:sp>
+      <p:sp>
+        <p:nvSpPr>
+          <p:cNvPr id="30" name="Text 28"/>
+          <p:cNvSpPr/>
+          <p:nvPr/>
+        </p:nvSpPr>
+        <p:spPr>
+          <a:xfrm>
+            <a:off x="365760" y="3273552"/>
+            <a:ext cx="1371600" cy="658368"/>
+          </a:xfrm>
+          <a:prstGeom prst="rect">
+            <a:avLst/>
+          </a:prstGeom>
+          <a:noFill/>
+          <a:ln/>
+        </p:spPr>
+        <p:txBody>
+          <a:bodyPr wrap="square" lIns="0" tIns="0" rIns="0" bIns="0" rtlCol="0" anchor="ctr"/>
+          <a:lstStyle/>
+          <a:p>
+            <a:pPr algn="ctr" indent="0" marL="0">
+              <a:buNone/>
+            </a:pPr>
+            <a:r>
+              <a:rPr lang="en-US" sz="1100" b="1" dirty="0">
+                <a:solidFill>
+                  <a:srgbClr val="475569"/>
+                </a:solidFill>
+                <a:latin typeface="Trebuchet MS" pitchFamily="34" charset="0"/>
+                <a:ea typeface="Trebuchet MS" pitchFamily="34" charset="-122"/>
+                <a:cs typeface="Trebuchet MS" pitchFamily="34" charset="-120"/>
+              </a:rPr>
+              <a:t>Syllables</a:t>
+            </a:r>
+            <a:endParaRPr lang="en-US" sz="1100" dirty="0"/>
+          </a:p>
+        </p:txBody>
+      </p:sp>
+      <p:sp>
+        <p:nvSpPr>
+          <p:cNvPr id="31" name="Shape 29"/>
+          <p:cNvSpPr/>
+          <p:nvPr/>
+        </p:nvSpPr>
+        <p:spPr>
+          <a:xfrm>
+            <a:off x="1874520" y="3273552"/>
+            <a:ext cx="6903720" cy="658368"/>
+          </a:xfrm>
+          <a:prstGeom prst="rect">
+            <a:avLst>
+              <a:gd name="adj" fmla="val 8333"/>
+            </a:avLst>
+          </a:prstGeom>
+          <a:solidFill>
+            <a:srgbClr val="CCFBF1"/>
+          </a:solidFill>
+          <a:ln w="12700">
+            <a:solidFill>
+              <a:srgbClr val="0D9488"/>
+            </a:solidFill>
+            <a:prstDash val="solid"/>
+          </a:ln>
+        </p:spPr>
+      </p:sp>
+      <p:sp>
+        <p:nvSpPr>
+          <p:cNvPr id="32" name="Shape 30"/>
+          <p:cNvSpPr/>
+          <p:nvPr/>
+        </p:nvSpPr>
+        <p:spPr>
+          <a:xfrm>
+            <a:off x="1978152" y="3364992"/>
+            <a:ext cx="1225296" cy="475488"/>
+          </a:xfrm>
+          <a:prstGeom prst="rect">
+            <a:avLst>
+              <a:gd name="adj" fmla="val 9615"/>
+            </a:avLst>
+          </a:prstGeom>
+          <a:solidFill>
+            <a:srgbClr val="FFFFFF"/>
+          </a:solidFill>
+          <a:ln w="12700">
+            <a:solidFill>
+              <a:srgbClr val="0D9488"/>
+            </a:solidFill>
+            <a:prstDash val="solid"/>
+          </a:ln>
+        </p:spPr>
+      </p:sp>
+      <p:sp>
+        <p:nvSpPr>
+          <p:cNvPr id="33" name="Text 31"/>
+          <p:cNvSpPr/>
+          <p:nvPr/>
+        </p:nvSpPr>
+        <p:spPr>
+          <a:xfrm>
+            <a:off x="1978152" y="3364992"/>
+            <a:ext cx="1225296" cy="475488"/>
+          </a:xfrm>
+          <a:prstGeom prst="rect">
+            <a:avLst/>
+          </a:prstGeom>
+          <a:noFill/>
+          <a:ln/>
+        </p:spPr>
+        <p:txBody>
+          <a:bodyPr wrap="square" lIns="0" tIns="0" rIns="0" bIns="0" rtlCol="0" anchor="ctr"/>
+          <a:lstStyle/>
+          <a:p>
+            <a:pPr algn="ctr" indent="0" marL="0">
+              <a:buNone/>
+            </a:pPr>
+            <a:r>
+              <a:rPr lang="en-US" sz="1400" b="1" dirty="0">
+                <a:solidFill>
+                  <a:srgbClr val="0D9488"/>
+                </a:solidFill>
+                <a:latin typeface="Trebuchet MS" pitchFamily="34" charset="0"/>
+                <a:ea typeface="Trebuchet MS" pitchFamily="34" charset="-122"/>
+                <a:cs typeface="Trebuchet MS" pitchFamily="34" charset="-120"/>
+              </a:rPr>
+              <a:t>ir</a:t>
+            </a:r>
+            <a:endParaRPr lang="en-US" sz="1400" dirty="0"/>
+          </a:p>
+        </p:txBody>
+      </p:sp>
+      <p:sp>
+        <p:nvSpPr>
+          <p:cNvPr id="34" name="Text 32"/>
+          <p:cNvSpPr/>
+          <p:nvPr/>
+        </p:nvSpPr>
+        <p:spPr>
+          <a:xfrm>
+            <a:off x="3203448" y="3364992"/>
+            <a:ext cx="76200" cy="475488"/>
+          </a:xfrm>
+          <a:prstGeom prst="rect">
+            <a:avLst/>
+          </a:prstGeom>
+          <a:noFill/>
+          <a:ln/>
+        </p:spPr>
+        <p:txBody>
+          <a:bodyPr wrap="square" lIns="0" tIns="0" rIns="0" bIns="0" rtlCol="0" anchor="ctr"/>
+          <a:lstStyle/>
+          <a:p>
+            <a:pPr algn="ctr" indent="0" marL="0">
+              <a:buNone/>
+            </a:pPr>
+            <a:r>
+              <a:rPr lang="en-US" sz="1600" b="1" dirty="0">
+                <a:solidFill>
+                  <a:srgbClr val="0D9488"/>
+                </a:solidFill>
+                <a:latin typeface="Trebuchet MS" pitchFamily="34" charset="0"/>
+                <a:ea typeface="Trebuchet MS" pitchFamily="34" charset="-122"/>
+                <a:cs typeface="Trebuchet MS" pitchFamily="34" charset="-120"/>
+              </a:rPr>
+              <a:t>·</a:t>
+            </a:r>
+            <a:endParaRPr lang="en-US" sz="1600" dirty="0"/>
+          </a:p>
+        </p:txBody>
+      </p:sp>
+      <p:sp>
+        <p:nvSpPr>
+          <p:cNvPr id="35" name="Shape 33"/>
+          <p:cNvSpPr/>
+          <p:nvPr/>
+        </p:nvSpPr>
+        <p:spPr>
+          <a:xfrm>
+            <a:off x="3279648" y="3364992"/>
+            <a:ext cx="1225296" cy="475488"/>
+          </a:xfrm>
+          <a:prstGeom prst="rect">
+            <a:avLst>
+              <a:gd name="adj" fmla="val 9615"/>
+            </a:avLst>
+          </a:prstGeom>
+          <a:solidFill>
+            <a:srgbClr val="FFFFFF"/>
+          </a:solidFill>
+          <a:ln w="12700">
+            <a:solidFill>
+              <a:srgbClr val="0D9488"/>
+            </a:solidFill>
+            <a:prstDash val="solid"/>
+          </a:ln>
+        </p:spPr>
+      </p:sp>
+      <p:sp>
+        <p:nvSpPr>
+          <p:cNvPr id="36" name="Text 34"/>
+          <p:cNvSpPr/>
+          <p:nvPr/>
+        </p:nvSpPr>
+        <p:spPr>
+          <a:xfrm>
+            <a:off x="3279648" y="3364992"/>
+            <a:ext cx="1225296" cy="475488"/>
+          </a:xfrm>
+          <a:prstGeom prst="rect">
+            <a:avLst/>
+          </a:prstGeom>
+          <a:noFill/>
+          <a:ln/>
+        </p:spPr>
+        <p:txBody>
+          <a:bodyPr wrap="square" lIns="0" tIns="0" rIns="0" bIns="0" rtlCol="0" anchor="ctr"/>
+          <a:lstStyle/>
+          <a:p>
+            <a:pPr algn="ctr" indent="0" marL="0">
+              <a:buNone/>
+            </a:pPr>
+            <a:r>
+              <a:rPr lang="en-US" sz="1400" b="1" dirty="0">
+                <a:solidFill>
+                  <a:srgbClr val="0D9488"/>
+                </a:solidFill>
+                <a:latin typeface="Trebuchet MS" pitchFamily="34" charset="0"/>
+                <a:ea typeface="Trebuchet MS" pitchFamily="34" charset="-122"/>
+                <a:cs typeface="Trebuchet MS" pitchFamily="34" charset="-120"/>
+              </a:rPr>
+              <a:t>re</a:t>
+            </a:r>
+            <a:endParaRPr lang="en-US" sz="1400" dirty="0"/>
+          </a:p>
+        </p:txBody>
+      </p:sp>
+      <p:sp>
+        <p:nvSpPr>
+          <p:cNvPr id="37" name="Text 35"/>
+          <p:cNvSpPr/>
+          <p:nvPr/>
+        </p:nvSpPr>
+        <p:spPr>
+          <a:xfrm>
+            <a:off x="4504944" y="3364992"/>
+            <a:ext cx="76200" cy="475488"/>
+          </a:xfrm>
+          <a:prstGeom prst="rect">
+            <a:avLst/>
+          </a:prstGeom>
+          <a:noFill/>
+          <a:ln/>
+        </p:spPr>
+        <p:txBody>
+          <a:bodyPr wrap="square" lIns="0" tIns="0" rIns="0" bIns="0" rtlCol="0" anchor="ctr"/>
+          <a:lstStyle/>
+          <a:p>
+            <a:pPr algn="ctr" indent="0" marL="0">
+              <a:buNone/>
+            </a:pPr>
+            <a:r>
+              <a:rPr lang="en-US" sz="1600" b="1" dirty="0">
+                <a:solidFill>
+                  <a:srgbClr val="0D9488"/>
+                </a:solidFill>
+                <a:latin typeface="Trebuchet MS" pitchFamily="34" charset="0"/>
+                <a:ea typeface="Trebuchet MS" pitchFamily="34" charset="-122"/>
+                <a:cs typeface="Trebuchet MS" pitchFamily="34" charset="-120"/>
+              </a:rPr>
+              <a:t>·</a:t>
+            </a:r>
+            <a:endParaRPr lang="en-US" sz="1600" dirty="0"/>
+          </a:p>
+        </p:txBody>
+      </p:sp>
+      <p:sp>
+        <p:nvSpPr>
+          <p:cNvPr id="38" name="Shape 36"/>
+          <p:cNvSpPr/>
+          <p:nvPr/>
+        </p:nvSpPr>
+        <p:spPr>
+          <a:xfrm>
+            <a:off x="4581144" y="3364992"/>
+            <a:ext cx="1225296" cy="475488"/>
+          </a:xfrm>
+          <a:prstGeom prst="rect">
+            <a:avLst>
+              <a:gd name="adj" fmla="val 9615"/>
+            </a:avLst>
+          </a:prstGeom>
+          <a:solidFill>
+            <a:srgbClr val="FFFFFF"/>
+          </a:solidFill>
+          <a:ln w="12700">
+            <a:solidFill>
+              <a:srgbClr val="0D9488"/>
+            </a:solidFill>
+            <a:prstDash val="solid"/>
+          </a:ln>
+        </p:spPr>
+      </p:sp>
+      <p:sp>
+        <p:nvSpPr>
+          <p:cNvPr id="39" name="Text 37"/>
+          <p:cNvSpPr/>
+          <p:nvPr/>
+        </p:nvSpPr>
+        <p:spPr>
+          <a:xfrm>
+            <a:off x="4581144" y="3364992"/>
+            <a:ext cx="1225296" cy="475488"/>
+          </a:xfrm>
+          <a:prstGeom prst="rect">
+            <a:avLst/>
+          </a:prstGeom>
+          <a:noFill/>
+          <a:ln/>
+        </p:spPr>
+        <p:txBody>
+          <a:bodyPr wrap="square" lIns="0" tIns="0" rIns="0" bIns="0" rtlCol="0" anchor="ctr"/>
+          <a:lstStyle/>
+          <a:p>
+            <a:pPr algn="ctr" indent="0" marL="0">
+              <a:buNone/>
+            </a:pPr>
+            <a:r>
+              <a:rPr lang="en-US" sz="1400" b="1" dirty="0">
+                <a:solidFill>
+                  <a:srgbClr val="0D9488"/>
+                </a:solidFill>
+                <a:latin typeface="Trebuchet MS" pitchFamily="34" charset="0"/>
+                <a:ea typeface="Trebuchet MS" pitchFamily="34" charset="-122"/>
+                <a:cs typeface="Trebuchet MS" pitchFamily="34" charset="-120"/>
+              </a:rPr>
+              <a:t>place</a:t>
+            </a:r>
+            <a:endParaRPr lang="en-US" sz="1400" dirty="0"/>
+          </a:p>
+        </p:txBody>
+      </p:sp>
+      <p:sp>
+        <p:nvSpPr>
+          <p:cNvPr id="40" name="Text 38"/>
+          <p:cNvSpPr/>
+          <p:nvPr/>
+        </p:nvSpPr>
+        <p:spPr>
+          <a:xfrm>
+            <a:off x="5806440" y="3364992"/>
+            <a:ext cx="76200" cy="475488"/>
+          </a:xfrm>
+          <a:prstGeom prst="rect">
+            <a:avLst/>
+          </a:prstGeom>
+          <a:noFill/>
+          <a:ln/>
+        </p:spPr>
+        <p:txBody>
+          <a:bodyPr wrap="square" lIns="0" tIns="0" rIns="0" bIns="0" rtlCol="0" anchor="ctr"/>
+          <a:lstStyle/>
+          <a:p>
+            <a:pPr algn="ctr" indent="0" marL="0">
+              <a:buNone/>
+            </a:pPr>
+            <a:r>
+              <a:rPr lang="en-US" sz="1600" b="1" dirty="0">
+                <a:solidFill>
+                  <a:srgbClr val="0D9488"/>
+                </a:solidFill>
+                <a:latin typeface="Trebuchet MS" pitchFamily="34" charset="0"/>
+                <a:ea typeface="Trebuchet MS" pitchFamily="34" charset="-122"/>
+                <a:cs typeface="Trebuchet MS" pitchFamily="34" charset="-120"/>
+              </a:rPr>
+              <a:t>·</a:t>
+            </a:r>
+            <a:endParaRPr lang="en-US" sz="1600" dirty="0"/>
+          </a:p>
+        </p:txBody>
+      </p:sp>
+      <p:sp>
+        <p:nvSpPr>
+          <p:cNvPr id="41" name="Shape 39"/>
+          <p:cNvSpPr/>
+          <p:nvPr/>
+        </p:nvSpPr>
+        <p:spPr>
+          <a:xfrm>
+            <a:off x="5882640" y="3364992"/>
+            <a:ext cx="1225296" cy="475488"/>
+          </a:xfrm>
+          <a:prstGeom prst="rect">
+            <a:avLst>
+              <a:gd name="adj" fmla="val 9615"/>
+            </a:avLst>
+          </a:prstGeom>
+          <a:solidFill>
+            <a:srgbClr val="FFFFFF"/>
+          </a:solidFill>
+          <a:ln w="12700">
+            <a:solidFill>
+              <a:srgbClr val="0D9488"/>
+            </a:solidFill>
+            <a:prstDash val="solid"/>
+          </a:ln>
+        </p:spPr>
+      </p:sp>
+      <p:sp>
+        <p:nvSpPr>
+          <p:cNvPr id="42" name="Text 40"/>
+          <p:cNvSpPr/>
+          <p:nvPr/>
+        </p:nvSpPr>
+        <p:spPr>
+          <a:xfrm>
+            <a:off x="5882640" y="3364992"/>
+            <a:ext cx="1225296" cy="475488"/>
+          </a:xfrm>
+          <a:prstGeom prst="rect">
+            <a:avLst/>
+          </a:prstGeom>
+          <a:noFill/>
+          <a:ln/>
+        </p:spPr>
+        <p:txBody>
+          <a:bodyPr wrap="square" lIns="0" tIns="0" rIns="0" bIns="0" rtlCol="0" anchor="ctr"/>
+          <a:lstStyle/>
+          <a:p>
+            <a:pPr algn="ctr" indent="0" marL="0">
+              <a:buNone/>
+            </a:pPr>
+            <a:r>
+              <a:rPr lang="en-US" sz="1400" b="1" dirty="0">
+                <a:solidFill>
+                  <a:srgbClr val="0D9488"/>
+                </a:solidFill>
+                <a:latin typeface="Trebuchet MS" pitchFamily="34" charset="0"/>
+                <a:ea typeface="Trebuchet MS" pitchFamily="34" charset="-122"/>
+                <a:cs typeface="Trebuchet MS" pitchFamily="34" charset="-120"/>
+              </a:rPr>
+              <a:t>a</a:t>
+            </a:r>
+            <a:endParaRPr lang="en-US" sz="1400" dirty="0"/>
+          </a:p>
+        </p:txBody>
+      </p:sp>
+      <p:sp>
+        <p:nvSpPr>
+          <p:cNvPr id="43" name="Text 41"/>
+          <p:cNvSpPr/>
+          <p:nvPr/>
+        </p:nvSpPr>
+        <p:spPr>
+          <a:xfrm>
+            <a:off x="7107936" y="3364992"/>
+            <a:ext cx="76200" cy="475488"/>
+          </a:xfrm>
+          <a:prstGeom prst="rect">
+            <a:avLst/>
+          </a:prstGeom>
+          <a:noFill/>
+          <a:ln/>
+        </p:spPr>
+        <p:txBody>
+          <a:bodyPr wrap="square" lIns="0" tIns="0" rIns="0" bIns="0" rtlCol="0" anchor="ctr"/>
+          <a:lstStyle/>
+          <a:p>
+            <a:pPr algn="ctr" indent="0" marL="0">
+              <a:buNone/>
+            </a:pPr>
+            <a:r>
+              <a:rPr lang="en-US" sz="1600" b="1" dirty="0">
+                <a:solidFill>
+                  <a:srgbClr val="0D9488"/>
+                </a:solidFill>
+                <a:latin typeface="Trebuchet MS" pitchFamily="34" charset="0"/>
+                <a:ea typeface="Trebuchet MS" pitchFamily="34" charset="-122"/>
+                <a:cs typeface="Trebuchet MS" pitchFamily="34" charset="-120"/>
+              </a:rPr>
+              <a:t>·</a:t>
+            </a:r>
+            <a:endParaRPr lang="en-US" sz="1600" dirty="0"/>
+          </a:p>
+        </p:txBody>
+      </p:sp>
+      <p:sp>
+        <p:nvSpPr>
+          <p:cNvPr id="44" name="Shape 42"/>
+          <p:cNvSpPr/>
+          <p:nvPr/>
+        </p:nvSpPr>
+        <p:spPr>
+          <a:xfrm>
+            <a:off x="7184136" y="3364992"/>
+            <a:ext cx="1225296" cy="475488"/>
+          </a:xfrm>
+          <a:prstGeom prst="rect">
+            <a:avLst>
+              <a:gd name="adj" fmla="val 9615"/>
+            </a:avLst>
+          </a:prstGeom>
+          <a:solidFill>
+            <a:srgbClr val="FFFFFF"/>
+          </a:solidFill>
+          <a:ln w="12700">
+            <a:solidFill>
+              <a:srgbClr val="0D9488"/>
+            </a:solidFill>
+            <a:prstDash val="solid"/>
+          </a:ln>
+        </p:spPr>
+      </p:sp>
+      <p:sp>
+        <p:nvSpPr>
+          <p:cNvPr id="45" name="Text 43"/>
+          <p:cNvSpPr/>
+          <p:nvPr/>
+        </p:nvSpPr>
+        <p:spPr>
+          <a:xfrm>
+            <a:off x="7184136" y="3364992"/>
+            <a:ext cx="1225296" cy="475488"/>
+          </a:xfrm>
+          <a:prstGeom prst="rect">
+            <a:avLst/>
+          </a:prstGeom>
+          <a:noFill/>
+          <a:ln/>
+        </p:spPr>
+        <p:txBody>
+          <a:bodyPr wrap="square" lIns="0" tIns="0" rIns="0" bIns="0" rtlCol="0" anchor="ctr"/>
+          <a:lstStyle/>
+          <a:p>
+            <a:pPr algn="ctr" indent="0" marL="0">
+              <a:buNone/>
+            </a:pPr>
+            <a:r>
+              <a:rPr lang="en-US" sz="1400" b="1" dirty="0">
+                <a:solidFill>
+                  <a:srgbClr val="0D9488"/>
+                </a:solidFill>
+                <a:latin typeface="Trebuchet MS" pitchFamily="34" charset="0"/>
+                <a:ea typeface="Trebuchet MS" pitchFamily="34" charset="-122"/>
+                <a:cs typeface="Trebuchet MS" pitchFamily="34" charset="-120"/>
+              </a:rPr>
+              <a:t>ble</a:t>
+            </a:r>
+            <a:endParaRPr lang="en-US" sz="1400" dirty="0"/>
+          </a:p>
+        </p:txBody>
+      </p:sp>
+      <p:sp>
+        <p:nvSpPr>
+          <p:cNvPr id="46" name="Shape 44"/>
+          <p:cNvSpPr/>
+          <p:nvPr/>
+        </p:nvSpPr>
+        <p:spPr>
+          <a:xfrm>
+            <a:off x="365760" y="4096512"/>
+            <a:ext cx="1371600" cy="804672"/>
+          </a:xfrm>
+          <a:prstGeom prst="rect">
+            <a:avLst>
+              <a:gd name="adj" fmla="val 6818"/>
+            </a:avLst>
+          </a:prstGeom>
+          <a:solidFill>
+            <a:srgbClr val="E2E8F0"/>
+          </a:solidFill>
+          <a:ln w="12700">
+            <a:solidFill>
+              <a:srgbClr val="E2E8F0"/>
+            </a:solidFill>
+            <a:prstDash val="solid"/>
+          </a:ln>
+        </p:spPr>
+      </p:sp>
+      <p:sp>
+        <p:nvSpPr>
+          <p:cNvPr id="47" name="Text 45"/>
+          <p:cNvSpPr/>
+          <p:nvPr/>
+        </p:nvSpPr>
+        <p:spPr>
+          <a:xfrm>
+            <a:off x="365760" y="4096512"/>
+            <a:ext cx="1371600" cy="804672"/>
+          </a:xfrm>
+          <a:prstGeom prst="rect">
+            <a:avLst/>
+          </a:prstGeom>
+          <a:noFill/>
+          <a:ln/>
+        </p:spPr>
+        <p:txBody>
+          <a:bodyPr wrap="square" lIns="0" tIns="0" rIns="0" bIns="0" rtlCol="0" anchor="ctr"/>
+          <a:lstStyle/>
+          <a:p>
+            <a:pPr algn="ctr" indent="0" marL="0">
+              <a:buNone/>
+            </a:pPr>
+            <a:r>
+              <a:rPr lang="en-US" sz="1100" b="1" dirty="0">
+                <a:solidFill>
+                  <a:srgbClr val="475569"/>
+                </a:solidFill>
+                <a:latin typeface="Trebuchet MS" pitchFamily="34" charset="0"/>
+                <a:ea typeface="Trebuchet MS" pitchFamily="34" charset="-122"/>
+                <a:cs typeface="Trebuchet MS" pitchFamily="34" charset="-120"/>
+              </a:rPr>
+              <a:t>Phonemes</a:t>
+            </a:r>
+            <a:endParaRPr lang="en-US" sz="1100" dirty="0"/>
+          </a:p>
+        </p:txBody>
+      </p:sp>
+      <p:sp>
+        <p:nvSpPr>
+          <p:cNvPr id="48" name="Shape 46"/>
+          <p:cNvSpPr/>
+          <p:nvPr/>
+        </p:nvSpPr>
+        <p:spPr>
+          <a:xfrm>
+            <a:off x="1874520" y="4096512"/>
+            <a:ext cx="6903720" cy="804672"/>
+          </a:xfrm>
+          <a:prstGeom prst="rect">
+            <a:avLst>
+              <a:gd name="adj" fmla="val 6818"/>
+            </a:avLst>
+          </a:prstGeom>
+          <a:solidFill>
+            <a:srgbClr val="FCE7F3"/>
+          </a:solidFill>
+          <a:ln w="12700">
+            <a:solidFill>
+              <a:srgbClr val="DB2777"/>
+            </a:solidFill>
+            <a:prstDash val="solid"/>
+          </a:ln>
+        </p:spPr>
+      </p:sp>
+      <p:sp>
+        <p:nvSpPr>
+          <p:cNvPr id="49" name="Shape 47"/>
+          <p:cNvSpPr/>
+          <p:nvPr/>
+        </p:nvSpPr>
+        <p:spPr>
+          <a:xfrm>
+            <a:off x="1952244" y="4169664"/>
+            <a:ext cx="543652" cy="384048"/>
+          </a:xfrm>
+          <a:prstGeom prst="rect">
+            <a:avLst>
+              <a:gd name="adj" fmla="val 9524"/>
+            </a:avLst>
+          </a:prstGeom>
+          <a:solidFill>
+            <a:srgbClr val="FFFFFF"/>
+          </a:solidFill>
+          <a:ln w="12700">
+            <a:solidFill>
+              <a:srgbClr val="DB2777"/>
+            </a:solidFill>
+            <a:prstDash val="solid"/>
+          </a:ln>
+        </p:spPr>
+      </p:sp>
+      <p:sp>
+        <p:nvSpPr>
+          <p:cNvPr id="50" name="Text 48"/>
+          <p:cNvSpPr/>
+          <p:nvPr/>
+        </p:nvSpPr>
+        <p:spPr>
+          <a:xfrm>
+            <a:off x="1952244" y="4169664"/>
+            <a:ext cx="543652" cy="384048"/>
+          </a:xfrm>
+          <a:prstGeom prst="rect">
+            <a:avLst/>
+          </a:prstGeom>
+          <a:noFill/>
+          <a:ln/>
+        </p:spPr>
+        <p:txBody>
+          <a:bodyPr wrap="square" lIns="0" tIns="0" rIns="0" bIns="0" rtlCol="0" anchor="ctr"/>
+          <a:lstStyle/>
+          <a:p>
+            <a:pPr algn="ctr" indent="0" marL="0">
+              <a:buNone/>
+            </a:pPr>
+            <a:r>
+              <a:rPr lang="en-US" sz="900" b="1" dirty="0">
+                <a:solidFill>
+                  <a:srgbClr val="9D174D"/>
+                </a:solidFill>
+                <a:latin typeface="Trebuchet MS" pitchFamily="34" charset="0"/>
+                <a:ea typeface="Trebuchet MS" pitchFamily="34" charset="-122"/>
+                <a:cs typeface="Trebuchet MS" pitchFamily="34" charset="-120"/>
+              </a:rPr>
+              <a:t>i</a:t>
+            </a:r>
+            <a:endParaRPr lang="en-US" sz="900" dirty="0"/>
+          </a:p>
+        </p:txBody>
+      </p:sp>
+      <p:sp>
+        <p:nvSpPr>
+          <p:cNvPr id="51" name="Shape 49"/>
+          <p:cNvSpPr/>
+          <p:nvPr/>
+        </p:nvSpPr>
+        <p:spPr>
+          <a:xfrm>
+            <a:off x="2546188" y="4169664"/>
+            <a:ext cx="543652" cy="384048"/>
+          </a:xfrm>
+          <a:prstGeom prst="rect">
+            <a:avLst>
+              <a:gd name="adj" fmla="val 9524"/>
+            </a:avLst>
+          </a:prstGeom>
+          <a:solidFill>
+            <a:srgbClr val="FFFFFF"/>
+          </a:solidFill>
+          <a:ln w="12700">
+            <a:solidFill>
+              <a:srgbClr val="DB2777"/>
+            </a:solidFill>
+            <a:prstDash val="solid"/>
+          </a:ln>
+        </p:spPr>
+      </p:sp>
+      <p:sp>
+        <p:nvSpPr>
+          <p:cNvPr id="52" name="Text 50"/>
+          <p:cNvSpPr/>
+          <p:nvPr/>
+        </p:nvSpPr>
+        <p:spPr>
+          <a:xfrm>
+            <a:off x="2546188" y="4169664"/>
+            <a:ext cx="543652" cy="384048"/>
+          </a:xfrm>
+          <a:prstGeom prst="rect">
+            <a:avLst/>
+          </a:prstGeom>
+          <a:noFill/>
+          <a:ln/>
+        </p:spPr>
+        <p:txBody>
+          <a:bodyPr wrap="square" lIns="0" tIns="0" rIns="0" bIns="0" rtlCol="0" anchor="ctr"/>
+          <a:lstStyle/>
+          <a:p>
+            <a:pPr algn="ctr" indent="0" marL="0">
+              <a:buNone/>
+            </a:pPr>
+            <a:r>
+              <a:rPr lang="en-US" sz="900" b="1" dirty="0">
+                <a:solidFill>
+                  <a:srgbClr val="9D174D"/>
+                </a:solidFill>
+                <a:latin typeface="Trebuchet MS" pitchFamily="34" charset="0"/>
+                <a:ea typeface="Trebuchet MS" pitchFamily="34" charset="-122"/>
+                <a:cs typeface="Trebuchet MS" pitchFamily="34" charset="-120"/>
+              </a:rPr>
+              <a:t>r</a:t>
+            </a:r>
+            <a:endParaRPr lang="en-US" sz="900" dirty="0"/>
+          </a:p>
+        </p:txBody>
+      </p:sp>
+      <p:sp>
+        <p:nvSpPr>
+          <p:cNvPr id="53" name="Shape 51"/>
+          <p:cNvSpPr/>
+          <p:nvPr/>
+        </p:nvSpPr>
+        <p:spPr>
+          <a:xfrm>
+            <a:off x="3140133" y="4169664"/>
+            <a:ext cx="543652" cy="384048"/>
+          </a:xfrm>
+          <a:prstGeom prst="rect">
+            <a:avLst>
+              <a:gd name="adj" fmla="val 9524"/>
+            </a:avLst>
+          </a:prstGeom>
+          <a:solidFill>
+            <a:srgbClr val="FFFFFF"/>
+          </a:solidFill>
+          <a:ln w="12700">
+            <a:solidFill>
+              <a:srgbClr val="DB2777"/>
+            </a:solidFill>
+            <a:prstDash val="solid"/>
+          </a:ln>
+        </p:spPr>
+      </p:sp>
+      <p:sp>
+        <p:nvSpPr>
+          <p:cNvPr id="54" name="Text 52"/>
+          <p:cNvSpPr/>
+          <p:nvPr/>
+        </p:nvSpPr>
+        <p:spPr>
+          <a:xfrm>
+            <a:off x="3140133" y="4169664"/>
+            <a:ext cx="543652" cy="384048"/>
+          </a:xfrm>
+          <a:prstGeom prst="rect">
+            <a:avLst/>
+          </a:prstGeom>
+          <a:noFill/>
+          <a:ln/>
+        </p:spPr>
+        <p:txBody>
+          <a:bodyPr wrap="square" lIns="0" tIns="0" rIns="0" bIns="0" rtlCol="0" anchor="ctr"/>
+          <a:lstStyle/>
+          <a:p>
+            <a:pPr algn="ctr" indent="0" marL="0">
+              <a:buNone/>
+            </a:pPr>
+            <a:r>
+              <a:rPr lang="en-US" sz="900" b="1" dirty="0">
+                <a:solidFill>
+                  <a:srgbClr val="9D174D"/>
+                </a:solidFill>
+                <a:latin typeface="Trebuchet MS" pitchFamily="34" charset="0"/>
+                <a:ea typeface="Trebuchet MS" pitchFamily="34" charset="-122"/>
+                <a:cs typeface="Trebuchet MS" pitchFamily="34" charset="-120"/>
+              </a:rPr>
+              <a:t>r</a:t>
+            </a:r>
+            <a:endParaRPr lang="en-US" sz="900" dirty="0"/>
+          </a:p>
+        </p:txBody>
+      </p:sp>
+      <p:sp>
+        <p:nvSpPr>
+          <p:cNvPr id="55" name="Shape 53"/>
+          <p:cNvSpPr/>
+          <p:nvPr/>
+        </p:nvSpPr>
+        <p:spPr>
+          <a:xfrm>
+            <a:off x="3734077" y="4169664"/>
+            <a:ext cx="543652" cy="384048"/>
+          </a:xfrm>
+          <a:prstGeom prst="rect">
+            <a:avLst>
+              <a:gd name="adj" fmla="val 9524"/>
+            </a:avLst>
+          </a:prstGeom>
+          <a:solidFill>
+            <a:srgbClr val="FFFFFF"/>
+          </a:solidFill>
+          <a:ln w="12700">
+            <a:solidFill>
+              <a:srgbClr val="DB2777"/>
+            </a:solidFill>
+            <a:prstDash val="solid"/>
+          </a:ln>
+        </p:spPr>
+      </p:sp>
+      <p:sp>
+        <p:nvSpPr>
+          <p:cNvPr id="56" name="Text 54"/>
+          <p:cNvSpPr/>
+          <p:nvPr/>
+        </p:nvSpPr>
+        <p:spPr>
+          <a:xfrm>
+            <a:off x="3734077" y="4169664"/>
+            <a:ext cx="543652" cy="384048"/>
+          </a:xfrm>
+          <a:prstGeom prst="rect">
+            <a:avLst/>
+          </a:prstGeom>
+          <a:noFill/>
+          <a:ln/>
+        </p:spPr>
+        <p:txBody>
+          <a:bodyPr wrap="square" lIns="0" tIns="0" rIns="0" bIns="0" rtlCol="0" anchor="ctr"/>
+          <a:lstStyle/>
+          <a:p>
+            <a:pPr algn="ctr" indent="0" marL="0">
+              <a:buNone/>
+            </a:pPr>
+            <a:r>
+              <a:rPr lang="en-US" sz="900" b="1" dirty="0">
+                <a:solidFill>
+                  <a:srgbClr val="9D174D"/>
+                </a:solidFill>
+                <a:latin typeface="Trebuchet MS" pitchFamily="34" charset="0"/>
+                <a:ea typeface="Trebuchet MS" pitchFamily="34" charset="-122"/>
+                <a:cs typeface="Trebuchet MS" pitchFamily="34" charset="-120"/>
+              </a:rPr>
+              <a:t>e</a:t>
+            </a:r>
+            <a:endParaRPr lang="en-US" sz="900" dirty="0"/>
+          </a:p>
+        </p:txBody>
+      </p:sp>
+      <p:sp>
+        <p:nvSpPr>
+          <p:cNvPr id="57" name="Shape 55"/>
+          <p:cNvSpPr/>
+          <p:nvPr/>
+        </p:nvSpPr>
+        <p:spPr>
+          <a:xfrm>
+            <a:off x="4328021" y="4169664"/>
+            <a:ext cx="543652" cy="384048"/>
+          </a:xfrm>
+          <a:prstGeom prst="rect">
+            <a:avLst>
+              <a:gd name="adj" fmla="val 9524"/>
+            </a:avLst>
+          </a:prstGeom>
+          <a:solidFill>
+            <a:srgbClr val="FFFFFF"/>
+          </a:solidFill>
+          <a:ln w="12700">
+            <a:solidFill>
+              <a:srgbClr val="DB2777"/>
+            </a:solidFill>
+            <a:prstDash val="solid"/>
+          </a:ln>
+        </p:spPr>
+      </p:sp>
+      <p:sp>
+        <p:nvSpPr>
+          <p:cNvPr id="58" name="Text 56"/>
+          <p:cNvSpPr/>
+          <p:nvPr/>
+        </p:nvSpPr>
+        <p:spPr>
+          <a:xfrm>
+            <a:off x="4328021" y="4169664"/>
+            <a:ext cx="543652" cy="384048"/>
+          </a:xfrm>
+          <a:prstGeom prst="rect">
+            <a:avLst/>
+          </a:prstGeom>
+          <a:noFill/>
+          <a:ln/>
+        </p:spPr>
+        <p:txBody>
+          <a:bodyPr wrap="square" lIns="0" tIns="0" rIns="0" bIns="0" rtlCol="0" anchor="ctr"/>
+          <a:lstStyle/>
+          <a:p>
+            <a:pPr algn="ctr" indent="0" marL="0">
+              <a:buNone/>
+            </a:pPr>
+            <a:r>
+              <a:rPr lang="en-US" sz="900" b="1" dirty="0">
+                <a:solidFill>
+                  <a:srgbClr val="9D174D"/>
+                </a:solidFill>
+                <a:latin typeface="Trebuchet MS" pitchFamily="34" charset="0"/>
+                <a:ea typeface="Trebuchet MS" pitchFamily="34" charset="-122"/>
+                <a:cs typeface="Trebuchet MS" pitchFamily="34" charset="-120"/>
+              </a:rPr>
+              <a:t>p</a:t>
+            </a:r>
+            <a:endParaRPr lang="en-US" sz="900" dirty="0"/>
+          </a:p>
+        </p:txBody>
+      </p:sp>
+      <p:sp>
+        <p:nvSpPr>
+          <p:cNvPr id="59" name="Shape 57"/>
+          <p:cNvSpPr/>
+          <p:nvPr/>
+        </p:nvSpPr>
+        <p:spPr>
+          <a:xfrm>
+            <a:off x="4921966" y="4169664"/>
+            <a:ext cx="543652" cy="384048"/>
+          </a:xfrm>
+          <a:prstGeom prst="rect">
+            <a:avLst>
+              <a:gd name="adj" fmla="val 9524"/>
+            </a:avLst>
+          </a:prstGeom>
+          <a:solidFill>
+            <a:srgbClr val="FFFFFF"/>
+          </a:solidFill>
+          <a:ln w="12700">
+            <a:solidFill>
+              <a:srgbClr val="DB2777"/>
+            </a:solidFill>
+            <a:prstDash val="solid"/>
+          </a:ln>
+        </p:spPr>
+      </p:sp>
+      <p:sp>
+        <p:nvSpPr>
+          <p:cNvPr id="60" name="Text 58"/>
+          <p:cNvSpPr/>
+          <p:nvPr/>
+        </p:nvSpPr>
+        <p:spPr>
+          <a:xfrm>
+            <a:off x="4921966" y="4169664"/>
+            <a:ext cx="543652" cy="384048"/>
+          </a:xfrm>
+          <a:prstGeom prst="rect">
+            <a:avLst/>
+          </a:prstGeom>
+          <a:noFill/>
+          <a:ln/>
+        </p:spPr>
+        <p:txBody>
+          <a:bodyPr wrap="square" lIns="0" tIns="0" rIns="0" bIns="0" rtlCol="0" anchor="ctr"/>
+          <a:lstStyle/>
+          <a:p>
+            <a:pPr algn="ctr" indent="0" marL="0">
+              <a:buNone/>
+            </a:pPr>
+            <a:r>
+              <a:rPr lang="en-US" sz="900" b="1" dirty="0">
+                <a:solidFill>
+                  <a:srgbClr val="9D174D"/>
+                </a:solidFill>
+                <a:latin typeface="Trebuchet MS" pitchFamily="34" charset="0"/>
+                <a:ea typeface="Trebuchet MS" pitchFamily="34" charset="-122"/>
+                <a:cs typeface="Trebuchet MS" pitchFamily="34" charset="-120"/>
+              </a:rPr>
+              <a:t>l</a:t>
+            </a:r>
+            <a:endParaRPr lang="en-US" sz="900" dirty="0"/>
+          </a:p>
+        </p:txBody>
+      </p:sp>
+      <p:sp>
+        <p:nvSpPr>
+          <p:cNvPr id="61" name="Shape 59"/>
+          <p:cNvSpPr/>
+          <p:nvPr/>
+        </p:nvSpPr>
+        <p:spPr>
+          <a:xfrm>
+            <a:off x="5515910" y="4169664"/>
+            <a:ext cx="543652" cy="384048"/>
+          </a:xfrm>
+          <a:prstGeom prst="rect">
+            <a:avLst>
+              <a:gd name="adj" fmla="val 9524"/>
+            </a:avLst>
+          </a:prstGeom>
+          <a:solidFill>
+            <a:srgbClr val="FFFFFF"/>
+          </a:solidFill>
+          <a:ln w="12700">
+            <a:solidFill>
+              <a:srgbClr val="DB2777"/>
+            </a:solidFill>
+            <a:prstDash val="solid"/>
+          </a:ln>
+        </p:spPr>
+      </p:sp>
+      <p:sp>
+        <p:nvSpPr>
+          <p:cNvPr id="62" name="Text 60"/>
+          <p:cNvSpPr/>
+          <p:nvPr/>
+        </p:nvSpPr>
+        <p:spPr>
+          <a:xfrm>
+            <a:off x="5515910" y="4169664"/>
+            <a:ext cx="543652" cy="384048"/>
+          </a:xfrm>
+          <a:prstGeom prst="rect">
+            <a:avLst/>
+          </a:prstGeom>
+          <a:noFill/>
+          <a:ln/>
+        </p:spPr>
+        <p:txBody>
+          <a:bodyPr wrap="square" lIns="0" tIns="0" rIns="0" bIns="0" rtlCol="0" anchor="ctr"/>
+          <a:lstStyle/>
+          <a:p>
+            <a:pPr algn="ctr" indent="0" marL="0">
+              <a:buNone/>
+            </a:pPr>
+            <a:r>
+              <a:rPr lang="en-US" sz="900" b="1" dirty="0">
+                <a:solidFill>
+                  <a:srgbClr val="9D174D"/>
+                </a:solidFill>
+                <a:latin typeface="Trebuchet MS" pitchFamily="34" charset="0"/>
+                <a:ea typeface="Trebuchet MS" pitchFamily="34" charset="-122"/>
+                <a:cs typeface="Trebuchet MS" pitchFamily="34" charset="-120"/>
+              </a:rPr>
+              <a:t>a</a:t>
+            </a:r>
+            <a:endParaRPr lang="en-US" sz="900" dirty="0"/>
+          </a:p>
+        </p:txBody>
+      </p:sp>
+      <p:sp>
+        <p:nvSpPr>
+          <p:cNvPr id="63" name="Shape 61"/>
+          <p:cNvSpPr/>
+          <p:nvPr/>
+        </p:nvSpPr>
+        <p:spPr>
+          <a:xfrm>
+            <a:off x="6109855" y="4169664"/>
+            <a:ext cx="543652" cy="384048"/>
+          </a:xfrm>
+          <a:prstGeom prst="rect">
+            <a:avLst>
+              <a:gd name="adj" fmla="val 9524"/>
+            </a:avLst>
+          </a:prstGeom>
+          <a:solidFill>
+            <a:srgbClr val="FFFFFF"/>
+          </a:solidFill>
+          <a:ln w="12700">
+            <a:solidFill>
+              <a:srgbClr val="DB2777"/>
+            </a:solidFill>
+            <a:prstDash val="solid"/>
+          </a:ln>
+        </p:spPr>
+      </p:sp>
+      <p:sp>
+        <p:nvSpPr>
+          <p:cNvPr id="64" name="Text 62"/>
+          <p:cNvSpPr/>
+          <p:nvPr/>
+        </p:nvSpPr>
+        <p:spPr>
+          <a:xfrm>
+            <a:off x="6109855" y="4169664"/>
+            <a:ext cx="543652" cy="384048"/>
+          </a:xfrm>
+          <a:prstGeom prst="rect">
+            <a:avLst/>
+          </a:prstGeom>
+          <a:noFill/>
+          <a:ln/>
+        </p:spPr>
+        <p:txBody>
+          <a:bodyPr wrap="square" lIns="0" tIns="0" rIns="0" bIns="0" rtlCol="0" anchor="ctr"/>
+          <a:lstStyle/>
+          <a:p>
+            <a:pPr algn="ctr" indent="0" marL="0">
+              <a:buNone/>
+            </a:pPr>
+            <a:r>
+              <a:rPr lang="en-US" sz="900" b="1" dirty="0">
+                <a:solidFill>
+                  <a:srgbClr val="9D174D"/>
+                </a:solidFill>
+                <a:latin typeface="Trebuchet MS" pitchFamily="34" charset="0"/>
+                <a:ea typeface="Trebuchet MS" pitchFamily="34" charset="-122"/>
+                <a:cs typeface="Trebuchet MS" pitchFamily="34" charset="-120"/>
+              </a:rPr>
+              <a:t>ce</a:t>
+            </a:r>
+            <a:endParaRPr lang="en-US" sz="900" dirty="0"/>
+          </a:p>
+        </p:txBody>
+      </p:sp>
+      <p:sp>
+        <p:nvSpPr>
+          <p:cNvPr id="65" name="Text 63"/>
+          <p:cNvSpPr/>
+          <p:nvPr/>
+        </p:nvSpPr>
+        <p:spPr>
+          <a:xfrm>
+            <a:off x="6109855" y="4572000"/>
+            <a:ext cx="543652" cy="219456"/>
           </a:xfrm>
           <a:prstGeom prst="rect">
             <a:avLst/>
@@ -23910,7 +25032,7 @@
               <a:buNone/>
             </a:pPr>
             <a:r>
-              <a:rPr lang="en-US" sz="700" i="1" dirty="0">
+              <a:rPr lang="en-US" sz="750" i="1" dirty="0">
                 <a:solidFill>
                   <a:srgbClr val="94A3B8"/>
                 </a:solidFill>
@@ -23918,693 +25040,153 @@
                 <a:ea typeface="Calibri" pitchFamily="34" charset="-122"/>
                 <a:cs typeface="Calibri" pitchFamily="34" charset="-120"/>
               </a:rPr>
-              <a:t>'e' dropped before vowel suffix</a:t>
-            </a:r>
-            <a:endParaRPr lang="en-US" sz="700" dirty="0"/>
-          </a:p>
-        </p:txBody>
-      </p:sp>
-      <p:sp>
-        <p:nvSpPr>
-          <p:cNvPr id="30" name="Shape 28"/>
-          <p:cNvSpPr/>
-          <p:nvPr/>
-        </p:nvSpPr>
-        <p:spPr>
-          <a:xfrm>
-            <a:off x="365760" y="3273552"/>
-            <a:ext cx="1371600" cy="658368"/>
+              <a:t>/s/</a:t>
+            </a:r>
+            <a:endParaRPr lang="en-US" sz="750" dirty="0"/>
+          </a:p>
+        </p:txBody>
+      </p:sp>
+      <p:sp>
+        <p:nvSpPr>
+          <p:cNvPr id="66" name="Shape 64"/>
+          <p:cNvSpPr/>
+          <p:nvPr/>
+        </p:nvSpPr>
+        <p:spPr>
+          <a:xfrm>
+            <a:off x="6703799" y="4169664"/>
+            <a:ext cx="543652" cy="384048"/>
           </a:xfrm>
           <a:prstGeom prst="rect">
             <a:avLst>
-              <a:gd name="adj" fmla="val 8333"/>
+              <a:gd name="adj" fmla="val 9524"/>
             </a:avLst>
           </a:prstGeom>
           <a:solidFill>
-            <a:srgbClr val="E2E8F0"/>
-          </a:solidFill>
-          <a:ln w="12700">
-            <a:solidFill>
-              <a:srgbClr val="E2E8F0"/>
-            </a:solidFill>
-            <a:prstDash val="solid"/>
-          </a:ln>
-        </p:spPr>
-      </p:sp>
-      <p:sp>
-        <p:nvSpPr>
-          <p:cNvPr id="31" name="Text 29"/>
-          <p:cNvSpPr/>
-          <p:nvPr/>
-        </p:nvSpPr>
-        <p:spPr>
-          <a:xfrm>
-            <a:off x="365760" y="3273552"/>
-            <a:ext cx="1371600" cy="658368"/>
-          </a:xfrm>
-          <a:prstGeom prst="rect">
-            <a:avLst/>
-          </a:prstGeom>
-          <a:noFill/>
-          <a:ln/>
-        </p:spPr>
-        <p:txBody>
-          <a:bodyPr wrap="square" lIns="0" tIns="0" rIns="0" bIns="0" rtlCol="0" anchor="ctr"/>
-          <a:lstStyle/>
-          <a:p>
-            <a:pPr algn="ctr" indent="0" marL="0">
-              <a:buNone/>
-            </a:pPr>
-            <a:r>
-              <a:rPr lang="en-US" sz="1100" b="1" dirty="0">
-                <a:solidFill>
-                  <a:srgbClr val="475569"/>
+            <a:srgbClr val="FFFFFF"/>
+          </a:solidFill>
+          <a:ln w="12700">
+            <a:solidFill>
+              <a:srgbClr val="DB2777"/>
+            </a:solidFill>
+            <a:prstDash val="solid"/>
+          </a:ln>
+        </p:spPr>
+      </p:sp>
+      <p:sp>
+        <p:nvSpPr>
+          <p:cNvPr id="67" name="Text 65"/>
+          <p:cNvSpPr/>
+          <p:nvPr/>
+        </p:nvSpPr>
+        <p:spPr>
+          <a:xfrm>
+            <a:off x="6703799" y="4169664"/>
+            <a:ext cx="543652" cy="384048"/>
+          </a:xfrm>
+          <a:prstGeom prst="rect">
+            <a:avLst/>
+          </a:prstGeom>
+          <a:noFill/>
+          <a:ln/>
+        </p:spPr>
+        <p:txBody>
+          <a:bodyPr wrap="square" lIns="0" tIns="0" rIns="0" bIns="0" rtlCol="0" anchor="ctr"/>
+          <a:lstStyle/>
+          <a:p>
+            <a:pPr algn="ctr" indent="0" marL="0">
+              <a:buNone/>
+            </a:pPr>
+            <a:r>
+              <a:rPr lang="en-US" sz="900" b="1" dirty="0">
+                <a:solidFill>
+                  <a:srgbClr val="9D174D"/>
                 </a:solidFill>
                 <a:latin typeface="Trebuchet MS" pitchFamily="34" charset="0"/>
                 <a:ea typeface="Trebuchet MS" pitchFamily="34" charset="-122"/>
                 <a:cs typeface="Trebuchet MS" pitchFamily="34" charset="-120"/>
               </a:rPr>
-              <a:t>Syllables</a:t>
-            </a:r>
-            <a:endParaRPr lang="en-US" sz="1100" dirty="0"/>
-          </a:p>
-        </p:txBody>
-      </p:sp>
-      <p:sp>
-        <p:nvSpPr>
-          <p:cNvPr id="32" name="Shape 30"/>
-          <p:cNvSpPr/>
-          <p:nvPr/>
-        </p:nvSpPr>
-        <p:spPr>
-          <a:xfrm>
-            <a:off x="1874520" y="3273552"/>
-            <a:ext cx="6903720" cy="658368"/>
+              <a:t>a</a:t>
+            </a:r>
+            <a:endParaRPr lang="en-US" sz="900" dirty="0"/>
+          </a:p>
+        </p:txBody>
+      </p:sp>
+      <p:sp>
+        <p:nvSpPr>
+          <p:cNvPr id="68" name="Shape 66"/>
+          <p:cNvSpPr/>
+          <p:nvPr/>
+        </p:nvSpPr>
+        <p:spPr>
+          <a:xfrm>
+            <a:off x="7297743" y="4169664"/>
+            <a:ext cx="543652" cy="384048"/>
           </a:xfrm>
           <a:prstGeom prst="rect">
             <a:avLst>
-              <a:gd name="adj" fmla="val 8333"/>
+              <a:gd name="adj" fmla="val 9524"/>
             </a:avLst>
           </a:prstGeom>
           <a:solidFill>
-            <a:srgbClr val="CCFBF1"/>
-          </a:solidFill>
-          <a:ln w="12700">
-            <a:solidFill>
-              <a:srgbClr val="0D9488"/>
-            </a:solidFill>
-            <a:prstDash val="solid"/>
-          </a:ln>
-        </p:spPr>
-      </p:sp>
-      <p:sp>
-        <p:nvSpPr>
-          <p:cNvPr id="33" name="Shape 31"/>
-          <p:cNvSpPr/>
-          <p:nvPr/>
-        </p:nvSpPr>
-        <p:spPr>
-          <a:xfrm>
-            <a:off x="1978152" y="3364992"/>
-            <a:ext cx="1225296" cy="475488"/>
-          </a:xfrm>
-          <a:prstGeom prst="rect">
-            <a:avLst>
-              <a:gd name="adj" fmla="val 9615"/>
-            </a:avLst>
-          </a:prstGeom>
-          <a:solidFill>
             <a:srgbClr val="FFFFFF"/>
           </a:solidFill>
           <a:ln w="12700">
             <a:solidFill>
-              <a:srgbClr val="0D9488"/>
-            </a:solidFill>
-            <a:prstDash val="solid"/>
-          </a:ln>
-        </p:spPr>
-      </p:sp>
-      <p:sp>
-        <p:nvSpPr>
-          <p:cNvPr id="34" name="Text 32"/>
-          <p:cNvSpPr/>
-          <p:nvPr/>
-        </p:nvSpPr>
-        <p:spPr>
-          <a:xfrm>
-            <a:off x="1978152" y="3364992"/>
-            <a:ext cx="1225296" cy="475488"/>
-          </a:xfrm>
-          <a:prstGeom prst="rect">
-            <a:avLst/>
-          </a:prstGeom>
-          <a:noFill/>
-          <a:ln/>
-        </p:spPr>
-        <p:txBody>
-          <a:bodyPr wrap="square" lIns="0" tIns="0" rIns="0" bIns="0" rtlCol="0" anchor="ctr"/>
-          <a:lstStyle/>
-          <a:p>
-            <a:pPr algn="ctr" indent="0" marL="0">
-              <a:buNone/>
-            </a:pPr>
-            <a:r>
-              <a:rPr lang="en-US" sz="1400" b="1" dirty="0">
-                <a:solidFill>
-                  <a:srgbClr val="0D9488"/>
+              <a:srgbClr val="DB2777"/>
+            </a:solidFill>
+            <a:prstDash val="solid"/>
+          </a:ln>
+        </p:spPr>
+      </p:sp>
+      <p:sp>
+        <p:nvSpPr>
+          <p:cNvPr id="69" name="Text 67"/>
+          <p:cNvSpPr/>
+          <p:nvPr/>
+        </p:nvSpPr>
+        <p:spPr>
+          <a:xfrm>
+            <a:off x="7297743" y="4169664"/>
+            <a:ext cx="543652" cy="384048"/>
+          </a:xfrm>
+          <a:prstGeom prst="rect">
+            <a:avLst/>
+          </a:prstGeom>
+          <a:noFill/>
+          <a:ln/>
+        </p:spPr>
+        <p:txBody>
+          <a:bodyPr wrap="square" lIns="0" tIns="0" rIns="0" bIns="0" rtlCol="0" anchor="ctr"/>
+          <a:lstStyle/>
+          <a:p>
+            <a:pPr algn="ctr" indent="0" marL="0">
+              <a:buNone/>
+            </a:pPr>
+            <a:r>
+              <a:rPr lang="en-US" sz="900" b="1" dirty="0">
+                <a:solidFill>
+                  <a:srgbClr val="9D174D"/>
                 </a:solidFill>
                 <a:latin typeface="Trebuchet MS" pitchFamily="34" charset="0"/>
                 <a:ea typeface="Trebuchet MS" pitchFamily="34" charset="-122"/>
                 <a:cs typeface="Trebuchet MS" pitchFamily="34" charset="-120"/>
               </a:rPr>
-              <a:t>ir</a:t>
-            </a:r>
-            <a:endParaRPr lang="en-US" sz="1400" dirty="0"/>
-          </a:p>
-        </p:txBody>
-      </p:sp>
-      <p:sp>
-        <p:nvSpPr>
-          <p:cNvPr id="35" name="Text 33"/>
-          <p:cNvSpPr/>
-          <p:nvPr/>
-        </p:nvSpPr>
-        <p:spPr>
-          <a:xfrm>
-            <a:off x="3203448" y="3364992"/>
-            <a:ext cx="76200" cy="475488"/>
-          </a:xfrm>
-          <a:prstGeom prst="rect">
-            <a:avLst/>
-          </a:prstGeom>
-          <a:noFill/>
-          <a:ln/>
-        </p:spPr>
-        <p:txBody>
-          <a:bodyPr wrap="square" lIns="0" tIns="0" rIns="0" bIns="0" rtlCol="0" anchor="ctr"/>
-          <a:lstStyle/>
-          <a:p>
-            <a:pPr algn="ctr" indent="0" marL="0">
-              <a:buNone/>
-            </a:pPr>
-            <a:r>
-              <a:rPr lang="en-US" sz="1600" b="1" dirty="0">
-                <a:solidFill>
-                  <a:srgbClr val="0D9488"/>
-                </a:solidFill>
-                <a:latin typeface="Trebuchet MS" pitchFamily="34" charset="0"/>
-                <a:ea typeface="Trebuchet MS" pitchFamily="34" charset="-122"/>
-                <a:cs typeface="Trebuchet MS" pitchFamily="34" charset="-120"/>
-              </a:rPr>
-              <a:t>·</a:t>
-            </a:r>
-            <a:endParaRPr lang="en-US" sz="1600" dirty="0"/>
-          </a:p>
-        </p:txBody>
-      </p:sp>
-      <p:sp>
-        <p:nvSpPr>
-          <p:cNvPr id="36" name="Shape 34"/>
-          <p:cNvSpPr/>
-          <p:nvPr/>
-        </p:nvSpPr>
-        <p:spPr>
-          <a:xfrm>
-            <a:off x="3279648" y="3364992"/>
-            <a:ext cx="1225296" cy="475488"/>
-          </a:xfrm>
-          <a:prstGeom prst="rect">
-            <a:avLst>
-              <a:gd name="adj" fmla="val 9615"/>
-            </a:avLst>
-          </a:prstGeom>
-          <a:solidFill>
-            <a:srgbClr val="FFFFFF"/>
-          </a:solidFill>
-          <a:ln w="12700">
-            <a:solidFill>
-              <a:srgbClr val="0D9488"/>
-            </a:solidFill>
-            <a:prstDash val="solid"/>
-          </a:ln>
-        </p:spPr>
-      </p:sp>
-      <p:sp>
-        <p:nvSpPr>
-          <p:cNvPr id="37" name="Text 35"/>
-          <p:cNvSpPr/>
-          <p:nvPr/>
-        </p:nvSpPr>
-        <p:spPr>
-          <a:xfrm>
-            <a:off x="3279648" y="3364992"/>
-            <a:ext cx="1225296" cy="475488"/>
-          </a:xfrm>
-          <a:prstGeom prst="rect">
-            <a:avLst/>
-          </a:prstGeom>
-          <a:noFill/>
-          <a:ln/>
-        </p:spPr>
-        <p:txBody>
-          <a:bodyPr wrap="square" lIns="0" tIns="0" rIns="0" bIns="0" rtlCol="0" anchor="ctr"/>
-          <a:lstStyle/>
-          <a:p>
-            <a:pPr algn="ctr" indent="0" marL="0">
-              <a:buNone/>
-            </a:pPr>
-            <a:r>
-              <a:rPr lang="en-US" sz="1400" b="1" dirty="0">
-                <a:solidFill>
-                  <a:srgbClr val="0D9488"/>
-                </a:solidFill>
-                <a:latin typeface="Trebuchet MS" pitchFamily="34" charset="0"/>
-                <a:ea typeface="Trebuchet MS" pitchFamily="34" charset="-122"/>
-                <a:cs typeface="Trebuchet MS" pitchFamily="34" charset="-120"/>
-              </a:rPr>
-              <a:t>re</a:t>
-            </a:r>
-            <a:endParaRPr lang="en-US" sz="1400" dirty="0"/>
-          </a:p>
-        </p:txBody>
-      </p:sp>
-      <p:sp>
-        <p:nvSpPr>
-          <p:cNvPr id="38" name="Text 36"/>
-          <p:cNvSpPr/>
-          <p:nvPr/>
-        </p:nvSpPr>
-        <p:spPr>
-          <a:xfrm>
-            <a:off x="4504944" y="3364992"/>
-            <a:ext cx="76200" cy="475488"/>
-          </a:xfrm>
-          <a:prstGeom prst="rect">
-            <a:avLst/>
-          </a:prstGeom>
-          <a:noFill/>
-          <a:ln/>
-        </p:spPr>
-        <p:txBody>
-          <a:bodyPr wrap="square" lIns="0" tIns="0" rIns="0" bIns="0" rtlCol="0" anchor="ctr"/>
-          <a:lstStyle/>
-          <a:p>
-            <a:pPr algn="ctr" indent="0" marL="0">
-              <a:buNone/>
-            </a:pPr>
-            <a:r>
-              <a:rPr lang="en-US" sz="1600" b="1" dirty="0">
-                <a:solidFill>
-                  <a:srgbClr val="0D9488"/>
-                </a:solidFill>
-                <a:latin typeface="Trebuchet MS" pitchFamily="34" charset="0"/>
-                <a:ea typeface="Trebuchet MS" pitchFamily="34" charset="-122"/>
-                <a:cs typeface="Trebuchet MS" pitchFamily="34" charset="-120"/>
-              </a:rPr>
-              <a:t>·</a:t>
-            </a:r>
-            <a:endParaRPr lang="en-US" sz="1600" dirty="0"/>
-          </a:p>
-        </p:txBody>
-      </p:sp>
-      <p:sp>
-        <p:nvSpPr>
-          <p:cNvPr id="39" name="Shape 37"/>
-          <p:cNvSpPr/>
-          <p:nvPr/>
-        </p:nvSpPr>
-        <p:spPr>
-          <a:xfrm>
-            <a:off x="4581144" y="3364992"/>
-            <a:ext cx="1225296" cy="475488"/>
-          </a:xfrm>
-          <a:prstGeom prst="rect">
-            <a:avLst>
-              <a:gd name="adj" fmla="val 9615"/>
-            </a:avLst>
-          </a:prstGeom>
-          <a:solidFill>
-            <a:srgbClr val="FFFFFF"/>
-          </a:solidFill>
-          <a:ln w="12700">
-            <a:solidFill>
-              <a:srgbClr val="0D9488"/>
-            </a:solidFill>
-            <a:prstDash val="solid"/>
-          </a:ln>
-        </p:spPr>
-      </p:sp>
-      <p:sp>
-        <p:nvSpPr>
-          <p:cNvPr id="40" name="Text 38"/>
-          <p:cNvSpPr/>
-          <p:nvPr/>
-        </p:nvSpPr>
-        <p:spPr>
-          <a:xfrm>
-            <a:off x="4581144" y="3364992"/>
-            <a:ext cx="1225296" cy="475488"/>
-          </a:xfrm>
-          <a:prstGeom prst="rect">
-            <a:avLst/>
-          </a:prstGeom>
-          <a:noFill/>
-          <a:ln/>
-        </p:spPr>
-        <p:txBody>
-          <a:bodyPr wrap="square" lIns="0" tIns="0" rIns="0" bIns="0" rtlCol="0" anchor="ctr"/>
-          <a:lstStyle/>
-          <a:p>
-            <a:pPr algn="ctr" indent="0" marL="0">
-              <a:buNone/>
-            </a:pPr>
-            <a:r>
-              <a:rPr lang="en-US" sz="1400" b="1" dirty="0">
-                <a:solidFill>
-                  <a:srgbClr val="0D9488"/>
-                </a:solidFill>
-                <a:latin typeface="Trebuchet MS" pitchFamily="34" charset="0"/>
-                <a:ea typeface="Trebuchet MS" pitchFamily="34" charset="-122"/>
-                <a:cs typeface="Trebuchet MS" pitchFamily="34" charset="-120"/>
-              </a:rPr>
-              <a:t>place</a:t>
-            </a:r>
-            <a:endParaRPr lang="en-US" sz="1400" dirty="0"/>
-          </a:p>
-        </p:txBody>
-      </p:sp>
-      <p:sp>
-        <p:nvSpPr>
-          <p:cNvPr id="41" name="Text 39"/>
-          <p:cNvSpPr/>
-          <p:nvPr/>
-        </p:nvSpPr>
-        <p:spPr>
-          <a:xfrm>
-            <a:off x="5806440" y="3364992"/>
-            <a:ext cx="76200" cy="475488"/>
-          </a:xfrm>
-          <a:prstGeom prst="rect">
-            <a:avLst/>
-          </a:prstGeom>
-          <a:noFill/>
-          <a:ln/>
-        </p:spPr>
-        <p:txBody>
-          <a:bodyPr wrap="square" lIns="0" tIns="0" rIns="0" bIns="0" rtlCol="0" anchor="ctr"/>
-          <a:lstStyle/>
-          <a:p>
-            <a:pPr algn="ctr" indent="0" marL="0">
-              <a:buNone/>
-            </a:pPr>
-            <a:r>
-              <a:rPr lang="en-US" sz="1600" b="1" dirty="0">
-                <a:solidFill>
-                  <a:srgbClr val="0D9488"/>
-                </a:solidFill>
-                <a:latin typeface="Trebuchet MS" pitchFamily="34" charset="0"/>
-                <a:ea typeface="Trebuchet MS" pitchFamily="34" charset="-122"/>
-                <a:cs typeface="Trebuchet MS" pitchFamily="34" charset="-120"/>
-              </a:rPr>
-              <a:t>·</a:t>
-            </a:r>
-            <a:endParaRPr lang="en-US" sz="1600" dirty="0"/>
-          </a:p>
-        </p:txBody>
-      </p:sp>
-      <p:sp>
-        <p:nvSpPr>
-          <p:cNvPr id="42" name="Shape 40"/>
-          <p:cNvSpPr/>
-          <p:nvPr/>
-        </p:nvSpPr>
-        <p:spPr>
-          <a:xfrm>
-            <a:off x="5882640" y="3364992"/>
-            <a:ext cx="1225296" cy="475488"/>
-          </a:xfrm>
-          <a:prstGeom prst="rect">
-            <a:avLst>
-              <a:gd name="adj" fmla="val 9615"/>
-            </a:avLst>
-          </a:prstGeom>
-          <a:solidFill>
-            <a:srgbClr val="FFFFFF"/>
-          </a:solidFill>
-          <a:ln w="12700">
-            <a:solidFill>
-              <a:srgbClr val="0D9488"/>
-            </a:solidFill>
-            <a:prstDash val="solid"/>
-          </a:ln>
-        </p:spPr>
-      </p:sp>
-      <p:sp>
-        <p:nvSpPr>
-          <p:cNvPr id="43" name="Text 41"/>
-          <p:cNvSpPr/>
-          <p:nvPr/>
-        </p:nvSpPr>
-        <p:spPr>
-          <a:xfrm>
-            <a:off x="5882640" y="3364992"/>
-            <a:ext cx="1225296" cy="475488"/>
-          </a:xfrm>
-          <a:prstGeom prst="rect">
-            <a:avLst/>
-          </a:prstGeom>
-          <a:noFill/>
-          <a:ln/>
-        </p:spPr>
-        <p:txBody>
-          <a:bodyPr wrap="square" lIns="0" tIns="0" rIns="0" bIns="0" rtlCol="0" anchor="ctr"/>
-          <a:lstStyle/>
-          <a:p>
-            <a:pPr algn="ctr" indent="0" marL="0">
-              <a:buNone/>
-            </a:pPr>
-            <a:r>
-              <a:rPr lang="en-US" sz="1400" b="1" dirty="0">
-                <a:solidFill>
-                  <a:srgbClr val="0D9488"/>
-                </a:solidFill>
-                <a:latin typeface="Trebuchet MS" pitchFamily="34" charset="0"/>
-                <a:ea typeface="Trebuchet MS" pitchFamily="34" charset="-122"/>
-                <a:cs typeface="Trebuchet MS" pitchFamily="34" charset="-120"/>
-              </a:rPr>
-              <a:t>a</a:t>
-            </a:r>
-            <a:endParaRPr lang="en-US" sz="1400" dirty="0"/>
-          </a:p>
-        </p:txBody>
-      </p:sp>
-      <p:sp>
-        <p:nvSpPr>
-          <p:cNvPr id="44" name="Text 42"/>
-          <p:cNvSpPr/>
-          <p:nvPr/>
-        </p:nvSpPr>
-        <p:spPr>
-          <a:xfrm>
-            <a:off x="7107936" y="3364992"/>
-            <a:ext cx="76200" cy="475488"/>
-          </a:xfrm>
-          <a:prstGeom prst="rect">
-            <a:avLst/>
-          </a:prstGeom>
-          <a:noFill/>
-          <a:ln/>
-        </p:spPr>
-        <p:txBody>
-          <a:bodyPr wrap="square" lIns="0" tIns="0" rIns="0" bIns="0" rtlCol="0" anchor="ctr"/>
-          <a:lstStyle/>
-          <a:p>
-            <a:pPr algn="ctr" indent="0" marL="0">
-              <a:buNone/>
-            </a:pPr>
-            <a:r>
-              <a:rPr lang="en-US" sz="1600" b="1" dirty="0">
-                <a:solidFill>
-                  <a:srgbClr val="0D9488"/>
-                </a:solidFill>
-                <a:latin typeface="Trebuchet MS" pitchFamily="34" charset="0"/>
-                <a:ea typeface="Trebuchet MS" pitchFamily="34" charset="-122"/>
-                <a:cs typeface="Trebuchet MS" pitchFamily="34" charset="-120"/>
-              </a:rPr>
-              <a:t>·</a:t>
-            </a:r>
-            <a:endParaRPr lang="en-US" sz="1600" dirty="0"/>
-          </a:p>
-        </p:txBody>
-      </p:sp>
-      <p:sp>
-        <p:nvSpPr>
-          <p:cNvPr id="45" name="Shape 43"/>
-          <p:cNvSpPr/>
-          <p:nvPr/>
-        </p:nvSpPr>
-        <p:spPr>
-          <a:xfrm>
-            <a:off x="7184136" y="3364992"/>
-            <a:ext cx="1225296" cy="475488"/>
-          </a:xfrm>
-          <a:prstGeom prst="rect">
-            <a:avLst>
-              <a:gd name="adj" fmla="val 9615"/>
-            </a:avLst>
-          </a:prstGeom>
-          <a:solidFill>
-            <a:srgbClr val="FFFFFF"/>
-          </a:solidFill>
-          <a:ln w="12700">
-            <a:solidFill>
-              <a:srgbClr val="0D9488"/>
-            </a:solidFill>
-            <a:prstDash val="solid"/>
-          </a:ln>
-        </p:spPr>
-      </p:sp>
-      <p:sp>
-        <p:nvSpPr>
-          <p:cNvPr id="46" name="Text 44"/>
-          <p:cNvSpPr/>
-          <p:nvPr/>
-        </p:nvSpPr>
-        <p:spPr>
-          <a:xfrm>
-            <a:off x="7184136" y="3364992"/>
-            <a:ext cx="1225296" cy="475488"/>
-          </a:xfrm>
-          <a:prstGeom prst="rect">
-            <a:avLst/>
-          </a:prstGeom>
-          <a:noFill/>
-          <a:ln/>
-        </p:spPr>
-        <p:txBody>
-          <a:bodyPr wrap="square" lIns="0" tIns="0" rIns="0" bIns="0" rtlCol="0" anchor="ctr"/>
-          <a:lstStyle/>
-          <a:p>
-            <a:pPr algn="ctr" indent="0" marL="0">
-              <a:buNone/>
-            </a:pPr>
-            <a:r>
-              <a:rPr lang="en-US" sz="1400" b="1" dirty="0">
-                <a:solidFill>
-                  <a:srgbClr val="0D9488"/>
-                </a:solidFill>
-                <a:latin typeface="Trebuchet MS" pitchFamily="34" charset="0"/>
-                <a:ea typeface="Trebuchet MS" pitchFamily="34" charset="-122"/>
-                <a:cs typeface="Trebuchet MS" pitchFamily="34" charset="-120"/>
-              </a:rPr>
-              <a:t>ble</a:t>
-            </a:r>
-            <a:endParaRPr lang="en-US" sz="1400" dirty="0"/>
-          </a:p>
-        </p:txBody>
-      </p:sp>
-      <p:sp>
-        <p:nvSpPr>
-          <p:cNvPr id="47" name="Shape 45"/>
-          <p:cNvSpPr/>
-          <p:nvPr/>
-        </p:nvSpPr>
-        <p:spPr>
-          <a:xfrm>
-            <a:off x="365760" y="4096512"/>
-            <a:ext cx="1371600" cy="804672"/>
-          </a:xfrm>
-          <a:prstGeom prst="rect">
-            <a:avLst>
-              <a:gd name="adj" fmla="val 6818"/>
-            </a:avLst>
-          </a:prstGeom>
-          <a:solidFill>
-            <a:srgbClr val="E2E8F0"/>
-          </a:solidFill>
-          <a:ln w="12700">
-            <a:solidFill>
-              <a:srgbClr val="E2E8F0"/>
-            </a:solidFill>
-            <a:prstDash val="solid"/>
-          </a:ln>
-        </p:spPr>
-      </p:sp>
-      <p:sp>
-        <p:nvSpPr>
-          <p:cNvPr id="48" name="Text 46"/>
-          <p:cNvSpPr/>
-          <p:nvPr/>
-        </p:nvSpPr>
-        <p:spPr>
-          <a:xfrm>
-            <a:off x="365760" y="4096512"/>
-            <a:ext cx="1371600" cy="804672"/>
-          </a:xfrm>
-          <a:prstGeom prst="rect">
-            <a:avLst/>
-          </a:prstGeom>
-          <a:noFill/>
-          <a:ln/>
-        </p:spPr>
-        <p:txBody>
-          <a:bodyPr wrap="square" lIns="0" tIns="0" rIns="0" bIns="0" rtlCol="0" anchor="ctr"/>
-          <a:lstStyle/>
-          <a:p>
-            <a:pPr algn="ctr" indent="0" marL="0">
-              <a:buNone/>
-            </a:pPr>
-            <a:r>
-              <a:rPr lang="en-US" sz="1100" b="1" dirty="0">
-                <a:solidFill>
-                  <a:srgbClr val="475569"/>
-                </a:solidFill>
-                <a:latin typeface="Trebuchet MS" pitchFamily="34" charset="0"/>
-                <a:ea typeface="Trebuchet MS" pitchFamily="34" charset="-122"/>
-                <a:cs typeface="Trebuchet MS" pitchFamily="34" charset="-120"/>
-              </a:rPr>
-              <a:t>Phonemes</a:t>
-            </a:r>
-            <a:endParaRPr lang="en-US" sz="1100" dirty="0"/>
-          </a:p>
-        </p:txBody>
-      </p:sp>
-      <p:sp>
-        <p:nvSpPr>
-          <p:cNvPr id="49" name="Shape 47"/>
-          <p:cNvSpPr/>
-          <p:nvPr/>
-        </p:nvSpPr>
-        <p:spPr>
-          <a:xfrm>
-            <a:off x="1874520" y="4096512"/>
-            <a:ext cx="6903720" cy="804672"/>
-          </a:xfrm>
-          <a:prstGeom prst="rect">
-            <a:avLst>
-              <a:gd name="adj" fmla="val 6818"/>
-            </a:avLst>
-          </a:prstGeom>
-          <a:solidFill>
-            <a:srgbClr val="FCE7F3"/>
-          </a:solidFill>
-          <a:ln w="12700">
-            <a:solidFill>
-              <a:srgbClr val="DB2777"/>
-            </a:solidFill>
-            <a:prstDash val="solid"/>
-          </a:ln>
-        </p:spPr>
-      </p:sp>
-      <p:sp>
-        <p:nvSpPr>
-          <p:cNvPr id="50" name="Shape 48"/>
-          <p:cNvSpPr/>
-          <p:nvPr/>
-        </p:nvSpPr>
-        <p:spPr>
-          <a:xfrm>
-            <a:off x="1952244" y="4169664"/>
+              <a:t>b</a:t>
+            </a:r>
+            <a:endParaRPr lang="en-US" sz="900" dirty="0"/>
+          </a:p>
+        </p:txBody>
+      </p:sp>
+      <p:sp>
+        <p:nvSpPr>
+          <p:cNvPr id="70" name="Shape 68"/>
+          <p:cNvSpPr/>
+          <p:nvPr/>
+        </p:nvSpPr>
+        <p:spPr>
+          <a:xfrm>
+            <a:off x="7891688" y="4169664"/>
             <a:ext cx="543652" cy="384048"/>
           </a:xfrm>
           <a:prstGeom prst="rect">
@@ -24625,706 +25207,7 @@
       </p:sp>
       <p:sp>
         <p:nvSpPr>
-          <p:cNvPr id="51" name="Text 49"/>
-          <p:cNvSpPr/>
-          <p:nvPr/>
-        </p:nvSpPr>
-        <p:spPr>
-          <a:xfrm>
-            <a:off x="1952244" y="4169664"/>
-            <a:ext cx="543652" cy="384048"/>
-          </a:xfrm>
-          <a:prstGeom prst="rect">
-            <a:avLst/>
-          </a:prstGeom>
-          <a:noFill/>
-          <a:ln/>
-        </p:spPr>
-        <p:txBody>
-          <a:bodyPr wrap="square" lIns="0" tIns="0" rIns="0" bIns="0" rtlCol="0" anchor="ctr"/>
-          <a:lstStyle/>
-          <a:p>
-            <a:pPr algn="ctr" indent="0" marL="0">
-              <a:buNone/>
-            </a:pPr>
-            <a:r>
-              <a:rPr lang="en-US" sz="900" b="1" dirty="0">
-                <a:solidFill>
-                  <a:srgbClr val="9D174D"/>
-                </a:solidFill>
-                <a:latin typeface="Trebuchet MS" pitchFamily="34" charset="0"/>
-                <a:ea typeface="Trebuchet MS" pitchFamily="34" charset="-122"/>
-                <a:cs typeface="Trebuchet MS" pitchFamily="34" charset="-120"/>
-              </a:rPr>
-              <a:t>i</a:t>
-            </a:r>
-            <a:endParaRPr lang="en-US" sz="900" dirty="0"/>
-          </a:p>
-        </p:txBody>
-      </p:sp>
-      <p:sp>
-        <p:nvSpPr>
-          <p:cNvPr id="52" name="Shape 50"/>
-          <p:cNvSpPr/>
-          <p:nvPr/>
-        </p:nvSpPr>
-        <p:spPr>
-          <a:xfrm>
-            <a:off x="2546188" y="4169664"/>
-            <a:ext cx="543652" cy="384048"/>
-          </a:xfrm>
-          <a:prstGeom prst="rect">
-            <a:avLst>
-              <a:gd name="adj" fmla="val 9524"/>
-            </a:avLst>
-          </a:prstGeom>
-          <a:solidFill>
-            <a:srgbClr val="FFFFFF"/>
-          </a:solidFill>
-          <a:ln w="12700">
-            <a:solidFill>
-              <a:srgbClr val="DB2777"/>
-            </a:solidFill>
-            <a:prstDash val="solid"/>
-          </a:ln>
-        </p:spPr>
-      </p:sp>
-      <p:sp>
-        <p:nvSpPr>
-          <p:cNvPr id="53" name="Text 51"/>
-          <p:cNvSpPr/>
-          <p:nvPr/>
-        </p:nvSpPr>
-        <p:spPr>
-          <a:xfrm>
-            <a:off x="2546188" y="4169664"/>
-            <a:ext cx="543652" cy="384048"/>
-          </a:xfrm>
-          <a:prstGeom prst="rect">
-            <a:avLst/>
-          </a:prstGeom>
-          <a:noFill/>
-          <a:ln/>
-        </p:spPr>
-        <p:txBody>
-          <a:bodyPr wrap="square" lIns="0" tIns="0" rIns="0" bIns="0" rtlCol="0" anchor="ctr"/>
-          <a:lstStyle/>
-          <a:p>
-            <a:pPr algn="ctr" indent="0" marL="0">
-              <a:buNone/>
-            </a:pPr>
-            <a:r>
-              <a:rPr lang="en-US" sz="900" b="1" dirty="0">
-                <a:solidFill>
-                  <a:srgbClr val="9D174D"/>
-                </a:solidFill>
-                <a:latin typeface="Trebuchet MS" pitchFamily="34" charset="0"/>
-                <a:ea typeface="Trebuchet MS" pitchFamily="34" charset="-122"/>
-                <a:cs typeface="Trebuchet MS" pitchFamily="34" charset="-120"/>
-              </a:rPr>
-              <a:t>r</a:t>
-            </a:r>
-            <a:endParaRPr lang="en-US" sz="900" dirty="0"/>
-          </a:p>
-        </p:txBody>
-      </p:sp>
-      <p:sp>
-        <p:nvSpPr>
-          <p:cNvPr id="54" name="Shape 52"/>
-          <p:cNvSpPr/>
-          <p:nvPr/>
-        </p:nvSpPr>
-        <p:spPr>
-          <a:xfrm>
-            <a:off x="3140133" y="4169664"/>
-            <a:ext cx="543652" cy="384048"/>
-          </a:xfrm>
-          <a:prstGeom prst="rect">
-            <a:avLst>
-              <a:gd name="adj" fmla="val 9524"/>
-            </a:avLst>
-          </a:prstGeom>
-          <a:solidFill>
-            <a:srgbClr val="FFFFFF"/>
-          </a:solidFill>
-          <a:ln w="12700">
-            <a:solidFill>
-              <a:srgbClr val="DB2777"/>
-            </a:solidFill>
-            <a:prstDash val="solid"/>
-          </a:ln>
-        </p:spPr>
-      </p:sp>
-      <p:sp>
-        <p:nvSpPr>
-          <p:cNvPr id="55" name="Text 53"/>
-          <p:cNvSpPr/>
-          <p:nvPr/>
-        </p:nvSpPr>
-        <p:spPr>
-          <a:xfrm>
-            <a:off x="3140133" y="4169664"/>
-            <a:ext cx="543652" cy="384048"/>
-          </a:xfrm>
-          <a:prstGeom prst="rect">
-            <a:avLst/>
-          </a:prstGeom>
-          <a:noFill/>
-          <a:ln/>
-        </p:spPr>
-        <p:txBody>
-          <a:bodyPr wrap="square" lIns="0" tIns="0" rIns="0" bIns="0" rtlCol="0" anchor="ctr"/>
-          <a:lstStyle/>
-          <a:p>
-            <a:pPr algn="ctr" indent="0" marL="0">
-              <a:buNone/>
-            </a:pPr>
-            <a:r>
-              <a:rPr lang="en-US" sz="900" b="1" dirty="0">
-                <a:solidFill>
-                  <a:srgbClr val="9D174D"/>
-                </a:solidFill>
-                <a:latin typeface="Trebuchet MS" pitchFamily="34" charset="0"/>
-                <a:ea typeface="Trebuchet MS" pitchFamily="34" charset="-122"/>
-                <a:cs typeface="Trebuchet MS" pitchFamily="34" charset="-120"/>
-              </a:rPr>
-              <a:t>r</a:t>
-            </a:r>
-            <a:endParaRPr lang="en-US" sz="900" dirty="0"/>
-          </a:p>
-        </p:txBody>
-      </p:sp>
-      <p:sp>
-        <p:nvSpPr>
-          <p:cNvPr id="56" name="Shape 54"/>
-          <p:cNvSpPr/>
-          <p:nvPr/>
-        </p:nvSpPr>
-        <p:spPr>
-          <a:xfrm>
-            <a:off x="3734077" y="4169664"/>
-            <a:ext cx="543652" cy="384048"/>
-          </a:xfrm>
-          <a:prstGeom prst="rect">
-            <a:avLst>
-              <a:gd name="adj" fmla="val 9524"/>
-            </a:avLst>
-          </a:prstGeom>
-          <a:solidFill>
-            <a:srgbClr val="FFFFFF"/>
-          </a:solidFill>
-          <a:ln w="12700">
-            <a:solidFill>
-              <a:srgbClr val="DB2777"/>
-            </a:solidFill>
-            <a:prstDash val="solid"/>
-          </a:ln>
-        </p:spPr>
-      </p:sp>
-      <p:sp>
-        <p:nvSpPr>
-          <p:cNvPr id="57" name="Text 55"/>
-          <p:cNvSpPr/>
-          <p:nvPr/>
-        </p:nvSpPr>
-        <p:spPr>
-          <a:xfrm>
-            <a:off x="3734077" y="4169664"/>
-            <a:ext cx="543652" cy="384048"/>
-          </a:xfrm>
-          <a:prstGeom prst="rect">
-            <a:avLst/>
-          </a:prstGeom>
-          <a:noFill/>
-          <a:ln/>
-        </p:spPr>
-        <p:txBody>
-          <a:bodyPr wrap="square" lIns="0" tIns="0" rIns="0" bIns="0" rtlCol="0" anchor="ctr"/>
-          <a:lstStyle/>
-          <a:p>
-            <a:pPr algn="ctr" indent="0" marL="0">
-              <a:buNone/>
-            </a:pPr>
-            <a:r>
-              <a:rPr lang="en-US" sz="900" b="1" dirty="0">
-                <a:solidFill>
-                  <a:srgbClr val="9D174D"/>
-                </a:solidFill>
-                <a:latin typeface="Trebuchet MS" pitchFamily="34" charset="0"/>
-                <a:ea typeface="Trebuchet MS" pitchFamily="34" charset="-122"/>
-                <a:cs typeface="Trebuchet MS" pitchFamily="34" charset="-120"/>
-              </a:rPr>
-              <a:t>e</a:t>
-            </a:r>
-            <a:endParaRPr lang="en-US" sz="900" dirty="0"/>
-          </a:p>
-        </p:txBody>
-      </p:sp>
-      <p:sp>
-        <p:nvSpPr>
-          <p:cNvPr id="58" name="Shape 56"/>
-          <p:cNvSpPr/>
-          <p:nvPr/>
-        </p:nvSpPr>
-        <p:spPr>
-          <a:xfrm>
-            <a:off x="4328021" y="4169664"/>
-            <a:ext cx="543652" cy="384048"/>
-          </a:xfrm>
-          <a:prstGeom prst="rect">
-            <a:avLst>
-              <a:gd name="adj" fmla="val 9524"/>
-            </a:avLst>
-          </a:prstGeom>
-          <a:solidFill>
-            <a:srgbClr val="FFFFFF"/>
-          </a:solidFill>
-          <a:ln w="12700">
-            <a:solidFill>
-              <a:srgbClr val="DB2777"/>
-            </a:solidFill>
-            <a:prstDash val="solid"/>
-          </a:ln>
-        </p:spPr>
-      </p:sp>
-      <p:sp>
-        <p:nvSpPr>
-          <p:cNvPr id="59" name="Text 57"/>
-          <p:cNvSpPr/>
-          <p:nvPr/>
-        </p:nvSpPr>
-        <p:spPr>
-          <a:xfrm>
-            <a:off x="4328021" y="4169664"/>
-            <a:ext cx="543652" cy="384048"/>
-          </a:xfrm>
-          <a:prstGeom prst="rect">
-            <a:avLst/>
-          </a:prstGeom>
-          <a:noFill/>
-          <a:ln/>
-        </p:spPr>
-        <p:txBody>
-          <a:bodyPr wrap="square" lIns="0" tIns="0" rIns="0" bIns="0" rtlCol="0" anchor="ctr"/>
-          <a:lstStyle/>
-          <a:p>
-            <a:pPr algn="ctr" indent="0" marL="0">
-              <a:buNone/>
-            </a:pPr>
-            <a:r>
-              <a:rPr lang="en-US" sz="900" b="1" dirty="0">
-                <a:solidFill>
-                  <a:srgbClr val="9D174D"/>
-                </a:solidFill>
-                <a:latin typeface="Trebuchet MS" pitchFamily="34" charset="0"/>
-                <a:ea typeface="Trebuchet MS" pitchFamily="34" charset="-122"/>
-                <a:cs typeface="Trebuchet MS" pitchFamily="34" charset="-120"/>
-              </a:rPr>
-              <a:t>p</a:t>
-            </a:r>
-            <a:endParaRPr lang="en-US" sz="900" dirty="0"/>
-          </a:p>
-        </p:txBody>
-      </p:sp>
-      <p:sp>
-        <p:nvSpPr>
-          <p:cNvPr id="60" name="Shape 58"/>
-          <p:cNvSpPr/>
-          <p:nvPr/>
-        </p:nvSpPr>
-        <p:spPr>
-          <a:xfrm>
-            <a:off x="4921966" y="4169664"/>
-            <a:ext cx="543652" cy="384048"/>
-          </a:xfrm>
-          <a:prstGeom prst="rect">
-            <a:avLst>
-              <a:gd name="adj" fmla="val 9524"/>
-            </a:avLst>
-          </a:prstGeom>
-          <a:solidFill>
-            <a:srgbClr val="FFFFFF"/>
-          </a:solidFill>
-          <a:ln w="12700">
-            <a:solidFill>
-              <a:srgbClr val="DB2777"/>
-            </a:solidFill>
-            <a:prstDash val="solid"/>
-          </a:ln>
-        </p:spPr>
-      </p:sp>
-      <p:sp>
-        <p:nvSpPr>
-          <p:cNvPr id="61" name="Text 59"/>
-          <p:cNvSpPr/>
-          <p:nvPr/>
-        </p:nvSpPr>
-        <p:spPr>
-          <a:xfrm>
-            <a:off x="4921966" y="4169664"/>
-            <a:ext cx="543652" cy="384048"/>
-          </a:xfrm>
-          <a:prstGeom prst="rect">
-            <a:avLst/>
-          </a:prstGeom>
-          <a:noFill/>
-          <a:ln/>
-        </p:spPr>
-        <p:txBody>
-          <a:bodyPr wrap="square" lIns="0" tIns="0" rIns="0" bIns="0" rtlCol="0" anchor="ctr"/>
-          <a:lstStyle/>
-          <a:p>
-            <a:pPr algn="ctr" indent="0" marL="0">
-              <a:buNone/>
-            </a:pPr>
-            <a:r>
-              <a:rPr lang="en-US" sz="900" b="1" dirty="0">
-                <a:solidFill>
-                  <a:srgbClr val="9D174D"/>
-                </a:solidFill>
-                <a:latin typeface="Trebuchet MS" pitchFamily="34" charset="0"/>
-                <a:ea typeface="Trebuchet MS" pitchFamily="34" charset="-122"/>
-                <a:cs typeface="Trebuchet MS" pitchFamily="34" charset="-120"/>
-              </a:rPr>
-              <a:t>l</a:t>
-            </a:r>
-            <a:endParaRPr lang="en-US" sz="900" dirty="0"/>
-          </a:p>
-        </p:txBody>
-      </p:sp>
-      <p:sp>
-        <p:nvSpPr>
-          <p:cNvPr id="62" name="Shape 60"/>
-          <p:cNvSpPr/>
-          <p:nvPr/>
-        </p:nvSpPr>
-        <p:spPr>
-          <a:xfrm>
-            <a:off x="5515910" y="4169664"/>
-            <a:ext cx="543652" cy="384048"/>
-          </a:xfrm>
-          <a:prstGeom prst="rect">
-            <a:avLst>
-              <a:gd name="adj" fmla="val 9524"/>
-            </a:avLst>
-          </a:prstGeom>
-          <a:solidFill>
-            <a:srgbClr val="FFFFFF"/>
-          </a:solidFill>
-          <a:ln w="12700">
-            <a:solidFill>
-              <a:srgbClr val="DB2777"/>
-            </a:solidFill>
-            <a:prstDash val="solid"/>
-          </a:ln>
-        </p:spPr>
-      </p:sp>
-      <p:sp>
-        <p:nvSpPr>
-          <p:cNvPr id="63" name="Text 61"/>
-          <p:cNvSpPr/>
-          <p:nvPr/>
-        </p:nvSpPr>
-        <p:spPr>
-          <a:xfrm>
-            <a:off x="5515910" y="4169664"/>
-            <a:ext cx="543652" cy="384048"/>
-          </a:xfrm>
-          <a:prstGeom prst="rect">
-            <a:avLst/>
-          </a:prstGeom>
-          <a:noFill/>
-          <a:ln/>
-        </p:spPr>
-        <p:txBody>
-          <a:bodyPr wrap="square" lIns="0" tIns="0" rIns="0" bIns="0" rtlCol="0" anchor="ctr"/>
-          <a:lstStyle/>
-          <a:p>
-            <a:pPr algn="ctr" indent="0" marL="0">
-              <a:buNone/>
-            </a:pPr>
-            <a:r>
-              <a:rPr lang="en-US" sz="900" b="1" dirty="0">
-                <a:solidFill>
-                  <a:srgbClr val="9D174D"/>
-                </a:solidFill>
-                <a:latin typeface="Trebuchet MS" pitchFamily="34" charset="0"/>
-                <a:ea typeface="Trebuchet MS" pitchFamily="34" charset="-122"/>
-                <a:cs typeface="Trebuchet MS" pitchFamily="34" charset="-120"/>
-              </a:rPr>
-              <a:t>a</a:t>
-            </a:r>
-            <a:endParaRPr lang="en-US" sz="900" dirty="0"/>
-          </a:p>
-        </p:txBody>
-      </p:sp>
-      <p:sp>
-        <p:nvSpPr>
-          <p:cNvPr id="64" name="Shape 62"/>
-          <p:cNvSpPr/>
-          <p:nvPr/>
-        </p:nvSpPr>
-        <p:spPr>
-          <a:xfrm>
-            <a:off x="6109855" y="4169664"/>
-            <a:ext cx="543652" cy="384048"/>
-          </a:xfrm>
-          <a:prstGeom prst="rect">
-            <a:avLst>
-              <a:gd name="adj" fmla="val 9524"/>
-            </a:avLst>
-          </a:prstGeom>
-          <a:solidFill>
-            <a:srgbClr val="FFFFFF"/>
-          </a:solidFill>
-          <a:ln w="12700">
-            <a:solidFill>
-              <a:srgbClr val="DB2777"/>
-            </a:solidFill>
-            <a:prstDash val="solid"/>
-          </a:ln>
-        </p:spPr>
-      </p:sp>
-      <p:sp>
-        <p:nvSpPr>
-          <p:cNvPr id="65" name="Text 63"/>
-          <p:cNvSpPr/>
-          <p:nvPr/>
-        </p:nvSpPr>
-        <p:spPr>
-          <a:xfrm>
-            <a:off x="6109855" y="4169664"/>
-            <a:ext cx="543652" cy="384048"/>
-          </a:xfrm>
-          <a:prstGeom prst="rect">
-            <a:avLst/>
-          </a:prstGeom>
-          <a:noFill/>
-          <a:ln/>
-        </p:spPr>
-        <p:txBody>
-          <a:bodyPr wrap="square" lIns="0" tIns="0" rIns="0" bIns="0" rtlCol="0" anchor="ctr"/>
-          <a:lstStyle/>
-          <a:p>
-            <a:pPr algn="ctr" indent="0" marL="0">
-              <a:buNone/>
-            </a:pPr>
-            <a:r>
-              <a:rPr lang="en-US" sz="900" b="1" dirty="0">
-                <a:solidFill>
-                  <a:srgbClr val="9D174D"/>
-                </a:solidFill>
-                <a:latin typeface="Trebuchet MS" pitchFamily="34" charset="0"/>
-                <a:ea typeface="Trebuchet MS" pitchFamily="34" charset="-122"/>
-                <a:cs typeface="Trebuchet MS" pitchFamily="34" charset="-120"/>
-              </a:rPr>
-              <a:t>ce</a:t>
-            </a:r>
-            <a:endParaRPr lang="en-US" sz="900" dirty="0"/>
-          </a:p>
-        </p:txBody>
-      </p:sp>
-      <p:sp>
-        <p:nvSpPr>
-          <p:cNvPr id="66" name="Text 64"/>
-          <p:cNvSpPr/>
-          <p:nvPr/>
-        </p:nvSpPr>
-        <p:spPr>
-          <a:xfrm>
-            <a:off x="6109855" y="4572000"/>
-            <a:ext cx="543652" cy="219456"/>
-          </a:xfrm>
-          <a:prstGeom prst="rect">
-            <a:avLst/>
-          </a:prstGeom>
-          <a:noFill/>
-          <a:ln/>
-        </p:spPr>
-        <p:txBody>
-          <a:bodyPr wrap="square" lIns="0" tIns="0" rIns="0" bIns="0" rtlCol="0" anchor="t"/>
-          <a:lstStyle/>
-          <a:p>
-            <a:pPr algn="ctr" indent="0" marL="0">
-              <a:buNone/>
-            </a:pPr>
-            <a:r>
-              <a:rPr lang="en-US" sz="750" i="1" dirty="0">
-                <a:solidFill>
-                  <a:srgbClr val="94A3B8"/>
-                </a:solidFill>
-                <a:latin typeface="Calibri" pitchFamily="34" charset="0"/>
-                <a:ea typeface="Calibri" pitchFamily="34" charset="-122"/>
-                <a:cs typeface="Calibri" pitchFamily="34" charset="-120"/>
-              </a:rPr>
-              <a:t>/s/</a:t>
-            </a:r>
-            <a:endParaRPr lang="en-US" sz="750" dirty="0"/>
-          </a:p>
-        </p:txBody>
-      </p:sp>
-      <p:sp>
-        <p:nvSpPr>
-          <p:cNvPr id="67" name="Shape 65"/>
-          <p:cNvSpPr/>
-          <p:nvPr/>
-        </p:nvSpPr>
-        <p:spPr>
-          <a:xfrm>
-            <a:off x="6703799" y="4169664"/>
-            <a:ext cx="543652" cy="384048"/>
-          </a:xfrm>
-          <a:prstGeom prst="rect">
-            <a:avLst>
-              <a:gd name="adj" fmla="val 9524"/>
-            </a:avLst>
-          </a:prstGeom>
-          <a:solidFill>
-            <a:srgbClr val="FFFFFF"/>
-          </a:solidFill>
-          <a:ln w="12700">
-            <a:solidFill>
-              <a:srgbClr val="DB2777"/>
-            </a:solidFill>
-            <a:prstDash val="solid"/>
-          </a:ln>
-        </p:spPr>
-      </p:sp>
-      <p:sp>
-        <p:nvSpPr>
-          <p:cNvPr id="68" name="Text 66"/>
-          <p:cNvSpPr/>
-          <p:nvPr/>
-        </p:nvSpPr>
-        <p:spPr>
-          <a:xfrm>
-            <a:off x="6703799" y="4169664"/>
-            <a:ext cx="543652" cy="384048"/>
-          </a:xfrm>
-          <a:prstGeom prst="rect">
-            <a:avLst/>
-          </a:prstGeom>
-          <a:noFill/>
-          <a:ln/>
-        </p:spPr>
-        <p:txBody>
-          <a:bodyPr wrap="square" lIns="0" tIns="0" rIns="0" bIns="0" rtlCol="0" anchor="ctr"/>
-          <a:lstStyle/>
-          <a:p>
-            <a:pPr algn="ctr" indent="0" marL="0">
-              <a:buNone/>
-            </a:pPr>
-            <a:r>
-              <a:rPr lang="en-US" sz="900" b="1" dirty="0">
-                <a:solidFill>
-                  <a:srgbClr val="9D174D"/>
-                </a:solidFill>
-                <a:latin typeface="Trebuchet MS" pitchFamily="34" charset="0"/>
-                <a:ea typeface="Trebuchet MS" pitchFamily="34" charset="-122"/>
-                <a:cs typeface="Trebuchet MS" pitchFamily="34" charset="-120"/>
-              </a:rPr>
-              <a:t>a</a:t>
-            </a:r>
-            <a:endParaRPr lang="en-US" sz="900" dirty="0"/>
-          </a:p>
-        </p:txBody>
-      </p:sp>
-      <p:sp>
-        <p:nvSpPr>
-          <p:cNvPr id="69" name="Shape 67"/>
-          <p:cNvSpPr/>
-          <p:nvPr/>
-        </p:nvSpPr>
-        <p:spPr>
-          <a:xfrm>
-            <a:off x="7297743" y="4169664"/>
-            <a:ext cx="543652" cy="384048"/>
-          </a:xfrm>
-          <a:prstGeom prst="rect">
-            <a:avLst>
-              <a:gd name="adj" fmla="val 9524"/>
-            </a:avLst>
-          </a:prstGeom>
-          <a:solidFill>
-            <a:srgbClr val="FFFFFF"/>
-          </a:solidFill>
-          <a:ln w="12700">
-            <a:solidFill>
-              <a:srgbClr val="DB2777"/>
-            </a:solidFill>
-            <a:prstDash val="solid"/>
-          </a:ln>
-        </p:spPr>
-      </p:sp>
-      <p:sp>
-        <p:nvSpPr>
-          <p:cNvPr id="70" name="Text 68"/>
-          <p:cNvSpPr/>
-          <p:nvPr/>
-        </p:nvSpPr>
-        <p:spPr>
-          <a:xfrm>
-            <a:off x="7297743" y="4169664"/>
-            <a:ext cx="543652" cy="384048"/>
-          </a:xfrm>
-          <a:prstGeom prst="rect">
-            <a:avLst/>
-          </a:prstGeom>
-          <a:noFill/>
-          <a:ln/>
-        </p:spPr>
-        <p:txBody>
-          <a:bodyPr wrap="square" lIns="0" tIns="0" rIns="0" bIns="0" rtlCol="0" anchor="ctr"/>
-          <a:lstStyle/>
-          <a:p>
-            <a:pPr algn="ctr" indent="0" marL="0">
-              <a:buNone/>
-            </a:pPr>
-            <a:r>
-              <a:rPr lang="en-US" sz="900" b="1" dirty="0">
-                <a:solidFill>
-                  <a:srgbClr val="9D174D"/>
-                </a:solidFill>
-                <a:latin typeface="Trebuchet MS" pitchFamily="34" charset="0"/>
-                <a:ea typeface="Trebuchet MS" pitchFamily="34" charset="-122"/>
-                <a:cs typeface="Trebuchet MS" pitchFamily="34" charset="-120"/>
-              </a:rPr>
-              <a:t>b</a:t>
-            </a:r>
-            <a:endParaRPr lang="en-US" sz="900" dirty="0"/>
-          </a:p>
-        </p:txBody>
-      </p:sp>
-      <p:sp>
-        <p:nvSpPr>
-          <p:cNvPr id="71" name="Shape 69"/>
-          <p:cNvSpPr/>
-          <p:nvPr/>
-        </p:nvSpPr>
-        <p:spPr>
-          <a:xfrm>
-            <a:off x="7891688" y="4169664"/>
-            <a:ext cx="543652" cy="384048"/>
-          </a:xfrm>
-          <a:prstGeom prst="rect">
-            <a:avLst>
-              <a:gd name="adj" fmla="val 9524"/>
-            </a:avLst>
-          </a:prstGeom>
-          <a:solidFill>
-            <a:srgbClr val="FFFFFF"/>
-          </a:solidFill>
-          <a:ln w="12700">
-            <a:solidFill>
-              <a:srgbClr val="DB2777"/>
-            </a:solidFill>
-            <a:prstDash val="solid"/>
-          </a:ln>
-        </p:spPr>
-      </p:sp>
-      <p:sp>
-        <p:nvSpPr>
-          <p:cNvPr id="72" name="Text 70"/>
+          <p:cNvPr id="71" name="Text 69"/>
           <p:cNvSpPr/>
           <p:nvPr/>
         </p:nvSpPr>
@@ -25786,7 +25669,7 @@
                 <a:ea typeface="Trebuchet MS" pitchFamily="34" charset="-122"/>
                 <a:cs typeface="Trebuchet MS" pitchFamily="34" charset="-120"/>
               </a:rPr>
-              <a:t>replacement</a:t>
+              <a:t>replaceable</a:t>
             </a:r>
             <a:endParaRPr lang="en-US" sz="2800" dirty="0"/>
           </a:p>
@@ -26613,7 +26496,7 @@
                 <a:ea typeface="Trebuchet MS" pitchFamily="34" charset="-122"/>
                 <a:cs typeface="Trebuchet MS" pitchFamily="34" charset="-120"/>
               </a:rPr>
-              <a:t>replacement</a:t>
+              <a:t>replaceable</a:t>
             </a:r>
             <a:endParaRPr lang="en-US" sz="2800" dirty="0"/>
           </a:p>
@@ -26903,7 +26786,7 @@
                 <a:ea typeface="Calibri" pitchFamily="34" charset="-122"/>
                 <a:cs typeface="Calibri" pitchFamily="34" charset="-120"/>
               </a:rPr>
-              <a:t>put in position</a:t>
+              <a:t>a position or location</a:t>
             </a:r>
             <a:endParaRPr lang="en-US" sz="850" dirty="0"/>
           </a:p>
@@ -26976,7 +26859,7 @@
                 <a:ea typeface="Trebuchet MS" pitchFamily="34" charset="-122"/>
                 <a:cs typeface="Trebuchet MS" pitchFamily="34" charset="-120"/>
               </a:rPr>
-              <a:t>ment</a:t>
+              <a:t>able</a:t>
             </a:r>
             <a:endParaRPr lang="en-US" sz="1300" dirty="0"/>
           </a:p>
@@ -27015,7 +26898,7 @@
                 <a:ea typeface="Calibri" pitchFamily="34" charset="-122"/>
                 <a:cs typeface="Calibri" pitchFamily="34" charset="-120"/>
               </a:rPr>
-              <a:t>result or action</a:t>
+              <a:t>able to be</a:t>
             </a:r>
             <a:endParaRPr lang="en-US" sz="850" dirty="0"/>
           </a:p>
@@ -28429,7 +28312,7 @@
                 <a:ea typeface="Trebuchet MS" pitchFamily="34" charset="-122"/>
                 <a:cs typeface="Trebuchet MS" pitchFamily="34" charset="-120"/>
               </a:rPr>
-              <a:t>replacement</a:t>
+              <a:t>replaceable</a:t>
             </a:r>
             <a:endParaRPr lang="en-US" sz="2800" dirty="0"/>
           </a:p>
@@ -28719,7 +28602,7 @@
                 <a:ea typeface="Calibri" pitchFamily="34" charset="-122"/>
                 <a:cs typeface="Calibri" pitchFamily="34" charset="-120"/>
               </a:rPr>
-              <a:t>put in position</a:t>
+              <a:t>a position or location</a:t>
             </a:r>
             <a:endParaRPr lang="en-US" sz="850" dirty="0"/>
           </a:p>
@@ -28792,7 +28675,7 @@
                 <a:ea typeface="Trebuchet MS" pitchFamily="34" charset="-122"/>
                 <a:cs typeface="Trebuchet MS" pitchFamily="34" charset="-120"/>
               </a:rPr>
-              <a:t>ment</a:t>
+              <a:t>able</a:t>
             </a:r>
             <a:endParaRPr lang="en-US" sz="1300" dirty="0"/>
           </a:p>
@@ -28831,7 +28714,7 @@
                 <a:ea typeface="Calibri" pitchFamily="34" charset="-122"/>
                 <a:cs typeface="Calibri" pitchFamily="34" charset="-120"/>
               </a:rPr>
-              <a:t>result or action</a:t>
+              <a:t>able to be</a:t>
             </a:r>
             <a:endParaRPr lang="en-US" sz="850" dirty="0"/>
           </a:p>
@@ -28938,8 +28821,8 @@
         </p:nvSpPr>
         <p:spPr>
           <a:xfrm>
-            <a:off x="2313432" y="3364992"/>
-            <a:ext cx="1645920" cy="475488"/>
+            <a:off x="1975104" y="3364992"/>
+            <a:ext cx="1554480" cy="475488"/>
           </a:xfrm>
           <a:prstGeom prst="rect">
             <a:avLst>
@@ -28965,8 +28848,8 @@
         </p:nvSpPr>
         <p:spPr>
           <a:xfrm>
-            <a:off x="2313432" y="3364992"/>
-            <a:ext cx="1645920" cy="475488"/>
+            <a:off x="1975104" y="3364992"/>
+            <a:ext cx="1554480" cy="475488"/>
           </a:xfrm>
           <a:prstGeom prst="rect">
             <a:avLst/>
@@ -29004,8 +28887,8 @@
         </p:nvSpPr>
         <p:spPr>
           <a:xfrm>
-            <a:off x="3959352" y="3364992"/>
-            <a:ext cx="411480" cy="475488"/>
+            <a:off x="3529584" y="3364992"/>
+            <a:ext cx="73152" cy="475488"/>
           </a:xfrm>
           <a:prstGeom prst="rect">
             <a:avLst/>
@@ -29043,8 +28926,8 @@
         </p:nvSpPr>
         <p:spPr>
           <a:xfrm>
-            <a:off x="4370832" y="3364992"/>
-            <a:ext cx="1645920" cy="475488"/>
+            <a:off x="3602736" y="3364992"/>
+            <a:ext cx="1554480" cy="475488"/>
           </a:xfrm>
           <a:prstGeom prst="rect">
             <a:avLst>
@@ -29070,8 +28953,8 @@
         </p:nvSpPr>
         <p:spPr>
           <a:xfrm>
-            <a:off x="4370832" y="3364992"/>
-            <a:ext cx="1645920" cy="475488"/>
+            <a:off x="3602736" y="3364992"/>
+            <a:ext cx="1554480" cy="475488"/>
           </a:xfrm>
           <a:prstGeom prst="rect">
             <a:avLst/>
@@ -29109,8 +28992,8 @@
         </p:nvSpPr>
         <p:spPr>
           <a:xfrm>
-            <a:off x="6016752" y="3364992"/>
-            <a:ext cx="411480" cy="475488"/>
+            <a:off x="5157216" y="3364992"/>
+            <a:ext cx="73152" cy="475488"/>
           </a:xfrm>
           <a:prstGeom prst="rect">
             <a:avLst/>
@@ -29148,8 +29031,8 @@
         </p:nvSpPr>
         <p:spPr>
           <a:xfrm>
-            <a:off x="6428232" y="3364992"/>
-            <a:ext cx="1645920" cy="475488"/>
+            <a:off x="5230368" y="3364992"/>
+            <a:ext cx="1554480" cy="475488"/>
           </a:xfrm>
           <a:prstGeom prst="rect">
             <a:avLst>
@@ -29175,8 +29058,8 @@
         </p:nvSpPr>
         <p:spPr>
           <a:xfrm>
-            <a:off x="6428232" y="3364992"/>
-            <a:ext cx="1645920" cy="475488"/>
+            <a:off x="5230368" y="3364992"/>
+            <a:ext cx="1554480" cy="475488"/>
           </a:xfrm>
           <a:prstGeom prst="rect">
             <a:avLst/>
@@ -29200,7 +29083,7 @@
                 <a:ea typeface="Trebuchet MS" pitchFamily="34" charset="-122"/>
                 <a:cs typeface="Trebuchet MS" pitchFamily="34" charset="-120"/>
               </a:rPr>
-              <a:t>ment</a:t>
+              <a:t>a</a:t>
             </a:r>
             <a:endParaRPr lang="en-US" sz="1400" dirty="0"/>
           </a:p>
@@ -29208,7 +29091,112 @@
       </p:sp>
       <p:sp>
         <p:nvSpPr>
-          <p:cNvPr id="36" name="Shape 34"/>
+          <p:cNvPr id="36" name="Text 34"/>
+          <p:cNvSpPr/>
+          <p:nvPr/>
+        </p:nvSpPr>
+        <p:spPr>
+          <a:xfrm>
+            <a:off x="6784848" y="3364992"/>
+            <a:ext cx="73152" cy="475488"/>
+          </a:xfrm>
+          <a:prstGeom prst="rect">
+            <a:avLst/>
+          </a:prstGeom>
+          <a:noFill/>
+          <a:ln/>
+        </p:spPr>
+        <p:txBody>
+          <a:bodyPr wrap="square" lIns="0" tIns="0" rIns="0" bIns="0" rtlCol="0" anchor="ctr"/>
+          <a:lstStyle/>
+          <a:p>
+            <a:pPr algn="ctr" indent="0" marL="0">
+              <a:buNone/>
+            </a:pPr>
+            <a:r>
+              <a:rPr lang="en-US" sz="1600" b="1" dirty="0">
+                <a:solidFill>
+                  <a:srgbClr val="0D9488"/>
+                </a:solidFill>
+                <a:latin typeface="Trebuchet MS" pitchFamily="34" charset="0"/>
+                <a:ea typeface="Trebuchet MS" pitchFamily="34" charset="-122"/>
+                <a:cs typeface="Trebuchet MS" pitchFamily="34" charset="-120"/>
+              </a:rPr>
+              <a:t>·</a:t>
+            </a:r>
+            <a:endParaRPr lang="en-US" sz="1600" dirty="0"/>
+          </a:p>
+        </p:txBody>
+      </p:sp>
+      <p:sp>
+        <p:nvSpPr>
+          <p:cNvPr id="37" name="Shape 35"/>
+          <p:cNvSpPr/>
+          <p:nvPr/>
+        </p:nvSpPr>
+        <p:spPr>
+          <a:xfrm>
+            <a:off x="6858000" y="3364992"/>
+            <a:ext cx="1554480" cy="475488"/>
+          </a:xfrm>
+          <a:prstGeom prst="rect">
+            <a:avLst>
+              <a:gd name="adj" fmla="val 9615"/>
+            </a:avLst>
+          </a:prstGeom>
+          <a:solidFill>
+            <a:srgbClr val="FFFFFF"/>
+          </a:solidFill>
+          <a:ln w="12700">
+            <a:solidFill>
+              <a:srgbClr val="0D9488"/>
+            </a:solidFill>
+            <a:prstDash val="solid"/>
+          </a:ln>
+        </p:spPr>
+      </p:sp>
+      <p:sp>
+        <p:nvSpPr>
+          <p:cNvPr id="38" name="Text 36"/>
+          <p:cNvSpPr/>
+          <p:nvPr/>
+        </p:nvSpPr>
+        <p:spPr>
+          <a:xfrm>
+            <a:off x="6858000" y="3364992"/>
+            <a:ext cx="1554480" cy="475488"/>
+          </a:xfrm>
+          <a:prstGeom prst="rect">
+            <a:avLst/>
+          </a:prstGeom>
+          <a:noFill/>
+          <a:ln/>
+        </p:spPr>
+        <p:txBody>
+          <a:bodyPr wrap="square" lIns="0" tIns="0" rIns="0" bIns="0" rtlCol="0" anchor="ctr"/>
+          <a:lstStyle/>
+          <a:p>
+            <a:pPr algn="ctr" indent="0" marL="0">
+              <a:buNone/>
+            </a:pPr>
+            <a:r>
+              <a:rPr lang="en-US" sz="1400" b="1" dirty="0">
+                <a:solidFill>
+                  <a:srgbClr val="0D9488"/>
+                </a:solidFill>
+                <a:latin typeface="Trebuchet MS" pitchFamily="34" charset="0"/>
+                <a:ea typeface="Trebuchet MS" pitchFamily="34" charset="-122"/>
+                <a:cs typeface="Trebuchet MS" pitchFamily="34" charset="-120"/>
+              </a:rPr>
+              <a:t>ble</a:t>
+            </a:r>
+            <a:endParaRPr lang="en-US" sz="1400" dirty="0"/>
+          </a:p>
+        </p:txBody>
+      </p:sp>
+      <p:sp>
+        <p:nvSpPr>
+          <p:cNvPr id="39" name="Shape 37"/>
           <p:cNvSpPr/>
           <p:nvPr/>
         </p:nvSpPr>
@@ -29235,7 +29223,7 @@
       </p:sp>
       <p:sp>
         <p:nvSpPr>
-          <p:cNvPr id="37" name="Text 35"/>
+          <p:cNvPr id="40" name="Text 38"/>
           <p:cNvSpPr/>
           <p:nvPr/>
         </p:nvSpPr>
@@ -29274,7 +29262,7 @@
       </p:sp>
       <p:sp>
         <p:nvSpPr>
-          <p:cNvPr id="38" name="Shape 36"/>
+          <p:cNvPr id="41" name="Shape 39"/>
           <p:cNvSpPr/>
           <p:nvPr/>
         </p:nvSpPr>
@@ -29301,7 +29289,7 @@
       </p:sp>
       <p:sp>
         <p:nvSpPr>
-          <p:cNvPr id="39" name="Text 37"/>
+          <p:cNvPr id="42" name="Text 40"/>
           <p:cNvSpPr/>
           <p:nvPr/>
         </p:nvSpPr>
@@ -29763,7 +29751,7 @@
                 <a:ea typeface="Trebuchet MS" pitchFamily="34" charset="-122"/>
                 <a:cs typeface="Trebuchet MS" pitchFamily="34" charset="-120"/>
               </a:rPr>
-              <a:t>replacement</a:t>
+              <a:t>replaceable</a:t>
             </a:r>
             <a:endParaRPr lang="en-US" sz="2800" dirty="0"/>
           </a:p>
@@ -30053,7 +30041,7 @@
                 <a:ea typeface="Calibri" pitchFamily="34" charset="-122"/>
                 <a:cs typeface="Calibri" pitchFamily="34" charset="-120"/>
               </a:rPr>
-              <a:t>put in position</a:t>
+              <a:t>a position or location</a:t>
             </a:r>
             <a:endParaRPr lang="en-US" sz="850" dirty="0"/>
           </a:p>
@@ -30126,7 +30114,7 @@
                 <a:ea typeface="Trebuchet MS" pitchFamily="34" charset="-122"/>
                 <a:cs typeface="Trebuchet MS" pitchFamily="34" charset="-120"/>
               </a:rPr>
-              <a:t>ment</a:t>
+              <a:t>able</a:t>
             </a:r>
             <a:endParaRPr lang="en-US" sz="1300" dirty="0"/>
           </a:p>
@@ -30165,7 +30153,7 @@
                 <a:ea typeface="Calibri" pitchFamily="34" charset="-122"/>
                 <a:cs typeface="Calibri" pitchFamily="34" charset="-120"/>
               </a:rPr>
-              <a:t>result or action</a:t>
+              <a:t>able to be</a:t>
             </a:r>
             <a:endParaRPr lang="en-US" sz="850" dirty="0"/>
           </a:p>
@@ -30272,8 +30260,8 @@
         </p:nvSpPr>
         <p:spPr>
           <a:xfrm>
-            <a:off x="2313432" y="3364992"/>
-            <a:ext cx="1645920" cy="475488"/>
+            <a:off x="1975104" y="3364992"/>
+            <a:ext cx="1554480" cy="475488"/>
           </a:xfrm>
           <a:prstGeom prst="rect">
             <a:avLst>
@@ -30299,8 +30287,8 @@
         </p:nvSpPr>
         <p:spPr>
           <a:xfrm>
-            <a:off x="2313432" y="3364992"/>
-            <a:ext cx="1645920" cy="475488"/>
+            <a:off x="1975104" y="3364992"/>
+            <a:ext cx="1554480" cy="475488"/>
           </a:xfrm>
           <a:prstGeom prst="rect">
             <a:avLst/>
@@ -30338,8 +30326,8 @@
         </p:nvSpPr>
         <p:spPr>
           <a:xfrm>
-            <a:off x="3959352" y="3364992"/>
-            <a:ext cx="411480" cy="475488"/>
+            <a:off x="3529584" y="3364992"/>
+            <a:ext cx="73152" cy="475488"/>
           </a:xfrm>
           <a:prstGeom prst="rect">
             <a:avLst/>
@@ -30377,8 +30365,8 @@
         </p:nvSpPr>
         <p:spPr>
           <a:xfrm>
-            <a:off x="4370832" y="3364992"/>
-            <a:ext cx="1645920" cy="475488"/>
+            <a:off x="3602736" y="3364992"/>
+            <a:ext cx="1554480" cy="475488"/>
           </a:xfrm>
           <a:prstGeom prst="rect">
             <a:avLst>
@@ -30404,8 +30392,8 @@
         </p:nvSpPr>
         <p:spPr>
           <a:xfrm>
-            <a:off x="4370832" y="3364992"/>
-            <a:ext cx="1645920" cy="475488"/>
+            <a:off x="3602736" y="3364992"/>
+            <a:ext cx="1554480" cy="475488"/>
           </a:xfrm>
           <a:prstGeom prst="rect">
             <a:avLst/>
@@ -30443,8 +30431,8 @@
         </p:nvSpPr>
         <p:spPr>
           <a:xfrm>
-            <a:off x="6016752" y="3364992"/>
-            <a:ext cx="411480" cy="475488"/>
+            <a:off x="5157216" y="3364992"/>
+            <a:ext cx="73152" cy="475488"/>
           </a:xfrm>
           <a:prstGeom prst="rect">
             <a:avLst/>
@@ -30482,8 +30470,8 @@
         </p:nvSpPr>
         <p:spPr>
           <a:xfrm>
-            <a:off x="6428232" y="3364992"/>
-            <a:ext cx="1645920" cy="475488"/>
+            <a:off x="5230368" y="3364992"/>
+            <a:ext cx="1554480" cy="475488"/>
           </a:xfrm>
           <a:prstGeom prst="rect">
             <a:avLst>
@@ -30509,8 +30497,8 @@
         </p:nvSpPr>
         <p:spPr>
           <a:xfrm>
-            <a:off x="6428232" y="3364992"/>
-            <a:ext cx="1645920" cy="475488"/>
+            <a:off x="5230368" y="3364992"/>
+            <a:ext cx="1554480" cy="475488"/>
           </a:xfrm>
           <a:prstGeom prst="rect">
             <a:avLst/>
@@ -30534,7 +30522,7 @@
                 <a:ea typeface="Trebuchet MS" pitchFamily="34" charset="-122"/>
                 <a:cs typeface="Trebuchet MS" pitchFamily="34" charset="-120"/>
               </a:rPr>
-              <a:t>ment</a:t>
+              <a:t>a</a:t>
             </a:r>
             <a:endParaRPr lang="en-US" sz="1400" dirty="0"/>
           </a:p>
@@ -30542,7 +30530,112 @@
       </p:sp>
       <p:sp>
         <p:nvSpPr>
-          <p:cNvPr id="36" name="Shape 34"/>
+          <p:cNvPr id="36" name="Text 34"/>
+          <p:cNvSpPr/>
+          <p:nvPr/>
+        </p:nvSpPr>
+        <p:spPr>
+          <a:xfrm>
+            <a:off x="6784848" y="3364992"/>
+            <a:ext cx="73152" cy="475488"/>
+          </a:xfrm>
+          <a:prstGeom prst="rect">
+            <a:avLst/>
+          </a:prstGeom>
+          <a:noFill/>
+          <a:ln/>
+        </p:spPr>
+        <p:txBody>
+          <a:bodyPr wrap="square" lIns="0" tIns="0" rIns="0" bIns="0" rtlCol="0" anchor="ctr"/>
+          <a:lstStyle/>
+          <a:p>
+            <a:pPr algn="ctr" indent="0" marL="0">
+              <a:buNone/>
+            </a:pPr>
+            <a:r>
+              <a:rPr lang="en-US" sz="1600" b="1" dirty="0">
+                <a:solidFill>
+                  <a:srgbClr val="0D9488"/>
+                </a:solidFill>
+                <a:latin typeface="Trebuchet MS" pitchFamily="34" charset="0"/>
+                <a:ea typeface="Trebuchet MS" pitchFamily="34" charset="-122"/>
+                <a:cs typeface="Trebuchet MS" pitchFamily="34" charset="-120"/>
+              </a:rPr>
+              <a:t>·</a:t>
+            </a:r>
+            <a:endParaRPr lang="en-US" sz="1600" dirty="0"/>
+          </a:p>
+        </p:txBody>
+      </p:sp>
+      <p:sp>
+        <p:nvSpPr>
+          <p:cNvPr id="37" name="Shape 35"/>
+          <p:cNvSpPr/>
+          <p:nvPr/>
+        </p:nvSpPr>
+        <p:spPr>
+          <a:xfrm>
+            <a:off x="6858000" y="3364992"/>
+            <a:ext cx="1554480" cy="475488"/>
+          </a:xfrm>
+          <a:prstGeom prst="rect">
+            <a:avLst>
+              <a:gd name="adj" fmla="val 9615"/>
+            </a:avLst>
+          </a:prstGeom>
+          <a:solidFill>
+            <a:srgbClr val="FFFFFF"/>
+          </a:solidFill>
+          <a:ln w="12700">
+            <a:solidFill>
+              <a:srgbClr val="0D9488"/>
+            </a:solidFill>
+            <a:prstDash val="solid"/>
+          </a:ln>
+        </p:spPr>
+      </p:sp>
+      <p:sp>
+        <p:nvSpPr>
+          <p:cNvPr id="38" name="Text 36"/>
+          <p:cNvSpPr/>
+          <p:nvPr/>
+        </p:nvSpPr>
+        <p:spPr>
+          <a:xfrm>
+            <a:off x="6858000" y="3364992"/>
+            <a:ext cx="1554480" cy="475488"/>
+          </a:xfrm>
+          <a:prstGeom prst="rect">
+            <a:avLst/>
+          </a:prstGeom>
+          <a:noFill/>
+          <a:ln/>
+        </p:spPr>
+        <p:txBody>
+          <a:bodyPr wrap="square" lIns="0" tIns="0" rIns="0" bIns="0" rtlCol="0" anchor="ctr"/>
+          <a:lstStyle/>
+          <a:p>
+            <a:pPr algn="ctr" indent="0" marL="0">
+              <a:buNone/>
+            </a:pPr>
+            <a:r>
+              <a:rPr lang="en-US" sz="1400" b="1" dirty="0">
+                <a:solidFill>
+                  <a:srgbClr val="0D9488"/>
+                </a:solidFill>
+                <a:latin typeface="Trebuchet MS" pitchFamily="34" charset="0"/>
+                <a:ea typeface="Trebuchet MS" pitchFamily="34" charset="-122"/>
+                <a:cs typeface="Trebuchet MS" pitchFamily="34" charset="-120"/>
+              </a:rPr>
+              <a:t>ble</a:t>
+            </a:r>
+            <a:endParaRPr lang="en-US" sz="1400" dirty="0"/>
+          </a:p>
+        </p:txBody>
+      </p:sp>
+      <p:sp>
+        <p:nvSpPr>
+          <p:cNvPr id="39" name="Shape 37"/>
           <p:cNvSpPr/>
           <p:nvPr/>
         </p:nvSpPr>
@@ -30569,7 +30662,7 @@
       </p:sp>
       <p:sp>
         <p:nvSpPr>
-          <p:cNvPr id="37" name="Text 35"/>
+          <p:cNvPr id="40" name="Text 38"/>
           <p:cNvSpPr/>
           <p:nvPr/>
         </p:nvSpPr>
@@ -30608,7 +30701,7 @@
       </p:sp>
       <p:sp>
         <p:nvSpPr>
-          <p:cNvPr id="38" name="Shape 36"/>
+          <p:cNvPr id="41" name="Shape 39"/>
           <p:cNvSpPr/>
           <p:nvPr/>
         </p:nvSpPr>
@@ -30635,14 +30728,14 @@
       </p:sp>
       <p:sp>
         <p:nvSpPr>
-          <p:cNvPr id="39" name="Shape 37"/>
-          <p:cNvSpPr/>
-          <p:nvPr/>
-        </p:nvSpPr>
-        <p:spPr>
-          <a:xfrm>
-            <a:off x="1951828" y="4169664"/>
-            <a:ext cx="603504" cy="384048"/>
+          <p:cNvPr id="42" name="Shape 40"/>
+          <p:cNvSpPr/>
+          <p:nvPr/>
+        </p:nvSpPr>
+        <p:spPr>
+          <a:xfrm>
+            <a:off x="1951330" y="4169664"/>
+            <a:ext cx="676656" cy="384048"/>
           </a:xfrm>
           <a:prstGeom prst="rect">
             <a:avLst>
@@ -30662,14 +30755,14 @@
       </p:sp>
       <p:sp>
         <p:nvSpPr>
-          <p:cNvPr id="40" name="Text 38"/>
-          <p:cNvSpPr/>
-          <p:nvPr/>
-        </p:nvSpPr>
-        <p:spPr>
-          <a:xfrm>
-            <a:off x="1951828" y="4169664"/>
-            <a:ext cx="603504" cy="384048"/>
+          <p:cNvPr id="43" name="Text 41"/>
+          <p:cNvSpPr/>
+          <p:nvPr/>
+        </p:nvSpPr>
+        <p:spPr>
+          <a:xfrm>
+            <a:off x="1951330" y="4169664"/>
+            <a:ext cx="676656" cy="384048"/>
           </a:xfrm>
           <a:prstGeom prst="rect">
             <a:avLst/>
@@ -30701,14 +30794,14 @@
       </p:sp>
       <p:sp>
         <p:nvSpPr>
-          <p:cNvPr id="41" name="Shape 39"/>
-          <p:cNvSpPr/>
-          <p:nvPr/>
-        </p:nvSpPr>
-        <p:spPr>
-          <a:xfrm>
-            <a:off x="2605209" y="4169664"/>
-            <a:ext cx="603504" cy="384048"/>
+          <p:cNvPr id="44" name="Shape 42"/>
+          <p:cNvSpPr/>
+          <p:nvPr/>
+        </p:nvSpPr>
+        <p:spPr>
+          <a:xfrm>
+            <a:off x="2677363" y="4169664"/>
+            <a:ext cx="676656" cy="384048"/>
           </a:xfrm>
           <a:prstGeom prst="rect">
             <a:avLst>
@@ -30728,14 +30821,14 @@
       </p:sp>
       <p:sp>
         <p:nvSpPr>
-          <p:cNvPr id="42" name="Text 40"/>
-          <p:cNvSpPr/>
-          <p:nvPr/>
-        </p:nvSpPr>
-        <p:spPr>
-          <a:xfrm>
-            <a:off x="2605209" y="4169664"/>
-            <a:ext cx="603504" cy="384048"/>
+          <p:cNvPr id="45" name="Text 43"/>
+          <p:cNvSpPr/>
+          <p:nvPr/>
+        </p:nvSpPr>
+        <p:spPr>
+          <a:xfrm>
+            <a:off x="2677363" y="4169664"/>
+            <a:ext cx="676656" cy="384048"/>
           </a:xfrm>
           <a:prstGeom prst="rect">
             <a:avLst/>
@@ -30767,14 +30860,14 @@
       </p:sp>
       <p:sp>
         <p:nvSpPr>
-          <p:cNvPr id="43" name="Shape 41"/>
-          <p:cNvSpPr/>
-          <p:nvPr/>
-        </p:nvSpPr>
-        <p:spPr>
-          <a:xfrm>
-            <a:off x="3258589" y="4169664"/>
-            <a:ext cx="603504" cy="384048"/>
+          <p:cNvPr id="46" name="Shape 44"/>
+          <p:cNvSpPr/>
+          <p:nvPr/>
+        </p:nvSpPr>
+        <p:spPr>
+          <a:xfrm>
+            <a:off x="3403397" y="4169664"/>
+            <a:ext cx="676656" cy="384048"/>
           </a:xfrm>
           <a:prstGeom prst="rect">
             <a:avLst>
@@ -30794,14 +30887,14 @@
       </p:sp>
       <p:sp>
         <p:nvSpPr>
-          <p:cNvPr id="44" name="Text 42"/>
-          <p:cNvSpPr/>
-          <p:nvPr/>
-        </p:nvSpPr>
-        <p:spPr>
-          <a:xfrm>
-            <a:off x="3258589" y="4169664"/>
-            <a:ext cx="603504" cy="384048"/>
+          <p:cNvPr id="47" name="Text 45"/>
+          <p:cNvSpPr/>
+          <p:nvPr/>
+        </p:nvSpPr>
+        <p:spPr>
+          <a:xfrm>
+            <a:off x="3403397" y="4169664"/>
+            <a:ext cx="676656" cy="384048"/>
           </a:xfrm>
           <a:prstGeom prst="rect">
             <a:avLst/>
@@ -30833,14 +30926,14 @@
       </p:sp>
       <p:sp>
         <p:nvSpPr>
-          <p:cNvPr id="45" name="Shape 43"/>
-          <p:cNvSpPr/>
-          <p:nvPr/>
-        </p:nvSpPr>
-        <p:spPr>
-          <a:xfrm>
-            <a:off x="3911969" y="4169664"/>
-            <a:ext cx="603504" cy="384048"/>
+          <p:cNvPr id="48" name="Shape 46"/>
+          <p:cNvSpPr/>
+          <p:nvPr/>
+        </p:nvSpPr>
+        <p:spPr>
+          <a:xfrm>
+            <a:off x="4129430" y="4169664"/>
+            <a:ext cx="676656" cy="384048"/>
           </a:xfrm>
           <a:prstGeom prst="rect">
             <a:avLst>
@@ -30860,14 +30953,14 @@
       </p:sp>
       <p:sp>
         <p:nvSpPr>
-          <p:cNvPr id="46" name="Text 44"/>
-          <p:cNvSpPr/>
-          <p:nvPr/>
-        </p:nvSpPr>
-        <p:spPr>
-          <a:xfrm>
-            <a:off x="3911969" y="4169664"/>
-            <a:ext cx="603504" cy="384048"/>
+          <p:cNvPr id="49" name="Text 47"/>
+          <p:cNvSpPr/>
+          <p:nvPr/>
+        </p:nvSpPr>
+        <p:spPr>
+          <a:xfrm>
+            <a:off x="4129430" y="4169664"/>
+            <a:ext cx="676656" cy="384048"/>
           </a:xfrm>
           <a:prstGeom prst="rect">
             <a:avLst/>
@@ -30899,14 +30992,14 @@
       </p:sp>
       <p:sp>
         <p:nvSpPr>
-          <p:cNvPr id="47" name="Shape 45"/>
-          <p:cNvSpPr/>
-          <p:nvPr/>
-        </p:nvSpPr>
-        <p:spPr>
-          <a:xfrm>
-            <a:off x="4565350" y="4169664"/>
-            <a:ext cx="603504" cy="384048"/>
+          <p:cNvPr id="50" name="Shape 48"/>
+          <p:cNvSpPr/>
+          <p:nvPr/>
+        </p:nvSpPr>
+        <p:spPr>
+          <a:xfrm>
+            <a:off x="4855464" y="4169664"/>
+            <a:ext cx="676656" cy="384048"/>
           </a:xfrm>
           <a:prstGeom prst="rect">
             <a:avLst>
@@ -30926,14 +31019,14 @@
       </p:sp>
       <p:sp>
         <p:nvSpPr>
-          <p:cNvPr id="48" name="Text 46"/>
-          <p:cNvSpPr/>
-          <p:nvPr/>
-        </p:nvSpPr>
-        <p:spPr>
-          <a:xfrm>
-            <a:off x="4565350" y="4169664"/>
-            <a:ext cx="603504" cy="384048"/>
+          <p:cNvPr id="51" name="Text 49"/>
+          <p:cNvSpPr/>
+          <p:nvPr/>
+        </p:nvSpPr>
+        <p:spPr>
+          <a:xfrm>
+            <a:off x="4855464" y="4169664"/>
+            <a:ext cx="676656" cy="384048"/>
           </a:xfrm>
           <a:prstGeom prst="rect">
             <a:avLst/>
@@ -30965,14 +31058,14 @@
       </p:sp>
       <p:sp>
         <p:nvSpPr>
-          <p:cNvPr id="49" name="Shape 47"/>
-          <p:cNvSpPr/>
-          <p:nvPr/>
-        </p:nvSpPr>
-        <p:spPr>
-          <a:xfrm>
-            <a:off x="5218730" y="4169664"/>
-            <a:ext cx="603504" cy="384048"/>
+          <p:cNvPr id="52" name="Shape 50"/>
+          <p:cNvSpPr/>
+          <p:nvPr/>
+        </p:nvSpPr>
+        <p:spPr>
+          <a:xfrm>
+            <a:off x="5581498" y="4169664"/>
+            <a:ext cx="676656" cy="384048"/>
           </a:xfrm>
           <a:prstGeom prst="rect">
             <a:avLst>
@@ -30992,14 +31085,14 @@
       </p:sp>
       <p:sp>
         <p:nvSpPr>
-          <p:cNvPr id="50" name="Text 48"/>
-          <p:cNvSpPr/>
-          <p:nvPr/>
-        </p:nvSpPr>
-        <p:spPr>
-          <a:xfrm>
-            <a:off x="5218730" y="4169664"/>
-            <a:ext cx="603504" cy="384048"/>
+          <p:cNvPr id="53" name="Text 51"/>
+          <p:cNvSpPr/>
+          <p:nvPr/>
+        </p:nvSpPr>
+        <p:spPr>
+          <a:xfrm>
+            <a:off x="5581498" y="4169664"/>
+            <a:ext cx="676656" cy="384048"/>
           </a:xfrm>
           <a:prstGeom prst="rect">
             <a:avLst/>
@@ -31031,14 +31124,14 @@
       </p:sp>
       <p:sp>
         <p:nvSpPr>
-          <p:cNvPr id="51" name="Text 49"/>
-          <p:cNvSpPr/>
-          <p:nvPr/>
-        </p:nvSpPr>
-        <p:spPr>
-          <a:xfrm>
-            <a:off x="5218730" y="4572000"/>
-            <a:ext cx="603504" cy="219456"/>
+          <p:cNvPr id="54" name="Text 52"/>
+          <p:cNvSpPr/>
+          <p:nvPr/>
+        </p:nvSpPr>
+        <p:spPr>
+          <a:xfrm>
+            <a:off x="5581498" y="4572000"/>
+            <a:ext cx="676656" cy="219456"/>
           </a:xfrm>
           <a:prstGeom prst="rect">
             <a:avLst/>
@@ -31070,14 +31163,14 @@
       </p:sp>
       <p:sp>
         <p:nvSpPr>
-          <p:cNvPr id="52" name="Shape 50"/>
-          <p:cNvSpPr/>
-          <p:nvPr/>
-        </p:nvSpPr>
-        <p:spPr>
-          <a:xfrm>
-            <a:off x="5872111" y="4169664"/>
-            <a:ext cx="603504" cy="384048"/>
+          <p:cNvPr id="55" name="Shape 53"/>
+          <p:cNvSpPr/>
+          <p:nvPr/>
+        </p:nvSpPr>
+        <p:spPr>
+          <a:xfrm>
+            <a:off x="6307531" y="4169664"/>
+            <a:ext cx="676656" cy="384048"/>
           </a:xfrm>
           <a:prstGeom prst="rect">
             <a:avLst>
@@ -31097,14 +31190,14 @@
       </p:sp>
       <p:sp>
         <p:nvSpPr>
-          <p:cNvPr id="53" name="Text 51"/>
-          <p:cNvSpPr/>
-          <p:nvPr/>
-        </p:nvSpPr>
-        <p:spPr>
-          <a:xfrm>
-            <a:off x="5872111" y="4169664"/>
-            <a:ext cx="603504" cy="384048"/>
+          <p:cNvPr id="56" name="Text 54"/>
+          <p:cNvSpPr/>
+          <p:nvPr/>
+        </p:nvSpPr>
+        <p:spPr>
+          <a:xfrm>
+            <a:off x="6307531" y="4169664"/>
+            <a:ext cx="676656" cy="384048"/>
           </a:xfrm>
           <a:prstGeom prst="rect">
             <a:avLst/>
@@ -31128,7 +31221,7 @@
                 <a:ea typeface="Trebuchet MS" pitchFamily="34" charset="-122"/>
                 <a:cs typeface="Trebuchet MS" pitchFamily="34" charset="-120"/>
               </a:rPr>
-              <a:t>m</a:t>
+              <a:t>a</a:t>
             </a:r>
             <a:endParaRPr lang="en-US" sz="900" dirty="0"/>
           </a:p>
@@ -31136,14 +31229,14 @@
       </p:sp>
       <p:sp>
         <p:nvSpPr>
-          <p:cNvPr id="54" name="Shape 52"/>
-          <p:cNvSpPr/>
-          <p:nvPr/>
-        </p:nvSpPr>
-        <p:spPr>
-          <a:xfrm>
-            <a:off x="6525491" y="4169664"/>
-            <a:ext cx="603504" cy="384048"/>
+          <p:cNvPr id="57" name="Shape 55"/>
+          <p:cNvSpPr/>
+          <p:nvPr/>
+        </p:nvSpPr>
+        <p:spPr>
+          <a:xfrm>
+            <a:off x="7033565" y="4169664"/>
+            <a:ext cx="676656" cy="384048"/>
           </a:xfrm>
           <a:prstGeom prst="rect">
             <a:avLst>
@@ -31163,14 +31256,14 @@
       </p:sp>
       <p:sp>
         <p:nvSpPr>
-          <p:cNvPr id="55" name="Text 53"/>
-          <p:cNvSpPr/>
-          <p:nvPr/>
-        </p:nvSpPr>
-        <p:spPr>
-          <a:xfrm>
-            <a:off x="6525491" y="4169664"/>
-            <a:ext cx="603504" cy="384048"/>
+          <p:cNvPr id="58" name="Text 56"/>
+          <p:cNvSpPr/>
+          <p:nvPr/>
+        </p:nvSpPr>
+        <p:spPr>
+          <a:xfrm>
+            <a:off x="7033565" y="4169664"/>
+            <a:ext cx="676656" cy="384048"/>
           </a:xfrm>
           <a:prstGeom prst="rect">
             <a:avLst/>
@@ -31194,7 +31287,7 @@
                 <a:ea typeface="Trebuchet MS" pitchFamily="34" charset="-122"/>
                 <a:cs typeface="Trebuchet MS" pitchFamily="34" charset="-120"/>
               </a:rPr>
-              <a:t>e</a:t>
+              <a:t>b</a:t>
             </a:r>
             <a:endParaRPr lang="en-US" sz="900" dirty="0"/>
           </a:p>
@@ -31202,14 +31295,14 @@
       </p:sp>
       <p:sp>
         <p:nvSpPr>
-          <p:cNvPr id="56" name="Shape 54"/>
-          <p:cNvSpPr/>
-          <p:nvPr/>
-        </p:nvSpPr>
-        <p:spPr>
-          <a:xfrm>
-            <a:off x="7178871" y="4169664"/>
-            <a:ext cx="603504" cy="384048"/>
+          <p:cNvPr id="59" name="Shape 57"/>
+          <p:cNvSpPr/>
+          <p:nvPr/>
+        </p:nvSpPr>
+        <p:spPr>
+          <a:xfrm>
+            <a:off x="7759598" y="4169664"/>
+            <a:ext cx="676656" cy="384048"/>
           </a:xfrm>
           <a:prstGeom prst="rect">
             <a:avLst>
@@ -31229,14 +31322,14 @@
       </p:sp>
       <p:sp>
         <p:nvSpPr>
-          <p:cNvPr id="57" name="Text 55"/>
-          <p:cNvSpPr/>
-          <p:nvPr/>
-        </p:nvSpPr>
-        <p:spPr>
-          <a:xfrm>
-            <a:off x="7178871" y="4169664"/>
-            <a:ext cx="603504" cy="384048"/>
+          <p:cNvPr id="60" name="Text 58"/>
+          <p:cNvSpPr/>
+          <p:nvPr/>
+        </p:nvSpPr>
+        <p:spPr>
+          <a:xfrm>
+            <a:off x="7759598" y="4169664"/>
+            <a:ext cx="676656" cy="384048"/>
           </a:xfrm>
           <a:prstGeom prst="rect">
             <a:avLst/>
@@ -31260,73 +31353,7 @@
                 <a:ea typeface="Trebuchet MS" pitchFamily="34" charset="-122"/>
                 <a:cs typeface="Trebuchet MS" pitchFamily="34" charset="-120"/>
               </a:rPr>
-              <a:t>n</a:t>
-            </a:r>
-            <a:endParaRPr lang="en-US" sz="900" dirty="0"/>
-          </a:p>
-        </p:txBody>
-      </p:sp>
-      <p:sp>
-        <p:nvSpPr>
-          <p:cNvPr id="58" name="Shape 56"/>
-          <p:cNvSpPr/>
-          <p:nvPr/>
-        </p:nvSpPr>
-        <p:spPr>
-          <a:xfrm>
-            <a:off x="7832252" y="4169664"/>
-            <a:ext cx="603504" cy="384048"/>
-          </a:xfrm>
-          <a:prstGeom prst="rect">
-            <a:avLst>
-              <a:gd name="adj" fmla="val 9524"/>
-            </a:avLst>
-          </a:prstGeom>
-          <a:solidFill>
-            <a:srgbClr val="FFFFFF"/>
-          </a:solidFill>
-          <a:ln w="12700">
-            <a:solidFill>
-              <a:srgbClr val="DB2777"/>
-            </a:solidFill>
-            <a:prstDash val="solid"/>
-          </a:ln>
-        </p:spPr>
-      </p:sp>
-      <p:sp>
-        <p:nvSpPr>
-          <p:cNvPr id="59" name="Text 57"/>
-          <p:cNvSpPr/>
-          <p:nvPr/>
-        </p:nvSpPr>
-        <p:spPr>
-          <a:xfrm>
-            <a:off x="7832252" y="4169664"/>
-            <a:ext cx="603504" cy="384048"/>
-          </a:xfrm>
-          <a:prstGeom prst="rect">
-            <a:avLst/>
-          </a:prstGeom>
-          <a:noFill/>
-          <a:ln/>
-        </p:spPr>
-        <p:txBody>
-          <a:bodyPr wrap="square" lIns="0" tIns="0" rIns="0" bIns="0" rtlCol="0" anchor="ctr"/>
-          <a:lstStyle/>
-          <a:p>
-            <a:pPr algn="ctr" indent="0" marL="0">
-              <a:buNone/>
-            </a:pPr>
-            <a:r>
-              <a:rPr lang="en-US" sz="900" b="1" dirty="0">
-                <a:solidFill>
-                  <a:srgbClr val="9D174D"/>
-                </a:solidFill>
-                <a:latin typeface="Trebuchet MS" pitchFamily="34" charset="0"/>
-                <a:ea typeface="Trebuchet MS" pitchFamily="34" charset="-122"/>
-                <a:cs typeface="Trebuchet MS" pitchFamily="34" charset="-120"/>
-              </a:rPr>
-              <a:t>t</a:t>
+              <a:t>le</a:t>
             </a:r>
             <a:endParaRPr lang="en-US" sz="900" dirty="0"/>
           </a:p>
@@ -31757,7 +31784,7 @@
                 <a:ea typeface="Trebuchet MS" pitchFamily="34" charset="-122"/>
                 <a:cs typeface="Trebuchet MS" pitchFamily="34" charset="-120"/>
               </a:rPr>
-              <a:t>replacing</a:t>
+              <a:t>replaced</a:t>
             </a:r>
             <a:endParaRPr lang="en-US" sz="2800" dirty="0"/>
           </a:p>
@@ -32584,7 +32611,7 @@
                 <a:ea typeface="Trebuchet MS" pitchFamily="34" charset="-122"/>
                 <a:cs typeface="Trebuchet MS" pitchFamily="34" charset="-120"/>
               </a:rPr>
-              <a:t>replacing</a:t>
+              <a:t>replaced</a:t>
             </a:r>
             <a:endParaRPr lang="en-US" sz="2800" dirty="0"/>
           </a:p>
@@ -32874,7 +32901,7 @@
                 <a:ea typeface="Calibri" pitchFamily="34" charset="-122"/>
                 <a:cs typeface="Calibri" pitchFamily="34" charset="-120"/>
               </a:rPr>
-              <a:t>put in position</a:t>
+              <a:t>a position or location</a:t>
             </a:r>
             <a:endParaRPr lang="en-US" sz="850" dirty="0"/>
           </a:p>
@@ -32882,7 +32909,46 @@
       </p:sp>
       <p:sp>
         <p:nvSpPr>
-          <p:cNvPr id="22" name="Shape 20"/>
+          <p:cNvPr id="22" name="Text 20"/>
+          <p:cNvSpPr/>
+          <p:nvPr/>
+        </p:nvSpPr>
+        <p:spPr>
+          <a:xfrm>
+            <a:off x="4370832" y="2752344"/>
+            <a:ext cx="1828800" cy="182880"/>
+          </a:xfrm>
+          <a:prstGeom prst="rect">
+            <a:avLst/>
+          </a:prstGeom>
+          <a:noFill/>
+          <a:ln/>
+        </p:spPr>
+        <p:txBody>
+          <a:bodyPr wrap="square" lIns="0" tIns="0" rIns="0" bIns="0" rtlCol="0" anchor="t"/>
+          <a:lstStyle/>
+          <a:p>
+            <a:pPr algn="ctr" indent="0" marL="0">
+              <a:buNone/>
+            </a:pPr>
+            <a:r>
+              <a:rPr lang="en-US" sz="700" i="1" dirty="0">
+                <a:solidFill>
+                  <a:srgbClr val="94A3B8"/>
+                </a:solidFill>
+                <a:latin typeface="Calibri" pitchFamily="34" charset="0"/>
+                <a:ea typeface="Calibri" pitchFamily="34" charset="-122"/>
+                <a:cs typeface="Calibri" pitchFamily="34" charset="-120"/>
+              </a:rPr>
+              <a:t>'e' dropped before vowel suffix</a:t>
+            </a:r>
+            <a:endParaRPr lang="en-US" sz="700" dirty="0"/>
+          </a:p>
+        </p:txBody>
+      </p:sp>
+      <p:sp>
+        <p:nvSpPr>
+          <p:cNvPr id="23" name="Shape 21"/>
           <p:cNvSpPr/>
           <p:nvPr/>
         </p:nvSpPr>
@@ -32916,7 +32982,7 @@
       </p:sp>
       <p:sp>
         <p:nvSpPr>
-          <p:cNvPr id="23" name="Text 21"/>
+          <p:cNvPr id="24" name="Text 22"/>
           <p:cNvSpPr/>
           <p:nvPr/>
         </p:nvSpPr>
@@ -32947,7 +33013,7 @@
                 <a:ea typeface="Trebuchet MS" pitchFamily="34" charset="-122"/>
                 <a:cs typeface="Trebuchet MS" pitchFamily="34" charset="-120"/>
               </a:rPr>
-              <a:t>ing</a:t>
+              <a:t>ed</a:t>
             </a:r>
             <a:endParaRPr lang="en-US" sz="1300" dirty="0"/>
           </a:p>
@@ -32955,7 +33021,7 @@
       </p:sp>
       <p:sp>
         <p:nvSpPr>
-          <p:cNvPr id="24" name="Text 22"/>
+          <p:cNvPr id="25" name="Text 23"/>
           <p:cNvSpPr/>
           <p:nvPr/>
         </p:nvSpPr>
@@ -32986,48 +33052,9 @@
                 <a:ea typeface="Calibri" pitchFamily="34" charset="-122"/>
                 <a:cs typeface="Calibri" pitchFamily="34" charset="-120"/>
               </a:rPr>
-              <a:t>ongoing action</a:t>
+              <a:t>past tense (verb)</a:t>
             </a:r>
             <a:endParaRPr lang="en-US" sz="850" dirty="0"/>
-          </a:p>
-        </p:txBody>
-      </p:sp>
-      <p:sp>
-        <p:nvSpPr>
-          <p:cNvPr id="25" name="Text 23"/>
-          <p:cNvSpPr/>
-          <p:nvPr/>
-        </p:nvSpPr>
-        <p:spPr>
-          <a:xfrm>
-            <a:off x="6519672" y="2752344"/>
-            <a:ext cx="1828800" cy="182880"/>
-          </a:xfrm>
-          <a:prstGeom prst="rect">
-            <a:avLst/>
-          </a:prstGeom>
-          <a:noFill/>
-          <a:ln/>
-        </p:spPr>
-        <p:txBody>
-          <a:bodyPr wrap="square" lIns="0" tIns="0" rIns="0" bIns="0" rtlCol="0" anchor="t"/>
-          <a:lstStyle/>
-          <a:p>
-            <a:pPr algn="ctr" indent="0" marL="0">
-              <a:buNone/>
-            </a:pPr>
-            <a:r>
-              <a:rPr lang="en-US" sz="700" i="1" dirty="0">
-                <a:solidFill>
-                  <a:srgbClr val="94A3B8"/>
-                </a:solidFill>
-                <a:latin typeface="Calibri" pitchFamily="34" charset="0"/>
-                <a:ea typeface="Calibri" pitchFamily="34" charset="-122"/>
-                <a:cs typeface="Calibri" pitchFamily="34" charset="-120"/>
-              </a:rPr>
-              <a:t>'e' dropped before vowel suffix</a:t>
-            </a:r>
-            <a:endParaRPr lang="en-US" sz="700" dirty="0"/>
           </a:p>
         </p:txBody>
       </p:sp>
@@ -33720,7 +33747,7 @@
                 <a:ea typeface="Trebuchet MS" pitchFamily="34" charset="-122"/>
                 <a:cs typeface="Trebuchet MS" pitchFamily="34" charset="-120"/>
               </a:rPr>
-              <a:t>replacing</a:t>
+              <a:t>replaced</a:t>
             </a:r>
             <a:endParaRPr lang="en-US" sz="2800" dirty="0"/>
           </a:p>
@@ -34010,7 +34037,7 @@
                 <a:ea typeface="Calibri" pitchFamily="34" charset="-122"/>
                 <a:cs typeface="Calibri" pitchFamily="34" charset="-120"/>
               </a:rPr>
-              <a:t>put in position</a:t>
+              <a:t>a position or location</a:t>
             </a:r>
             <a:endParaRPr lang="en-US" sz="850" dirty="0"/>
           </a:p>
@@ -34018,7 +34045,46 @@
       </p:sp>
       <p:sp>
         <p:nvSpPr>
-          <p:cNvPr id="22" name="Shape 20"/>
+          <p:cNvPr id="22" name="Text 20"/>
+          <p:cNvSpPr/>
+          <p:nvPr/>
+        </p:nvSpPr>
+        <p:spPr>
+          <a:xfrm>
+            <a:off x="4370832" y="2752344"/>
+            <a:ext cx="1828800" cy="182880"/>
+          </a:xfrm>
+          <a:prstGeom prst="rect">
+            <a:avLst/>
+          </a:prstGeom>
+          <a:noFill/>
+          <a:ln/>
+        </p:spPr>
+        <p:txBody>
+          <a:bodyPr wrap="square" lIns="0" tIns="0" rIns="0" bIns="0" rtlCol="0" anchor="t"/>
+          <a:lstStyle/>
+          <a:p>
+            <a:pPr algn="ctr" indent="0" marL="0">
+              <a:buNone/>
+            </a:pPr>
+            <a:r>
+              <a:rPr lang="en-US" sz="700" i="1" dirty="0">
+                <a:solidFill>
+                  <a:srgbClr val="94A3B8"/>
+                </a:solidFill>
+                <a:latin typeface="Calibri" pitchFamily="34" charset="0"/>
+                <a:ea typeface="Calibri" pitchFamily="34" charset="-122"/>
+                <a:cs typeface="Calibri" pitchFamily="34" charset="-120"/>
+              </a:rPr>
+              <a:t>'e' dropped before vowel suffix</a:t>
+            </a:r>
+            <a:endParaRPr lang="en-US" sz="700" dirty="0"/>
+          </a:p>
+        </p:txBody>
+      </p:sp>
+      <p:sp>
+        <p:nvSpPr>
+          <p:cNvPr id="23" name="Shape 21"/>
           <p:cNvSpPr/>
           <p:nvPr/>
         </p:nvSpPr>
@@ -34052,7 +34118,7 @@
       </p:sp>
       <p:sp>
         <p:nvSpPr>
-          <p:cNvPr id="23" name="Text 21"/>
+          <p:cNvPr id="24" name="Text 22"/>
           <p:cNvSpPr/>
           <p:nvPr/>
         </p:nvSpPr>
@@ -34083,7 +34149,7 @@
                 <a:ea typeface="Trebuchet MS" pitchFamily="34" charset="-122"/>
                 <a:cs typeface="Trebuchet MS" pitchFamily="34" charset="-120"/>
               </a:rPr>
-              <a:t>ing</a:t>
+              <a:t>ed</a:t>
             </a:r>
             <a:endParaRPr lang="en-US" sz="1300" dirty="0"/>
           </a:p>
@@ -34091,7 +34157,7 @@
       </p:sp>
       <p:sp>
         <p:nvSpPr>
-          <p:cNvPr id="24" name="Text 22"/>
+          <p:cNvPr id="25" name="Text 23"/>
           <p:cNvSpPr/>
           <p:nvPr/>
         </p:nvSpPr>
@@ -34122,48 +34188,9 @@
                 <a:ea typeface="Calibri" pitchFamily="34" charset="-122"/>
                 <a:cs typeface="Calibri" pitchFamily="34" charset="-120"/>
               </a:rPr>
-              <a:t>ongoing action</a:t>
+              <a:t>past tense (verb)</a:t>
             </a:r>
             <a:endParaRPr lang="en-US" sz="850" dirty="0"/>
-          </a:p>
-        </p:txBody>
-      </p:sp>
-      <p:sp>
-        <p:nvSpPr>
-          <p:cNvPr id="25" name="Text 23"/>
-          <p:cNvSpPr/>
-          <p:nvPr/>
-        </p:nvSpPr>
-        <p:spPr>
-          <a:xfrm>
-            <a:off x="6519672" y="2752344"/>
-            <a:ext cx="1828800" cy="182880"/>
-          </a:xfrm>
-          <a:prstGeom prst="rect">
-            <a:avLst/>
-          </a:prstGeom>
-          <a:noFill/>
-          <a:ln/>
-        </p:spPr>
-        <p:txBody>
-          <a:bodyPr wrap="square" lIns="0" tIns="0" rIns="0" bIns="0" rtlCol="0" anchor="t"/>
-          <a:lstStyle/>
-          <a:p>
-            <a:pPr algn="ctr" indent="0" marL="0">
-              <a:buNone/>
-            </a:pPr>
-            <a:r>
-              <a:rPr lang="en-US" sz="700" i="1" dirty="0">
-                <a:solidFill>
-                  <a:srgbClr val="94A3B8"/>
-                </a:solidFill>
-                <a:latin typeface="Calibri" pitchFamily="34" charset="0"/>
-                <a:ea typeface="Calibri" pitchFamily="34" charset="-122"/>
-                <a:cs typeface="Calibri" pitchFamily="34" charset="-120"/>
-              </a:rPr>
-              <a:t>'e' dropped before vowel suffix</a:t>
-            </a:r>
-            <a:endParaRPr lang="en-US" sz="700" dirty="0"/>
           </a:p>
         </p:txBody>
       </p:sp>
@@ -34268,7 +34295,7 @@
         </p:nvSpPr>
         <p:spPr>
           <a:xfrm>
-            <a:off x="2313432" y="3364992"/>
+            <a:off x="2999232" y="3364992"/>
             <a:ext cx="1645920" cy="475488"/>
           </a:xfrm>
           <a:prstGeom prst="rect">
@@ -34295,7 +34322,7 @@
         </p:nvSpPr>
         <p:spPr>
           <a:xfrm>
-            <a:off x="2313432" y="3364992"/>
+            <a:off x="2999232" y="3364992"/>
             <a:ext cx="1645920" cy="475488"/>
           </a:xfrm>
           <a:prstGeom prst="rect">
@@ -34334,8 +34361,8 @@
         </p:nvSpPr>
         <p:spPr>
           <a:xfrm>
-            <a:off x="3959352" y="3364992"/>
-            <a:ext cx="411480" cy="475488"/>
+            <a:off x="4645152" y="3364992"/>
+            <a:ext cx="1097280" cy="475488"/>
           </a:xfrm>
           <a:prstGeom prst="rect">
             <a:avLst/>
@@ -34373,7 +34400,7 @@
         </p:nvSpPr>
         <p:spPr>
           <a:xfrm>
-            <a:off x="4370832" y="3364992"/>
+            <a:off x="5742432" y="3364992"/>
             <a:ext cx="1645920" cy="475488"/>
           </a:xfrm>
           <a:prstGeom prst="rect">
@@ -34400,7 +34427,7 @@
         </p:nvSpPr>
         <p:spPr>
           <a:xfrm>
-            <a:off x="4370832" y="3364992"/>
+            <a:off x="5742432" y="3364992"/>
             <a:ext cx="1645920" cy="475488"/>
           </a:xfrm>
           <a:prstGeom prst="rect">
@@ -34425,7 +34452,7 @@
                 <a:ea typeface="Trebuchet MS" pitchFamily="34" charset="-122"/>
                 <a:cs typeface="Trebuchet MS" pitchFamily="34" charset="-120"/>
               </a:rPr>
-              <a:t>pla</a:t>
+              <a:t>placed</a:t>
             </a:r>
             <a:endParaRPr lang="en-US" sz="1400" dirty="0"/>
           </a:p>
@@ -34433,119 +34460,80 @@
       </p:sp>
       <p:sp>
         <p:nvSpPr>
-          <p:cNvPr id="34" name="Text 32"/>
-          <p:cNvSpPr/>
-          <p:nvPr/>
-        </p:nvSpPr>
-        <p:spPr>
-          <a:xfrm>
-            <a:off x="6016752" y="3364992"/>
-            <a:ext cx="411480" cy="475488"/>
-          </a:xfrm>
-          <a:prstGeom prst="rect">
-            <a:avLst/>
-          </a:prstGeom>
-          <a:noFill/>
-          <a:ln/>
-        </p:spPr>
-        <p:txBody>
-          <a:bodyPr wrap="square" lIns="0" tIns="0" rIns="0" bIns="0" rtlCol="0" anchor="ctr"/>
-          <a:lstStyle/>
-          <a:p>
-            <a:pPr algn="ctr" indent="0" marL="0">
-              <a:buNone/>
-            </a:pPr>
-            <a:r>
-              <a:rPr lang="en-US" sz="1600" b="1" dirty="0">
-                <a:solidFill>
-                  <a:srgbClr val="0D9488"/>
+          <p:cNvPr id="34" name="Shape 32"/>
+          <p:cNvSpPr/>
+          <p:nvPr/>
+        </p:nvSpPr>
+        <p:spPr>
+          <a:xfrm>
+            <a:off x="365760" y="4096512"/>
+            <a:ext cx="1371600" cy="804672"/>
+          </a:xfrm>
+          <a:prstGeom prst="rect">
+            <a:avLst>
+              <a:gd name="adj" fmla="val 6818"/>
+            </a:avLst>
+          </a:prstGeom>
+          <a:solidFill>
+            <a:srgbClr val="E2E8F0"/>
+          </a:solidFill>
+          <a:ln w="12700">
+            <a:solidFill>
+              <a:srgbClr val="E2E8F0"/>
+            </a:solidFill>
+            <a:prstDash val="solid"/>
+          </a:ln>
+        </p:spPr>
+      </p:sp>
+      <p:sp>
+        <p:nvSpPr>
+          <p:cNvPr id="35" name="Text 33"/>
+          <p:cNvSpPr/>
+          <p:nvPr/>
+        </p:nvSpPr>
+        <p:spPr>
+          <a:xfrm>
+            <a:off x="365760" y="4096512"/>
+            <a:ext cx="1371600" cy="804672"/>
+          </a:xfrm>
+          <a:prstGeom prst="rect">
+            <a:avLst/>
+          </a:prstGeom>
+          <a:noFill/>
+          <a:ln/>
+        </p:spPr>
+        <p:txBody>
+          <a:bodyPr wrap="square" lIns="0" tIns="0" rIns="0" bIns="0" rtlCol="0" anchor="ctr"/>
+          <a:lstStyle/>
+          <a:p>
+            <a:pPr algn="ctr" indent="0" marL="0">
+              <a:buNone/>
+            </a:pPr>
+            <a:r>
+              <a:rPr lang="en-US" sz="1100" b="1" dirty="0">
+                <a:solidFill>
+                  <a:srgbClr val="475569"/>
                 </a:solidFill>
                 <a:latin typeface="Trebuchet MS" pitchFamily="34" charset="0"/>
                 <a:ea typeface="Trebuchet MS" pitchFamily="34" charset="-122"/>
                 <a:cs typeface="Trebuchet MS" pitchFamily="34" charset="-120"/>
               </a:rPr>
-              <a:t>·</a:t>
-            </a:r>
-            <a:endParaRPr lang="en-US" sz="1600" dirty="0"/>
-          </a:p>
-        </p:txBody>
-      </p:sp>
-      <p:sp>
-        <p:nvSpPr>
-          <p:cNvPr id="35" name="Shape 33"/>
-          <p:cNvSpPr/>
-          <p:nvPr/>
-        </p:nvSpPr>
-        <p:spPr>
-          <a:xfrm>
-            <a:off x="6428232" y="3364992"/>
-            <a:ext cx="1645920" cy="475488"/>
-          </a:xfrm>
-          <a:prstGeom prst="rect">
-            <a:avLst>
-              <a:gd name="adj" fmla="val 9615"/>
-            </a:avLst>
-          </a:prstGeom>
-          <a:solidFill>
-            <a:srgbClr val="FFFFFF"/>
-          </a:solidFill>
-          <a:ln w="12700">
-            <a:solidFill>
-              <a:srgbClr val="0D9488"/>
-            </a:solidFill>
-            <a:prstDash val="solid"/>
-          </a:ln>
-        </p:spPr>
-      </p:sp>
-      <p:sp>
-        <p:nvSpPr>
-          <p:cNvPr id="36" name="Text 34"/>
-          <p:cNvSpPr/>
-          <p:nvPr/>
-        </p:nvSpPr>
-        <p:spPr>
-          <a:xfrm>
-            <a:off x="6428232" y="3364992"/>
-            <a:ext cx="1645920" cy="475488"/>
-          </a:xfrm>
-          <a:prstGeom prst="rect">
-            <a:avLst/>
-          </a:prstGeom>
-          <a:noFill/>
-          <a:ln/>
-        </p:spPr>
-        <p:txBody>
-          <a:bodyPr wrap="square" lIns="0" tIns="0" rIns="0" bIns="0" rtlCol="0" anchor="ctr"/>
-          <a:lstStyle/>
-          <a:p>
-            <a:pPr algn="ctr" indent="0" marL="0">
-              <a:buNone/>
-            </a:pPr>
-            <a:r>
-              <a:rPr lang="en-US" sz="1400" b="1" dirty="0">
-                <a:solidFill>
-                  <a:srgbClr val="0D9488"/>
-                </a:solidFill>
-                <a:latin typeface="Trebuchet MS" pitchFamily="34" charset="0"/>
-                <a:ea typeface="Trebuchet MS" pitchFamily="34" charset="-122"/>
-                <a:cs typeface="Trebuchet MS" pitchFamily="34" charset="-120"/>
-              </a:rPr>
-              <a:t>cing</a:t>
-            </a:r>
-            <a:endParaRPr lang="en-US" sz="1400" dirty="0"/>
-          </a:p>
-        </p:txBody>
-      </p:sp>
-      <p:sp>
-        <p:nvSpPr>
-          <p:cNvPr id="37" name="Shape 35"/>
-          <p:cNvSpPr/>
-          <p:nvPr/>
-        </p:nvSpPr>
-        <p:spPr>
-          <a:xfrm>
-            <a:off x="365760" y="4096512"/>
-            <a:ext cx="1371600" cy="804672"/>
+              <a:t>Phonemes</a:t>
+            </a:r>
+            <a:endParaRPr lang="en-US" sz="1100" dirty="0"/>
+          </a:p>
+        </p:txBody>
+      </p:sp>
+      <p:sp>
+        <p:nvSpPr>
+          <p:cNvPr id="36" name="Shape 34"/>
+          <p:cNvSpPr/>
+          <p:nvPr/>
+        </p:nvSpPr>
+        <p:spPr>
+          <a:xfrm>
+            <a:off x="1874520" y="4096512"/>
+            <a:ext cx="6903720" cy="804672"/>
           </a:xfrm>
           <a:prstGeom prst="rect">
             <a:avLst>
@@ -34553,85 +34541,19 @@
             </a:avLst>
           </a:prstGeom>
           <a:solidFill>
-            <a:srgbClr val="E2E8F0"/>
+            <a:srgbClr val="F8FAFC"/>
           </a:solidFill>
           <a:ln w="12700">
             <a:solidFill>
               <a:srgbClr val="E2E8F0"/>
             </a:solidFill>
-            <a:prstDash val="solid"/>
-          </a:ln>
-        </p:spPr>
-      </p:sp>
-      <p:sp>
-        <p:nvSpPr>
-          <p:cNvPr id="38" name="Text 36"/>
-          <p:cNvSpPr/>
-          <p:nvPr/>
-        </p:nvSpPr>
-        <p:spPr>
-          <a:xfrm>
-            <a:off x="365760" y="4096512"/>
-            <a:ext cx="1371600" cy="804672"/>
-          </a:xfrm>
-          <a:prstGeom prst="rect">
-            <a:avLst/>
-          </a:prstGeom>
-          <a:noFill/>
-          <a:ln/>
-        </p:spPr>
-        <p:txBody>
-          <a:bodyPr wrap="square" lIns="0" tIns="0" rIns="0" bIns="0" rtlCol="0" anchor="ctr"/>
-          <a:lstStyle/>
-          <a:p>
-            <a:pPr algn="ctr" indent="0" marL="0">
-              <a:buNone/>
-            </a:pPr>
-            <a:r>
-              <a:rPr lang="en-US" sz="1100" b="1" dirty="0">
-                <a:solidFill>
-                  <a:srgbClr val="475569"/>
-                </a:solidFill>
-                <a:latin typeface="Trebuchet MS" pitchFamily="34" charset="0"/>
-                <a:ea typeface="Trebuchet MS" pitchFamily="34" charset="-122"/>
-                <a:cs typeface="Trebuchet MS" pitchFamily="34" charset="-120"/>
-              </a:rPr>
-              <a:t>Phonemes</a:t>
-            </a:r>
-            <a:endParaRPr lang="en-US" sz="1100" dirty="0"/>
-          </a:p>
-        </p:txBody>
-      </p:sp>
-      <p:sp>
-        <p:nvSpPr>
-          <p:cNvPr id="39" name="Shape 37"/>
-          <p:cNvSpPr/>
-          <p:nvPr/>
-        </p:nvSpPr>
-        <p:spPr>
-          <a:xfrm>
-            <a:off x="1874520" y="4096512"/>
-            <a:ext cx="6903720" cy="804672"/>
-          </a:xfrm>
-          <a:prstGeom prst="rect">
-            <a:avLst>
-              <a:gd name="adj" fmla="val 6818"/>
-            </a:avLst>
-          </a:prstGeom>
-          <a:solidFill>
-            <a:srgbClr val="F8FAFC"/>
-          </a:solidFill>
-          <a:ln w="12700">
-            <a:solidFill>
-              <a:srgbClr val="E2E8F0"/>
-            </a:solidFill>
             <a:prstDash val="dash"/>
           </a:ln>
         </p:spPr>
       </p:sp>
       <p:sp>
         <p:nvSpPr>
-          <p:cNvPr id="40" name="Text 38"/>
+          <p:cNvPr id="37" name="Text 35"/>
           <p:cNvSpPr/>
           <p:nvPr/>
         </p:nvSpPr>
@@ -35093,7 +35015,7 @@
                 <a:ea typeface="Trebuchet MS" pitchFamily="34" charset="-122"/>
                 <a:cs typeface="Trebuchet MS" pitchFamily="34" charset="-120"/>
               </a:rPr>
-              <a:t>replacing</a:t>
+              <a:t>replaced</a:t>
             </a:r>
             <a:endParaRPr lang="en-US" sz="2800" dirty="0"/>
           </a:p>
@@ -35383,7 +35305,7 @@
                 <a:ea typeface="Calibri" pitchFamily="34" charset="-122"/>
                 <a:cs typeface="Calibri" pitchFamily="34" charset="-120"/>
               </a:rPr>
-              <a:t>put in position</a:t>
+              <a:t>a position or location</a:t>
             </a:r>
             <a:endParaRPr lang="en-US" sz="850" dirty="0"/>
           </a:p>
@@ -35391,7 +35313,46 @@
       </p:sp>
       <p:sp>
         <p:nvSpPr>
-          <p:cNvPr id="22" name="Shape 20"/>
+          <p:cNvPr id="22" name="Text 20"/>
+          <p:cNvSpPr/>
+          <p:nvPr/>
+        </p:nvSpPr>
+        <p:spPr>
+          <a:xfrm>
+            <a:off x="4370832" y="2752344"/>
+            <a:ext cx="1828800" cy="182880"/>
+          </a:xfrm>
+          <a:prstGeom prst="rect">
+            <a:avLst/>
+          </a:prstGeom>
+          <a:noFill/>
+          <a:ln/>
+        </p:spPr>
+        <p:txBody>
+          <a:bodyPr wrap="square" lIns="0" tIns="0" rIns="0" bIns="0" rtlCol="0" anchor="t"/>
+          <a:lstStyle/>
+          <a:p>
+            <a:pPr algn="ctr" indent="0" marL="0">
+              <a:buNone/>
+            </a:pPr>
+            <a:r>
+              <a:rPr lang="en-US" sz="700" i="1" dirty="0">
+                <a:solidFill>
+                  <a:srgbClr val="94A3B8"/>
+                </a:solidFill>
+                <a:latin typeface="Calibri" pitchFamily="34" charset="0"/>
+                <a:ea typeface="Calibri" pitchFamily="34" charset="-122"/>
+                <a:cs typeface="Calibri" pitchFamily="34" charset="-120"/>
+              </a:rPr>
+              <a:t>'e' dropped before vowel suffix</a:t>
+            </a:r>
+            <a:endParaRPr lang="en-US" sz="700" dirty="0"/>
+          </a:p>
+        </p:txBody>
+      </p:sp>
+      <p:sp>
+        <p:nvSpPr>
+          <p:cNvPr id="23" name="Shape 21"/>
           <p:cNvSpPr/>
           <p:nvPr/>
         </p:nvSpPr>
@@ -35425,7 +35386,7 @@
       </p:sp>
       <p:sp>
         <p:nvSpPr>
-          <p:cNvPr id="23" name="Text 21"/>
+          <p:cNvPr id="24" name="Text 22"/>
           <p:cNvSpPr/>
           <p:nvPr/>
         </p:nvSpPr>
@@ -35456,7 +35417,7 @@
                 <a:ea typeface="Trebuchet MS" pitchFamily="34" charset="-122"/>
                 <a:cs typeface="Trebuchet MS" pitchFamily="34" charset="-120"/>
               </a:rPr>
-              <a:t>ing</a:t>
+              <a:t>ed</a:t>
             </a:r>
             <a:endParaRPr lang="en-US" sz="1300" dirty="0"/>
           </a:p>
@@ -35464,7 +35425,7 @@
       </p:sp>
       <p:sp>
         <p:nvSpPr>
-          <p:cNvPr id="24" name="Text 22"/>
+          <p:cNvPr id="25" name="Text 23"/>
           <p:cNvSpPr/>
           <p:nvPr/>
         </p:nvSpPr>
@@ -35495,7 +35456,7 @@
                 <a:ea typeface="Calibri" pitchFamily="34" charset="-122"/>
                 <a:cs typeface="Calibri" pitchFamily="34" charset="-120"/>
               </a:rPr>
-              <a:t>ongoing action</a:t>
+              <a:t>past tense (verb)</a:t>
             </a:r>
             <a:endParaRPr lang="en-US" sz="850" dirty="0"/>
           </a:p>
@@ -35503,14 +35464,767 @@
       </p:sp>
       <p:sp>
         <p:nvSpPr>
-          <p:cNvPr id="25" name="Text 23"/>
-          <p:cNvSpPr/>
-          <p:nvPr/>
-        </p:nvSpPr>
-        <p:spPr>
-          <a:xfrm>
-            <a:off x="6519672" y="2752344"/>
-            <a:ext cx="1828800" cy="182880"/>
+          <p:cNvPr id="26" name="Shape 24"/>
+          <p:cNvSpPr/>
+          <p:nvPr/>
+        </p:nvSpPr>
+        <p:spPr>
+          <a:xfrm>
+            <a:off x="365760" y="3273552"/>
+            <a:ext cx="1371600" cy="658368"/>
+          </a:xfrm>
+          <a:prstGeom prst="rect">
+            <a:avLst>
+              <a:gd name="adj" fmla="val 8333"/>
+            </a:avLst>
+          </a:prstGeom>
+          <a:solidFill>
+            <a:srgbClr val="E2E8F0"/>
+          </a:solidFill>
+          <a:ln w="12700">
+            <a:solidFill>
+              <a:srgbClr val="E2E8F0"/>
+            </a:solidFill>
+            <a:prstDash val="solid"/>
+          </a:ln>
+        </p:spPr>
+      </p:sp>
+      <p:sp>
+        <p:nvSpPr>
+          <p:cNvPr id="27" name="Text 25"/>
+          <p:cNvSpPr/>
+          <p:nvPr/>
+        </p:nvSpPr>
+        <p:spPr>
+          <a:xfrm>
+            <a:off x="365760" y="3273552"/>
+            <a:ext cx="1371600" cy="658368"/>
+          </a:xfrm>
+          <a:prstGeom prst="rect">
+            <a:avLst/>
+          </a:prstGeom>
+          <a:noFill/>
+          <a:ln/>
+        </p:spPr>
+        <p:txBody>
+          <a:bodyPr wrap="square" lIns="0" tIns="0" rIns="0" bIns="0" rtlCol="0" anchor="ctr"/>
+          <a:lstStyle/>
+          <a:p>
+            <a:pPr algn="ctr" indent="0" marL="0">
+              <a:buNone/>
+            </a:pPr>
+            <a:r>
+              <a:rPr lang="en-US" sz="1100" b="1" dirty="0">
+                <a:solidFill>
+                  <a:srgbClr val="475569"/>
+                </a:solidFill>
+                <a:latin typeface="Trebuchet MS" pitchFamily="34" charset="0"/>
+                <a:ea typeface="Trebuchet MS" pitchFamily="34" charset="-122"/>
+                <a:cs typeface="Trebuchet MS" pitchFamily="34" charset="-120"/>
+              </a:rPr>
+              <a:t>Syllables</a:t>
+            </a:r>
+            <a:endParaRPr lang="en-US" sz="1100" dirty="0"/>
+          </a:p>
+        </p:txBody>
+      </p:sp>
+      <p:sp>
+        <p:nvSpPr>
+          <p:cNvPr id="28" name="Shape 26"/>
+          <p:cNvSpPr/>
+          <p:nvPr/>
+        </p:nvSpPr>
+        <p:spPr>
+          <a:xfrm>
+            <a:off x="1874520" y="3273552"/>
+            <a:ext cx="6903720" cy="658368"/>
+          </a:xfrm>
+          <a:prstGeom prst="rect">
+            <a:avLst>
+              <a:gd name="adj" fmla="val 8333"/>
+            </a:avLst>
+          </a:prstGeom>
+          <a:solidFill>
+            <a:srgbClr val="CCFBF1"/>
+          </a:solidFill>
+          <a:ln w="12700">
+            <a:solidFill>
+              <a:srgbClr val="0D9488"/>
+            </a:solidFill>
+            <a:prstDash val="solid"/>
+          </a:ln>
+        </p:spPr>
+      </p:sp>
+      <p:sp>
+        <p:nvSpPr>
+          <p:cNvPr id="29" name="Shape 27"/>
+          <p:cNvSpPr/>
+          <p:nvPr/>
+        </p:nvSpPr>
+        <p:spPr>
+          <a:xfrm>
+            <a:off x="2999232" y="3364992"/>
+            <a:ext cx="1645920" cy="475488"/>
+          </a:xfrm>
+          <a:prstGeom prst="rect">
+            <a:avLst>
+              <a:gd name="adj" fmla="val 9615"/>
+            </a:avLst>
+          </a:prstGeom>
+          <a:solidFill>
+            <a:srgbClr val="FFFFFF"/>
+          </a:solidFill>
+          <a:ln w="12700">
+            <a:solidFill>
+              <a:srgbClr val="0D9488"/>
+            </a:solidFill>
+            <a:prstDash val="solid"/>
+          </a:ln>
+        </p:spPr>
+      </p:sp>
+      <p:sp>
+        <p:nvSpPr>
+          <p:cNvPr id="30" name="Text 28"/>
+          <p:cNvSpPr/>
+          <p:nvPr/>
+        </p:nvSpPr>
+        <p:spPr>
+          <a:xfrm>
+            <a:off x="2999232" y="3364992"/>
+            <a:ext cx="1645920" cy="475488"/>
+          </a:xfrm>
+          <a:prstGeom prst="rect">
+            <a:avLst/>
+          </a:prstGeom>
+          <a:noFill/>
+          <a:ln/>
+        </p:spPr>
+        <p:txBody>
+          <a:bodyPr wrap="square" lIns="0" tIns="0" rIns="0" bIns="0" rtlCol="0" anchor="ctr"/>
+          <a:lstStyle/>
+          <a:p>
+            <a:pPr algn="ctr" indent="0" marL="0">
+              <a:buNone/>
+            </a:pPr>
+            <a:r>
+              <a:rPr lang="en-US" sz="1400" b="1" dirty="0">
+                <a:solidFill>
+                  <a:srgbClr val="0D9488"/>
+                </a:solidFill>
+                <a:latin typeface="Trebuchet MS" pitchFamily="34" charset="0"/>
+                <a:ea typeface="Trebuchet MS" pitchFamily="34" charset="-122"/>
+                <a:cs typeface="Trebuchet MS" pitchFamily="34" charset="-120"/>
+              </a:rPr>
+              <a:t>re</a:t>
+            </a:r>
+            <a:endParaRPr lang="en-US" sz="1400" dirty="0"/>
+          </a:p>
+        </p:txBody>
+      </p:sp>
+      <p:sp>
+        <p:nvSpPr>
+          <p:cNvPr id="31" name="Text 29"/>
+          <p:cNvSpPr/>
+          <p:nvPr/>
+        </p:nvSpPr>
+        <p:spPr>
+          <a:xfrm>
+            <a:off x="4645152" y="3364992"/>
+            <a:ext cx="1097280" cy="475488"/>
+          </a:xfrm>
+          <a:prstGeom prst="rect">
+            <a:avLst/>
+          </a:prstGeom>
+          <a:noFill/>
+          <a:ln/>
+        </p:spPr>
+        <p:txBody>
+          <a:bodyPr wrap="square" lIns="0" tIns="0" rIns="0" bIns="0" rtlCol="0" anchor="ctr"/>
+          <a:lstStyle/>
+          <a:p>
+            <a:pPr algn="ctr" indent="0" marL="0">
+              <a:buNone/>
+            </a:pPr>
+            <a:r>
+              <a:rPr lang="en-US" sz="1600" b="1" dirty="0">
+                <a:solidFill>
+                  <a:srgbClr val="0D9488"/>
+                </a:solidFill>
+                <a:latin typeface="Trebuchet MS" pitchFamily="34" charset="0"/>
+                <a:ea typeface="Trebuchet MS" pitchFamily="34" charset="-122"/>
+                <a:cs typeface="Trebuchet MS" pitchFamily="34" charset="-120"/>
+              </a:rPr>
+              <a:t>·</a:t>
+            </a:r>
+            <a:endParaRPr lang="en-US" sz="1600" dirty="0"/>
+          </a:p>
+        </p:txBody>
+      </p:sp>
+      <p:sp>
+        <p:nvSpPr>
+          <p:cNvPr id="32" name="Shape 30"/>
+          <p:cNvSpPr/>
+          <p:nvPr/>
+        </p:nvSpPr>
+        <p:spPr>
+          <a:xfrm>
+            <a:off x="5742432" y="3364992"/>
+            <a:ext cx="1645920" cy="475488"/>
+          </a:xfrm>
+          <a:prstGeom prst="rect">
+            <a:avLst>
+              <a:gd name="adj" fmla="val 9615"/>
+            </a:avLst>
+          </a:prstGeom>
+          <a:solidFill>
+            <a:srgbClr val="FFFFFF"/>
+          </a:solidFill>
+          <a:ln w="12700">
+            <a:solidFill>
+              <a:srgbClr val="0D9488"/>
+            </a:solidFill>
+            <a:prstDash val="solid"/>
+          </a:ln>
+        </p:spPr>
+      </p:sp>
+      <p:sp>
+        <p:nvSpPr>
+          <p:cNvPr id="33" name="Text 31"/>
+          <p:cNvSpPr/>
+          <p:nvPr/>
+        </p:nvSpPr>
+        <p:spPr>
+          <a:xfrm>
+            <a:off x="5742432" y="3364992"/>
+            <a:ext cx="1645920" cy="475488"/>
+          </a:xfrm>
+          <a:prstGeom prst="rect">
+            <a:avLst/>
+          </a:prstGeom>
+          <a:noFill/>
+          <a:ln/>
+        </p:spPr>
+        <p:txBody>
+          <a:bodyPr wrap="square" lIns="0" tIns="0" rIns="0" bIns="0" rtlCol="0" anchor="ctr"/>
+          <a:lstStyle/>
+          <a:p>
+            <a:pPr algn="ctr" indent="0" marL="0">
+              <a:buNone/>
+            </a:pPr>
+            <a:r>
+              <a:rPr lang="en-US" sz="1400" b="1" dirty="0">
+                <a:solidFill>
+                  <a:srgbClr val="0D9488"/>
+                </a:solidFill>
+                <a:latin typeface="Trebuchet MS" pitchFamily="34" charset="0"/>
+                <a:ea typeface="Trebuchet MS" pitchFamily="34" charset="-122"/>
+                <a:cs typeface="Trebuchet MS" pitchFamily="34" charset="-120"/>
+              </a:rPr>
+              <a:t>placed</a:t>
+            </a:r>
+            <a:endParaRPr lang="en-US" sz="1400" dirty="0"/>
+          </a:p>
+        </p:txBody>
+      </p:sp>
+      <p:sp>
+        <p:nvSpPr>
+          <p:cNvPr id="34" name="Shape 32"/>
+          <p:cNvSpPr/>
+          <p:nvPr/>
+        </p:nvSpPr>
+        <p:spPr>
+          <a:xfrm>
+            <a:off x="365760" y="4096512"/>
+            <a:ext cx="1371600" cy="804672"/>
+          </a:xfrm>
+          <a:prstGeom prst="rect">
+            <a:avLst>
+              <a:gd name="adj" fmla="val 6818"/>
+            </a:avLst>
+          </a:prstGeom>
+          <a:solidFill>
+            <a:srgbClr val="E2E8F0"/>
+          </a:solidFill>
+          <a:ln w="12700">
+            <a:solidFill>
+              <a:srgbClr val="E2E8F0"/>
+            </a:solidFill>
+            <a:prstDash val="solid"/>
+          </a:ln>
+        </p:spPr>
+      </p:sp>
+      <p:sp>
+        <p:nvSpPr>
+          <p:cNvPr id="35" name="Text 33"/>
+          <p:cNvSpPr/>
+          <p:nvPr/>
+        </p:nvSpPr>
+        <p:spPr>
+          <a:xfrm>
+            <a:off x="365760" y="4096512"/>
+            <a:ext cx="1371600" cy="804672"/>
+          </a:xfrm>
+          <a:prstGeom prst="rect">
+            <a:avLst/>
+          </a:prstGeom>
+          <a:noFill/>
+          <a:ln/>
+        </p:spPr>
+        <p:txBody>
+          <a:bodyPr wrap="square" lIns="0" tIns="0" rIns="0" bIns="0" rtlCol="0" anchor="ctr"/>
+          <a:lstStyle/>
+          <a:p>
+            <a:pPr algn="ctr" indent="0" marL="0">
+              <a:buNone/>
+            </a:pPr>
+            <a:r>
+              <a:rPr lang="en-US" sz="1100" b="1" dirty="0">
+                <a:solidFill>
+                  <a:srgbClr val="475569"/>
+                </a:solidFill>
+                <a:latin typeface="Trebuchet MS" pitchFamily="34" charset="0"/>
+                <a:ea typeface="Trebuchet MS" pitchFamily="34" charset="-122"/>
+                <a:cs typeface="Trebuchet MS" pitchFamily="34" charset="-120"/>
+              </a:rPr>
+              <a:t>Phonemes</a:t>
+            </a:r>
+            <a:endParaRPr lang="en-US" sz="1100" dirty="0"/>
+          </a:p>
+        </p:txBody>
+      </p:sp>
+      <p:sp>
+        <p:nvSpPr>
+          <p:cNvPr id="36" name="Shape 34"/>
+          <p:cNvSpPr/>
+          <p:nvPr/>
+        </p:nvSpPr>
+        <p:spPr>
+          <a:xfrm>
+            <a:off x="1874520" y="4096512"/>
+            <a:ext cx="6903720" cy="804672"/>
+          </a:xfrm>
+          <a:prstGeom prst="rect">
+            <a:avLst>
+              <a:gd name="adj" fmla="val 6818"/>
+            </a:avLst>
+          </a:prstGeom>
+          <a:solidFill>
+            <a:srgbClr val="FCE7F3"/>
+          </a:solidFill>
+          <a:ln w="12700">
+            <a:solidFill>
+              <a:srgbClr val="DB2777"/>
+            </a:solidFill>
+            <a:prstDash val="solid"/>
+          </a:ln>
+        </p:spPr>
+      </p:sp>
+      <p:sp>
+        <p:nvSpPr>
+          <p:cNvPr id="37" name="Shape 35"/>
+          <p:cNvSpPr/>
+          <p:nvPr/>
+        </p:nvSpPr>
+        <p:spPr>
+          <a:xfrm>
+            <a:off x="2124837" y="4169664"/>
+            <a:ext cx="685800" cy="384048"/>
+          </a:xfrm>
+          <a:prstGeom prst="rect">
+            <a:avLst>
+              <a:gd name="adj" fmla="val 9524"/>
+            </a:avLst>
+          </a:prstGeom>
+          <a:solidFill>
+            <a:srgbClr val="FFFFFF"/>
+          </a:solidFill>
+          <a:ln w="12700">
+            <a:solidFill>
+              <a:srgbClr val="DB2777"/>
+            </a:solidFill>
+            <a:prstDash val="solid"/>
+          </a:ln>
+        </p:spPr>
+      </p:sp>
+      <p:sp>
+        <p:nvSpPr>
+          <p:cNvPr id="38" name="Text 36"/>
+          <p:cNvSpPr/>
+          <p:nvPr/>
+        </p:nvSpPr>
+        <p:spPr>
+          <a:xfrm>
+            <a:off x="2124837" y="4169664"/>
+            <a:ext cx="685800" cy="384048"/>
+          </a:xfrm>
+          <a:prstGeom prst="rect">
+            <a:avLst/>
+          </a:prstGeom>
+          <a:noFill/>
+          <a:ln/>
+        </p:spPr>
+        <p:txBody>
+          <a:bodyPr wrap="square" lIns="0" tIns="0" rIns="0" bIns="0" rtlCol="0" anchor="ctr"/>
+          <a:lstStyle/>
+          <a:p>
+            <a:pPr algn="ctr" indent="0" marL="0">
+              <a:buNone/>
+            </a:pPr>
+            <a:r>
+              <a:rPr lang="en-US" sz="900" b="1" dirty="0">
+                <a:solidFill>
+                  <a:srgbClr val="9D174D"/>
+                </a:solidFill>
+                <a:latin typeface="Trebuchet MS" pitchFamily="34" charset="0"/>
+                <a:ea typeface="Trebuchet MS" pitchFamily="34" charset="-122"/>
+                <a:cs typeface="Trebuchet MS" pitchFamily="34" charset="-120"/>
+              </a:rPr>
+              <a:t>r</a:t>
+            </a:r>
+            <a:endParaRPr lang="en-US" sz="900" dirty="0"/>
+          </a:p>
+        </p:txBody>
+      </p:sp>
+      <p:sp>
+        <p:nvSpPr>
+          <p:cNvPr id="39" name="Shape 37"/>
+          <p:cNvSpPr/>
+          <p:nvPr/>
+        </p:nvSpPr>
+        <p:spPr>
+          <a:xfrm>
+            <a:off x="3033522" y="4169664"/>
+            <a:ext cx="685800" cy="384048"/>
+          </a:xfrm>
+          <a:prstGeom prst="rect">
+            <a:avLst>
+              <a:gd name="adj" fmla="val 9524"/>
+            </a:avLst>
+          </a:prstGeom>
+          <a:solidFill>
+            <a:srgbClr val="FFFFFF"/>
+          </a:solidFill>
+          <a:ln w="12700">
+            <a:solidFill>
+              <a:srgbClr val="DB2777"/>
+            </a:solidFill>
+            <a:prstDash val="solid"/>
+          </a:ln>
+        </p:spPr>
+      </p:sp>
+      <p:sp>
+        <p:nvSpPr>
+          <p:cNvPr id="40" name="Text 38"/>
+          <p:cNvSpPr/>
+          <p:nvPr/>
+        </p:nvSpPr>
+        <p:spPr>
+          <a:xfrm>
+            <a:off x="3033522" y="4169664"/>
+            <a:ext cx="685800" cy="384048"/>
+          </a:xfrm>
+          <a:prstGeom prst="rect">
+            <a:avLst/>
+          </a:prstGeom>
+          <a:noFill/>
+          <a:ln/>
+        </p:spPr>
+        <p:txBody>
+          <a:bodyPr wrap="square" lIns="0" tIns="0" rIns="0" bIns="0" rtlCol="0" anchor="ctr"/>
+          <a:lstStyle/>
+          <a:p>
+            <a:pPr algn="ctr" indent="0" marL="0">
+              <a:buNone/>
+            </a:pPr>
+            <a:r>
+              <a:rPr lang="en-US" sz="900" b="1" dirty="0">
+                <a:solidFill>
+                  <a:srgbClr val="9D174D"/>
+                </a:solidFill>
+                <a:latin typeface="Trebuchet MS" pitchFamily="34" charset="0"/>
+                <a:ea typeface="Trebuchet MS" pitchFamily="34" charset="-122"/>
+                <a:cs typeface="Trebuchet MS" pitchFamily="34" charset="-120"/>
+              </a:rPr>
+              <a:t>e</a:t>
+            </a:r>
+            <a:endParaRPr lang="en-US" sz="900" dirty="0"/>
+          </a:p>
+        </p:txBody>
+      </p:sp>
+      <p:sp>
+        <p:nvSpPr>
+          <p:cNvPr id="41" name="Shape 39"/>
+          <p:cNvSpPr/>
+          <p:nvPr/>
+        </p:nvSpPr>
+        <p:spPr>
+          <a:xfrm>
+            <a:off x="3942207" y="4169664"/>
+            <a:ext cx="685800" cy="384048"/>
+          </a:xfrm>
+          <a:prstGeom prst="rect">
+            <a:avLst>
+              <a:gd name="adj" fmla="val 9524"/>
+            </a:avLst>
+          </a:prstGeom>
+          <a:solidFill>
+            <a:srgbClr val="FFFFFF"/>
+          </a:solidFill>
+          <a:ln w="12700">
+            <a:solidFill>
+              <a:srgbClr val="DB2777"/>
+            </a:solidFill>
+            <a:prstDash val="solid"/>
+          </a:ln>
+        </p:spPr>
+      </p:sp>
+      <p:sp>
+        <p:nvSpPr>
+          <p:cNvPr id="42" name="Text 40"/>
+          <p:cNvSpPr/>
+          <p:nvPr/>
+        </p:nvSpPr>
+        <p:spPr>
+          <a:xfrm>
+            <a:off x="3942207" y="4169664"/>
+            <a:ext cx="685800" cy="384048"/>
+          </a:xfrm>
+          <a:prstGeom prst="rect">
+            <a:avLst/>
+          </a:prstGeom>
+          <a:noFill/>
+          <a:ln/>
+        </p:spPr>
+        <p:txBody>
+          <a:bodyPr wrap="square" lIns="0" tIns="0" rIns="0" bIns="0" rtlCol="0" anchor="ctr"/>
+          <a:lstStyle/>
+          <a:p>
+            <a:pPr algn="ctr" indent="0" marL="0">
+              <a:buNone/>
+            </a:pPr>
+            <a:r>
+              <a:rPr lang="en-US" sz="900" b="1" dirty="0">
+                <a:solidFill>
+                  <a:srgbClr val="9D174D"/>
+                </a:solidFill>
+                <a:latin typeface="Trebuchet MS" pitchFamily="34" charset="0"/>
+                <a:ea typeface="Trebuchet MS" pitchFamily="34" charset="-122"/>
+                <a:cs typeface="Trebuchet MS" pitchFamily="34" charset="-120"/>
+              </a:rPr>
+              <a:t>p</a:t>
+            </a:r>
+            <a:endParaRPr lang="en-US" sz="900" dirty="0"/>
+          </a:p>
+        </p:txBody>
+      </p:sp>
+      <p:sp>
+        <p:nvSpPr>
+          <p:cNvPr id="43" name="Shape 41"/>
+          <p:cNvSpPr/>
+          <p:nvPr/>
+        </p:nvSpPr>
+        <p:spPr>
+          <a:xfrm>
+            <a:off x="4850892" y="4169664"/>
+            <a:ext cx="685800" cy="384048"/>
+          </a:xfrm>
+          <a:prstGeom prst="rect">
+            <a:avLst>
+              <a:gd name="adj" fmla="val 9524"/>
+            </a:avLst>
+          </a:prstGeom>
+          <a:solidFill>
+            <a:srgbClr val="FFFFFF"/>
+          </a:solidFill>
+          <a:ln w="12700">
+            <a:solidFill>
+              <a:srgbClr val="DB2777"/>
+            </a:solidFill>
+            <a:prstDash val="solid"/>
+          </a:ln>
+        </p:spPr>
+      </p:sp>
+      <p:sp>
+        <p:nvSpPr>
+          <p:cNvPr id="44" name="Text 42"/>
+          <p:cNvSpPr/>
+          <p:nvPr/>
+        </p:nvSpPr>
+        <p:spPr>
+          <a:xfrm>
+            <a:off x="4850892" y="4169664"/>
+            <a:ext cx="685800" cy="384048"/>
+          </a:xfrm>
+          <a:prstGeom prst="rect">
+            <a:avLst/>
+          </a:prstGeom>
+          <a:noFill/>
+          <a:ln/>
+        </p:spPr>
+        <p:txBody>
+          <a:bodyPr wrap="square" lIns="0" tIns="0" rIns="0" bIns="0" rtlCol="0" anchor="ctr"/>
+          <a:lstStyle/>
+          <a:p>
+            <a:pPr algn="ctr" indent="0" marL="0">
+              <a:buNone/>
+            </a:pPr>
+            <a:r>
+              <a:rPr lang="en-US" sz="900" b="1" dirty="0">
+                <a:solidFill>
+                  <a:srgbClr val="9D174D"/>
+                </a:solidFill>
+                <a:latin typeface="Trebuchet MS" pitchFamily="34" charset="0"/>
+                <a:ea typeface="Trebuchet MS" pitchFamily="34" charset="-122"/>
+                <a:cs typeface="Trebuchet MS" pitchFamily="34" charset="-120"/>
+              </a:rPr>
+              <a:t>l</a:t>
+            </a:r>
+            <a:endParaRPr lang="en-US" sz="900" dirty="0"/>
+          </a:p>
+        </p:txBody>
+      </p:sp>
+      <p:sp>
+        <p:nvSpPr>
+          <p:cNvPr id="45" name="Shape 43"/>
+          <p:cNvSpPr/>
+          <p:nvPr/>
+        </p:nvSpPr>
+        <p:spPr>
+          <a:xfrm>
+            <a:off x="5759577" y="4169664"/>
+            <a:ext cx="685800" cy="384048"/>
+          </a:xfrm>
+          <a:prstGeom prst="rect">
+            <a:avLst>
+              <a:gd name="adj" fmla="val 9524"/>
+            </a:avLst>
+          </a:prstGeom>
+          <a:solidFill>
+            <a:srgbClr val="FFFFFF"/>
+          </a:solidFill>
+          <a:ln w="12700">
+            <a:solidFill>
+              <a:srgbClr val="DB2777"/>
+            </a:solidFill>
+            <a:prstDash val="solid"/>
+          </a:ln>
+        </p:spPr>
+      </p:sp>
+      <p:sp>
+        <p:nvSpPr>
+          <p:cNvPr id="46" name="Text 44"/>
+          <p:cNvSpPr/>
+          <p:nvPr/>
+        </p:nvSpPr>
+        <p:spPr>
+          <a:xfrm>
+            <a:off x="5759577" y="4169664"/>
+            <a:ext cx="685800" cy="384048"/>
+          </a:xfrm>
+          <a:prstGeom prst="rect">
+            <a:avLst/>
+          </a:prstGeom>
+          <a:noFill/>
+          <a:ln/>
+        </p:spPr>
+        <p:txBody>
+          <a:bodyPr wrap="square" lIns="0" tIns="0" rIns="0" bIns="0" rtlCol="0" anchor="ctr"/>
+          <a:lstStyle/>
+          <a:p>
+            <a:pPr algn="ctr" indent="0" marL="0">
+              <a:buNone/>
+            </a:pPr>
+            <a:r>
+              <a:rPr lang="en-US" sz="900" b="1" dirty="0">
+                <a:solidFill>
+                  <a:srgbClr val="9D174D"/>
+                </a:solidFill>
+                <a:latin typeface="Trebuchet MS" pitchFamily="34" charset="0"/>
+                <a:ea typeface="Trebuchet MS" pitchFamily="34" charset="-122"/>
+                <a:cs typeface="Trebuchet MS" pitchFamily="34" charset="-120"/>
+              </a:rPr>
+              <a:t>a</a:t>
+            </a:r>
+            <a:endParaRPr lang="en-US" sz="900" dirty="0"/>
+          </a:p>
+        </p:txBody>
+      </p:sp>
+      <p:sp>
+        <p:nvSpPr>
+          <p:cNvPr id="47" name="Shape 45"/>
+          <p:cNvSpPr/>
+          <p:nvPr/>
+        </p:nvSpPr>
+        <p:spPr>
+          <a:xfrm>
+            <a:off x="6668262" y="4169664"/>
+            <a:ext cx="685800" cy="384048"/>
+          </a:xfrm>
+          <a:prstGeom prst="rect">
+            <a:avLst>
+              <a:gd name="adj" fmla="val 9524"/>
+            </a:avLst>
+          </a:prstGeom>
+          <a:solidFill>
+            <a:srgbClr val="FFFFFF"/>
+          </a:solidFill>
+          <a:ln w="12700">
+            <a:solidFill>
+              <a:srgbClr val="DB2777"/>
+            </a:solidFill>
+            <a:prstDash val="solid"/>
+          </a:ln>
+        </p:spPr>
+      </p:sp>
+      <p:sp>
+        <p:nvSpPr>
+          <p:cNvPr id="48" name="Text 46"/>
+          <p:cNvSpPr/>
+          <p:nvPr/>
+        </p:nvSpPr>
+        <p:spPr>
+          <a:xfrm>
+            <a:off x="6668262" y="4169664"/>
+            <a:ext cx="685800" cy="384048"/>
+          </a:xfrm>
+          <a:prstGeom prst="rect">
+            <a:avLst/>
+          </a:prstGeom>
+          <a:noFill/>
+          <a:ln/>
+        </p:spPr>
+        <p:txBody>
+          <a:bodyPr wrap="square" lIns="0" tIns="0" rIns="0" bIns="0" rtlCol="0" anchor="ctr"/>
+          <a:lstStyle/>
+          <a:p>
+            <a:pPr algn="ctr" indent="0" marL="0">
+              <a:buNone/>
+            </a:pPr>
+            <a:r>
+              <a:rPr lang="en-US" sz="900" b="1" dirty="0">
+                <a:solidFill>
+                  <a:srgbClr val="9D174D"/>
+                </a:solidFill>
+                <a:latin typeface="Trebuchet MS" pitchFamily="34" charset="0"/>
+                <a:ea typeface="Trebuchet MS" pitchFamily="34" charset="-122"/>
+                <a:cs typeface="Trebuchet MS" pitchFamily="34" charset="-120"/>
+              </a:rPr>
+              <a:t>ce</a:t>
+            </a:r>
+            <a:endParaRPr lang="en-US" sz="900" dirty="0"/>
+          </a:p>
+        </p:txBody>
+      </p:sp>
+      <p:sp>
+        <p:nvSpPr>
+          <p:cNvPr id="49" name="Text 47"/>
+          <p:cNvSpPr/>
+          <p:nvPr/>
+        </p:nvSpPr>
+        <p:spPr>
+          <a:xfrm>
+            <a:off x="6668262" y="4572000"/>
+            <a:ext cx="685800" cy="219456"/>
           </a:xfrm>
           <a:prstGeom prst="rect">
             <a:avLst/>
@@ -35526,7 +36240,7 @@
               <a:buNone/>
             </a:pPr>
             <a:r>
-              <a:rPr lang="en-US" sz="700" i="1" dirty="0">
+              <a:rPr lang="en-US" sz="750" i="1" dirty="0">
                 <a:solidFill>
                   <a:srgbClr val="94A3B8"/>
                 </a:solidFill>
@@ -35534,1036 +36248,73 @@
                 <a:ea typeface="Calibri" pitchFamily="34" charset="-122"/>
                 <a:cs typeface="Calibri" pitchFamily="34" charset="-120"/>
               </a:rPr>
-              <a:t>'e' dropped before vowel suffix</a:t>
-            </a:r>
-            <a:endParaRPr lang="en-US" sz="700" dirty="0"/>
-          </a:p>
-        </p:txBody>
-      </p:sp>
-      <p:sp>
-        <p:nvSpPr>
-          <p:cNvPr id="26" name="Shape 24"/>
-          <p:cNvSpPr/>
-          <p:nvPr/>
-        </p:nvSpPr>
-        <p:spPr>
-          <a:xfrm>
-            <a:off x="365760" y="3273552"/>
-            <a:ext cx="1371600" cy="658368"/>
+              <a:t>/s/</a:t>
+            </a:r>
+            <a:endParaRPr lang="en-US" sz="750" dirty="0"/>
+          </a:p>
+        </p:txBody>
+      </p:sp>
+      <p:sp>
+        <p:nvSpPr>
+          <p:cNvPr id="50" name="Shape 48"/>
+          <p:cNvSpPr/>
+          <p:nvPr/>
+        </p:nvSpPr>
+        <p:spPr>
+          <a:xfrm>
+            <a:off x="7576947" y="4169664"/>
+            <a:ext cx="685800" cy="384048"/>
           </a:xfrm>
           <a:prstGeom prst="rect">
             <a:avLst>
-              <a:gd name="adj" fmla="val 8333"/>
+              <a:gd name="adj" fmla="val 9524"/>
             </a:avLst>
           </a:prstGeom>
           <a:solidFill>
-            <a:srgbClr val="E2E8F0"/>
-          </a:solidFill>
-          <a:ln w="12700">
-            <a:solidFill>
-              <a:srgbClr val="E2E8F0"/>
-            </a:solidFill>
-            <a:prstDash val="solid"/>
-          </a:ln>
-        </p:spPr>
-      </p:sp>
-      <p:sp>
-        <p:nvSpPr>
-          <p:cNvPr id="27" name="Text 25"/>
-          <p:cNvSpPr/>
-          <p:nvPr/>
-        </p:nvSpPr>
-        <p:spPr>
-          <a:xfrm>
-            <a:off x="365760" y="3273552"/>
-            <a:ext cx="1371600" cy="658368"/>
-          </a:xfrm>
-          <a:prstGeom prst="rect">
-            <a:avLst/>
-          </a:prstGeom>
-          <a:noFill/>
-          <a:ln/>
-        </p:spPr>
-        <p:txBody>
-          <a:bodyPr wrap="square" lIns="0" tIns="0" rIns="0" bIns="0" rtlCol="0" anchor="ctr"/>
-          <a:lstStyle/>
-          <a:p>
-            <a:pPr algn="ctr" indent="0" marL="0">
-              <a:buNone/>
-            </a:pPr>
-            <a:r>
-              <a:rPr lang="en-US" sz="1100" b="1" dirty="0">
-                <a:solidFill>
-                  <a:srgbClr val="475569"/>
+            <a:srgbClr val="FFFFFF"/>
+          </a:solidFill>
+          <a:ln w="12700">
+            <a:solidFill>
+              <a:srgbClr val="DB2777"/>
+            </a:solidFill>
+            <a:prstDash val="solid"/>
+          </a:ln>
+        </p:spPr>
+      </p:sp>
+      <p:sp>
+        <p:nvSpPr>
+          <p:cNvPr id="51" name="Text 49"/>
+          <p:cNvSpPr/>
+          <p:nvPr/>
+        </p:nvSpPr>
+        <p:spPr>
+          <a:xfrm>
+            <a:off x="7576947" y="4169664"/>
+            <a:ext cx="685800" cy="384048"/>
+          </a:xfrm>
+          <a:prstGeom prst="rect">
+            <a:avLst/>
+          </a:prstGeom>
+          <a:noFill/>
+          <a:ln/>
+        </p:spPr>
+        <p:txBody>
+          <a:bodyPr wrap="square" lIns="0" tIns="0" rIns="0" bIns="0" rtlCol="0" anchor="ctr"/>
+          <a:lstStyle/>
+          <a:p>
+            <a:pPr algn="ctr" indent="0" marL="0">
+              <a:buNone/>
+            </a:pPr>
+            <a:r>
+              <a:rPr lang="en-US" sz="900" b="1" dirty="0">
+                <a:solidFill>
+                  <a:srgbClr val="9D174D"/>
                 </a:solidFill>
                 <a:latin typeface="Trebuchet MS" pitchFamily="34" charset="0"/>
                 <a:ea typeface="Trebuchet MS" pitchFamily="34" charset="-122"/>
                 <a:cs typeface="Trebuchet MS" pitchFamily="34" charset="-120"/>
               </a:rPr>
-              <a:t>Syllables</a:t>
-            </a:r>
-            <a:endParaRPr lang="en-US" sz="1100" dirty="0"/>
-          </a:p>
-        </p:txBody>
-      </p:sp>
-      <p:sp>
-        <p:nvSpPr>
-          <p:cNvPr id="28" name="Shape 26"/>
-          <p:cNvSpPr/>
-          <p:nvPr/>
-        </p:nvSpPr>
-        <p:spPr>
-          <a:xfrm>
-            <a:off x="1874520" y="3273552"/>
-            <a:ext cx="6903720" cy="658368"/>
-          </a:xfrm>
-          <a:prstGeom prst="rect">
-            <a:avLst>
-              <a:gd name="adj" fmla="val 8333"/>
-            </a:avLst>
-          </a:prstGeom>
-          <a:solidFill>
-            <a:srgbClr val="CCFBF1"/>
-          </a:solidFill>
-          <a:ln w="12700">
-            <a:solidFill>
-              <a:srgbClr val="0D9488"/>
-            </a:solidFill>
-            <a:prstDash val="solid"/>
-          </a:ln>
-        </p:spPr>
-      </p:sp>
-      <p:sp>
-        <p:nvSpPr>
-          <p:cNvPr id="29" name="Shape 27"/>
-          <p:cNvSpPr/>
-          <p:nvPr/>
-        </p:nvSpPr>
-        <p:spPr>
-          <a:xfrm>
-            <a:off x="2313432" y="3364992"/>
-            <a:ext cx="1645920" cy="475488"/>
-          </a:xfrm>
-          <a:prstGeom prst="rect">
-            <a:avLst>
-              <a:gd name="adj" fmla="val 9615"/>
-            </a:avLst>
-          </a:prstGeom>
-          <a:solidFill>
-            <a:srgbClr val="FFFFFF"/>
-          </a:solidFill>
-          <a:ln w="12700">
-            <a:solidFill>
-              <a:srgbClr val="0D9488"/>
-            </a:solidFill>
-            <a:prstDash val="solid"/>
-          </a:ln>
-        </p:spPr>
-      </p:sp>
-      <p:sp>
-        <p:nvSpPr>
-          <p:cNvPr id="30" name="Text 28"/>
-          <p:cNvSpPr/>
-          <p:nvPr/>
-        </p:nvSpPr>
-        <p:spPr>
-          <a:xfrm>
-            <a:off x="2313432" y="3364992"/>
-            <a:ext cx="1645920" cy="475488"/>
-          </a:xfrm>
-          <a:prstGeom prst="rect">
-            <a:avLst/>
-          </a:prstGeom>
-          <a:noFill/>
-          <a:ln/>
-        </p:spPr>
-        <p:txBody>
-          <a:bodyPr wrap="square" lIns="0" tIns="0" rIns="0" bIns="0" rtlCol="0" anchor="ctr"/>
-          <a:lstStyle/>
-          <a:p>
-            <a:pPr algn="ctr" indent="0" marL="0">
-              <a:buNone/>
-            </a:pPr>
-            <a:r>
-              <a:rPr lang="en-US" sz="1400" b="1" dirty="0">
-                <a:solidFill>
-                  <a:srgbClr val="0D9488"/>
-                </a:solidFill>
-                <a:latin typeface="Trebuchet MS" pitchFamily="34" charset="0"/>
-                <a:ea typeface="Trebuchet MS" pitchFamily="34" charset="-122"/>
-                <a:cs typeface="Trebuchet MS" pitchFamily="34" charset="-120"/>
-              </a:rPr>
-              <a:t>re</a:t>
-            </a:r>
-            <a:endParaRPr lang="en-US" sz="1400" dirty="0"/>
-          </a:p>
-        </p:txBody>
-      </p:sp>
-      <p:sp>
-        <p:nvSpPr>
-          <p:cNvPr id="31" name="Text 29"/>
-          <p:cNvSpPr/>
-          <p:nvPr/>
-        </p:nvSpPr>
-        <p:spPr>
-          <a:xfrm>
-            <a:off x="3959352" y="3364992"/>
-            <a:ext cx="411480" cy="475488"/>
-          </a:xfrm>
-          <a:prstGeom prst="rect">
-            <a:avLst/>
-          </a:prstGeom>
-          <a:noFill/>
-          <a:ln/>
-        </p:spPr>
-        <p:txBody>
-          <a:bodyPr wrap="square" lIns="0" tIns="0" rIns="0" bIns="0" rtlCol="0" anchor="ctr"/>
-          <a:lstStyle/>
-          <a:p>
-            <a:pPr algn="ctr" indent="0" marL="0">
-              <a:buNone/>
-            </a:pPr>
-            <a:r>
-              <a:rPr lang="en-US" sz="1600" b="1" dirty="0">
-                <a:solidFill>
-                  <a:srgbClr val="0D9488"/>
-                </a:solidFill>
-                <a:latin typeface="Trebuchet MS" pitchFamily="34" charset="0"/>
-                <a:ea typeface="Trebuchet MS" pitchFamily="34" charset="-122"/>
-                <a:cs typeface="Trebuchet MS" pitchFamily="34" charset="-120"/>
-              </a:rPr>
-              <a:t>·</a:t>
-            </a:r>
-            <a:endParaRPr lang="en-US" sz="1600" dirty="0"/>
-          </a:p>
-        </p:txBody>
-      </p:sp>
-      <p:sp>
-        <p:nvSpPr>
-          <p:cNvPr id="32" name="Shape 30"/>
-          <p:cNvSpPr/>
-          <p:nvPr/>
-        </p:nvSpPr>
-        <p:spPr>
-          <a:xfrm>
-            <a:off x="4370832" y="3364992"/>
-            <a:ext cx="1645920" cy="475488"/>
-          </a:xfrm>
-          <a:prstGeom prst="rect">
-            <a:avLst>
-              <a:gd name="adj" fmla="val 9615"/>
-            </a:avLst>
-          </a:prstGeom>
-          <a:solidFill>
-            <a:srgbClr val="FFFFFF"/>
-          </a:solidFill>
-          <a:ln w="12700">
-            <a:solidFill>
-              <a:srgbClr val="0D9488"/>
-            </a:solidFill>
-            <a:prstDash val="solid"/>
-          </a:ln>
-        </p:spPr>
-      </p:sp>
-      <p:sp>
-        <p:nvSpPr>
-          <p:cNvPr id="33" name="Text 31"/>
-          <p:cNvSpPr/>
-          <p:nvPr/>
-        </p:nvSpPr>
-        <p:spPr>
-          <a:xfrm>
-            <a:off x="4370832" y="3364992"/>
-            <a:ext cx="1645920" cy="475488"/>
-          </a:xfrm>
-          <a:prstGeom prst="rect">
-            <a:avLst/>
-          </a:prstGeom>
-          <a:noFill/>
-          <a:ln/>
-        </p:spPr>
-        <p:txBody>
-          <a:bodyPr wrap="square" lIns="0" tIns="0" rIns="0" bIns="0" rtlCol="0" anchor="ctr"/>
-          <a:lstStyle/>
-          <a:p>
-            <a:pPr algn="ctr" indent="0" marL="0">
-              <a:buNone/>
-            </a:pPr>
-            <a:r>
-              <a:rPr lang="en-US" sz="1400" b="1" dirty="0">
-                <a:solidFill>
-                  <a:srgbClr val="0D9488"/>
-                </a:solidFill>
-                <a:latin typeface="Trebuchet MS" pitchFamily="34" charset="0"/>
-                <a:ea typeface="Trebuchet MS" pitchFamily="34" charset="-122"/>
-                <a:cs typeface="Trebuchet MS" pitchFamily="34" charset="-120"/>
-              </a:rPr>
-              <a:t>pla</a:t>
-            </a:r>
-            <a:endParaRPr lang="en-US" sz="1400" dirty="0"/>
-          </a:p>
-        </p:txBody>
-      </p:sp>
-      <p:sp>
-        <p:nvSpPr>
-          <p:cNvPr id="34" name="Text 32"/>
-          <p:cNvSpPr/>
-          <p:nvPr/>
-        </p:nvSpPr>
-        <p:spPr>
-          <a:xfrm>
-            <a:off x="6016752" y="3364992"/>
-            <a:ext cx="411480" cy="475488"/>
-          </a:xfrm>
-          <a:prstGeom prst="rect">
-            <a:avLst/>
-          </a:prstGeom>
-          <a:noFill/>
-          <a:ln/>
-        </p:spPr>
-        <p:txBody>
-          <a:bodyPr wrap="square" lIns="0" tIns="0" rIns="0" bIns="0" rtlCol="0" anchor="ctr"/>
-          <a:lstStyle/>
-          <a:p>
-            <a:pPr algn="ctr" indent="0" marL="0">
-              <a:buNone/>
-            </a:pPr>
-            <a:r>
-              <a:rPr lang="en-US" sz="1600" b="1" dirty="0">
-                <a:solidFill>
-                  <a:srgbClr val="0D9488"/>
-                </a:solidFill>
-                <a:latin typeface="Trebuchet MS" pitchFamily="34" charset="0"/>
-                <a:ea typeface="Trebuchet MS" pitchFamily="34" charset="-122"/>
-                <a:cs typeface="Trebuchet MS" pitchFamily="34" charset="-120"/>
-              </a:rPr>
-              <a:t>·</a:t>
-            </a:r>
-            <a:endParaRPr lang="en-US" sz="1600" dirty="0"/>
-          </a:p>
-        </p:txBody>
-      </p:sp>
-      <p:sp>
-        <p:nvSpPr>
-          <p:cNvPr id="35" name="Shape 33"/>
-          <p:cNvSpPr/>
-          <p:nvPr/>
-        </p:nvSpPr>
-        <p:spPr>
-          <a:xfrm>
-            <a:off x="6428232" y="3364992"/>
-            <a:ext cx="1645920" cy="475488"/>
-          </a:xfrm>
-          <a:prstGeom prst="rect">
-            <a:avLst>
-              <a:gd name="adj" fmla="val 9615"/>
-            </a:avLst>
-          </a:prstGeom>
-          <a:solidFill>
-            <a:srgbClr val="FFFFFF"/>
-          </a:solidFill>
-          <a:ln w="12700">
-            <a:solidFill>
-              <a:srgbClr val="0D9488"/>
-            </a:solidFill>
-            <a:prstDash val="solid"/>
-          </a:ln>
-        </p:spPr>
-      </p:sp>
-      <p:sp>
-        <p:nvSpPr>
-          <p:cNvPr id="36" name="Text 34"/>
-          <p:cNvSpPr/>
-          <p:nvPr/>
-        </p:nvSpPr>
-        <p:spPr>
-          <a:xfrm>
-            <a:off x="6428232" y="3364992"/>
-            <a:ext cx="1645920" cy="475488"/>
-          </a:xfrm>
-          <a:prstGeom prst="rect">
-            <a:avLst/>
-          </a:prstGeom>
-          <a:noFill/>
-          <a:ln/>
-        </p:spPr>
-        <p:txBody>
-          <a:bodyPr wrap="square" lIns="0" tIns="0" rIns="0" bIns="0" rtlCol="0" anchor="ctr"/>
-          <a:lstStyle/>
-          <a:p>
-            <a:pPr algn="ctr" indent="0" marL="0">
-              <a:buNone/>
-            </a:pPr>
-            <a:r>
-              <a:rPr lang="en-US" sz="1400" b="1" dirty="0">
-                <a:solidFill>
-                  <a:srgbClr val="0D9488"/>
-                </a:solidFill>
-                <a:latin typeface="Trebuchet MS" pitchFamily="34" charset="0"/>
-                <a:ea typeface="Trebuchet MS" pitchFamily="34" charset="-122"/>
-                <a:cs typeface="Trebuchet MS" pitchFamily="34" charset="-120"/>
-              </a:rPr>
-              <a:t>cing</a:t>
-            </a:r>
-            <a:endParaRPr lang="en-US" sz="1400" dirty="0"/>
-          </a:p>
-        </p:txBody>
-      </p:sp>
-      <p:sp>
-        <p:nvSpPr>
-          <p:cNvPr id="37" name="Shape 35"/>
-          <p:cNvSpPr/>
-          <p:nvPr/>
-        </p:nvSpPr>
-        <p:spPr>
-          <a:xfrm>
-            <a:off x="365760" y="4096512"/>
-            <a:ext cx="1371600" cy="804672"/>
-          </a:xfrm>
-          <a:prstGeom prst="rect">
-            <a:avLst>
-              <a:gd name="adj" fmla="val 6818"/>
-            </a:avLst>
-          </a:prstGeom>
-          <a:solidFill>
-            <a:srgbClr val="E2E8F0"/>
-          </a:solidFill>
-          <a:ln w="12700">
-            <a:solidFill>
-              <a:srgbClr val="E2E8F0"/>
-            </a:solidFill>
-            <a:prstDash val="solid"/>
-          </a:ln>
-        </p:spPr>
-      </p:sp>
-      <p:sp>
-        <p:nvSpPr>
-          <p:cNvPr id="38" name="Text 36"/>
-          <p:cNvSpPr/>
-          <p:nvPr/>
-        </p:nvSpPr>
-        <p:spPr>
-          <a:xfrm>
-            <a:off x="365760" y="4096512"/>
-            <a:ext cx="1371600" cy="804672"/>
-          </a:xfrm>
-          <a:prstGeom prst="rect">
-            <a:avLst/>
-          </a:prstGeom>
-          <a:noFill/>
-          <a:ln/>
-        </p:spPr>
-        <p:txBody>
-          <a:bodyPr wrap="square" lIns="0" tIns="0" rIns="0" bIns="0" rtlCol="0" anchor="ctr"/>
-          <a:lstStyle/>
-          <a:p>
-            <a:pPr algn="ctr" indent="0" marL="0">
-              <a:buNone/>
-            </a:pPr>
-            <a:r>
-              <a:rPr lang="en-US" sz="1100" b="1" dirty="0">
-                <a:solidFill>
-                  <a:srgbClr val="475569"/>
-                </a:solidFill>
-                <a:latin typeface="Trebuchet MS" pitchFamily="34" charset="0"/>
-                <a:ea typeface="Trebuchet MS" pitchFamily="34" charset="-122"/>
-                <a:cs typeface="Trebuchet MS" pitchFamily="34" charset="-120"/>
-              </a:rPr>
-              <a:t>Phonemes</a:t>
-            </a:r>
-            <a:endParaRPr lang="en-US" sz="1100" dirty="0"/>
-          </a:p>
-        </p:txBody>
-      </p:sp>
-      <p:sp>
-        <p:nvSpPr>
-          <p:cNvPr id="39" name="Shape 37"/>
-          <p:cNvSpPr/>
-          <p:nvPr/>
-        </p:nvSpPr>
-        <p:spPr>
-          <a:xfrm>
-            <a:off x="1874520" y="4096512"/>
-            <a:ext cx="6903720" cy="804672"/>
-          </a:xfrm>
-          <a:prstGeom prst="rect">
-            <a:avLst>
-              <a:gd name="adj" fmla="val 6818"/>
-            </a:avLst>
-          </a:prstGeom>
-          <a:solidFill>
-            <a:srgbClr val="FCE7F3"/>
-          </a:solidFill>
-          <a:ln w="12700">
-            <a:solidFill>
-              <a:srgbClr val="DB2777"/>
-            </a:solidFill>
-            <a:prstDash val="solid"/>
-          </a:ln>
-        </p:spPr>
-      </p:sp>
-      <p:sp>
-        <p:nvSpPr>
-          <p:cNvPr id="40" name="Shape 38"/>
-          <p:cNvSpPr/>
-          <p:nvPr/>
-        </p:nvSpPr>
-        <p:spPr>
-          <a:xfrm>
-            <a:off x="2023872" y="4169664"/>
-            <a:ext cx="685800" cy="384048"/>
-          </a:xfrm>
-          <a:prstGeom prst="rect">
-            <a:avLst>
-              <a:gd name="adj" fmla="val 9524"/>
-            </a:avLst>
-          </a:prstGeom>
-          <a:solidFill>
-            <a:srgbClr val="FFFFFF"/>
-          </a:solidFill>
-          <a:ln w="12700">
-            <a:solidFill>
-              <a:srgbClr val="DB2777"/>
-            </a:solidFill>
-            <a:prstDash val="solid"/>
-          </a:ln>
-        </p:spPr>
-      </p:sp>
-      <p:sp>
-        <p:nvSpPr>
-          <p:cNvPr id="41" name="Text 39"/>
-          <p:cNvSpPr/>
-          <p:nvPr/>
-        </p:nvSpPr>
-        <p:spPr>
-          <a:xfrm>
-            <a:off x="2023872" y="4169664"/>
-            <a:ext cx="685800" cy="384048"/>
-          </a:xfrm>
-          <a:prstGeom prst="rect">
-            <a:avLst/>
-          </a:prstGeom>
-          <a:noFill/>
-          <a:ln/>
-        </p:spPr>
-        <p:txBody>
-          <a:bodyPr wrap="square" lIns="0" tIns="0" rIns="0" bIns="0" rtlCol="0" anchor="ctr"/>
-          <a:lstStyle/>
-          <a:p>
-            <a:pPr algn="ctr" indent="0" marL="0">
-              <a:buNone/>
-            </a:pPr>
-            <a:r>
-              <a:rPr lang="en-US" sz="900" b="1" dirty="0">
-                <a:solidFill>
-                  <a:srgbClr val="9D174D"/>
-                </a:solidFill>
-                <a:latin typeface="Trebuchet MS" pitchFamily="34" charset="0"/>
-                <a:ea typeface="Trebuchet MS" pitchFamily="34" charset="-122"/>
-                <a:cs typeface="Trebuchet MS" pitchFamily="34" charset="-120"/>
-              </a:rPr>
-              <a:t>r</a:t>
-            </a:r>
-            <a:endParaRPr lang="en-US" sz="900" dirty="0"/>
-          </a:p>
-        </p:txBody>
-      </p:sp>
-      <p:sp>
-        <p:nvSpPr>
-          <p:cNvPr id="42" name="Shape 40"/>
-          <p:cNvSpPr/>
-          <p:nvPr/>
-        </p:nvSpPr>
-        <p:spPr>
-          <a:xfrm>
-            <a:off x="2831592" y="4169664"/>
-            <a:ext cx="685800" cy="384048"/>
-          </a:xfrm>
-          <a:prstGeom prst="rect">
-            <a:avLst>
-              <a:gd name="adj" fmla="val 9524"/>
-            </a:avLst>
-          </a:prstGeom>
-          <a:solidFill>
-            <a:srgbClr val="FFFFFF"/>
-          </a:solidFill>
-          <a:ln w="12700">
-            <a:solidFill>
-              <a:srgbClr val="DB2777"/>
-            </a:solidFill>
-            <a:prstDash val="solid"/>
-          </a:ln>
-        </p:spPr>
-      </p:sp>
-      <p:sp>
-        <p:nvSpPr>
-          <p:cNvPr id="43" name="Text 41"/>
-          <p:cNvSpPr/>
-          <p:nvPr/>
-        </p:nvSpPr>
-        <p:spPr>
-          <a:xfrm>
-            <a:off x="2831592" y="4169664"/>
-            <a:ext cx="685800" cy="384048"/>
-          </a:xfrm>
-          <a:prstGeom prst="rect">
-            <a:avLst/>
-          </a:prstGeom>
-          <a:noFill/>
-          <a:ln/>
-        </p:spPr>
-        <p:txBody>
-          <a:bodyPr wrap="square" lIns="0" tIns="0" rIns="0" bIns="0" rtlCol="0" anchor="ctr"/>
-          <a:lstStyle/>
-          <a:p>
-            <a:pPr algn="ctr" indent="0" marL="0">
-              <a:buNone/>
-            </a:pPr>
-            <a:r>
-              <a:rPr lang="en-US" sz="900" b="1" dirty="0">
-                <a:solidFill>
-                  <a:srgbClr val="9D174D"/>
-                </a:solidFill>
-                <a:latin typeface="Trebuchet MS" pitchFamily="34" charset="0"/>
-                <a:ea typeface="Trebuchet MS" pitchFamily="34" charset="-122"/>
-                <a:cs typeface="Trebuchet MS" pitchFamily="34" charset="-120"/>
-              </a:rPr>
-              <a:t>e</a:t>
-            </a:r>
-            <a:endParaRPr lang="en-US" sz="900" dirty="0"/>
-          </a:p>
-        </p:txBody>
-      </p:sp>
-      <p:sp>
-        <p:nvSpPr>
-          <p:cNvPr id="44" name="Shape 42"/>
-          <p:cNvSpPr/>
-          <p:nvPr/>
-        </p:nvSpPr>
-        <p:spPr>
-          <a:xfrm>
-            <a:off x="3639312" y="4169664"/>
-            <a:ext cx="685800" cy="384048"/>
-          </a:xfrm>
-          <a:prstGeom prst="rect">
-            <a:avLst>
-              <a:gd name="adj" fmla="val 9524"/>
-            </a:avLst>
-          </a:prstGeom>
-          <a:solidFill>
-            <a:srgbClr val="FFFFFF"/>
-          </a:solidFill>
-          <a:ln w="12700">
-            <a:solidFill>
-              <a:srgbClr val="DB2777"/>
-            </a:solidFill>
-            <a:prstDash val="solid"/>
-          </a:ln>
-        </p:spPr>
-      </p:sp>
-      <p:sp>
-        <p:nvSpPr>
-          <p:cNvPr id="45" name="Text 43"/>
-          <p:cNvSpPr/>
-          <p:nvPr/>
-        </p:nvSpPr>
-        <p:spPr>
-          <a:xfrm>
-            <a:off x="3639312" y="4169664"/>
-            <a:ext cx="685800" cy="384048"/>
-          </a:xfrm>
-          <a:prstGeom prst="rect">
-            <a:avLst/>
-          </a:prstGeom>
-          <a:noFill/>
-          <a:ln/>
-        </p:spPr>
-        <p:txBody>
-          <a:bodyPr wrap="square" lIns="0" tIns="0" rIns="0" bIns="0" rtlCol="0" anchor="ctr"/>
-          <a:lstStyle/>
-          <a:p>
-            <a:pPr algn="ctr" indent="0" marL="0">
-              <a:buNone/>
-            </a:pPr>
-            <a:r>
-              <a:rPr lang="en-US" sz="900" b="1" dirty="0">
-                <a:solidFill>
-                  <a:srgbClr val="9D174D"/>
-                </a:solidFill>
-                <a:latin typeface="Trebuchet MS" pitchFamily="34" charset="0"/>
-                <a:ea typeface="Trebuchet MS" pitchFamily="34" charset="-122"/>
-                <a:cs typeface="Trebuchet MS" pitchFamily="34" charset="-120"/>
-              </a:rPr>
-              <a:t>p</a:t>
-            </a:r>
-            <a:endParaRPr lang="en-US" sz="900" dirty="0"/>
-          </a:p>
-        </p:txBody>
-      </p:sp>
-      <p:sp>
-        <p:nvSpPr>
-          <p:cNvPr id="46" name="Shape 44"/>
-          <p:cNvSpPr/>
-          <p:nvPr/>
-        </p:nvSpPr>
-        <p:spPr>
-          <a:xfrm>
-            <a:off x="4447032" y="4169664"/>
-            <a:ext cx="685800" cy="384048"/>
-          </a:xfrm>
-          <a:prstGeom prst="rect">
-            <a:avLst>
-              <a:gd name="adj" fmla="val 9524"/>
-            </a:avLst>
-          </a:prstGeom>
-          <a:solidFill>
-            <a:srgbClr val="FFFFFF"/>
-          </a:solidFill>
-          <a:ln w="12700">
-            <a:solidFill>
-              <a:srgbClr val="DB2777"/>
-            </a:solidFill>
-            <a:prstDash val="solid"/>
-          </a:ln>
-        </p:spPr>
-      </p:sp>
-      <p:sp>
-        <p:nvSpPr>
-          <p:cNvPr id="47" name="Text 45"/>
-          <p:cNvSpPr/>
-          <p:nvPr/>
-        </p:nvSpPr>
-        <p:spPr>
-          <a:xfrm>
-            <a:off x="4447032" y="4169664"/>
-            <a:ext cx="685800" cy="384048"/>
-          </a:xfrm>
-          <a:prstGeom prst="rect">
-            <a:avLst/>
-          </a:prstGeom>
-          <a:noFill/>
-          <a:ln/>
-        </p:spPr>
-        <p:txBody>
-          <a:bodyPr wrap="square" lIns="0" tIns="0" rIns="0" bIns="0" rtlCol="0" anchor="ctr"/>
-          <a:lstStyle/>
-          <a:p>
-            <a:pPr algn="ctr" indent="0" marL="0">
-              <a:buNone/>
-            </a:pPr>
-            <a:r>
-              <a:rPr lang="en-US" sz="900" b="1" dirty="0">
-                <a:solidFill>
-                  <a:srgbClr val="9D174D"/>
-                </a:solidFill>
-                <a:latin typeface="Trebuchet MS" pitchFamily="34" charset="0"/>
-                <a:ea typeface="Trebuchet MS" pitchFamily="34" charset="-122"/>
-                <a:cs typeface="Trebuchet MS" pitchFamily="34" charset="-120"/>
-              </a:rPr>
-              <a:t>l</a:t>
-            </a:r>
-            <a:endParaRPr lang="en-US" sz="900" dirty="0"/>
-          </a:p>
-        </p:txBody>
-      </p:sp>
-      <p:sp>
-        <p:nvSpPr>
-          <p:cNvPr id="48" name="Shape 46"/>
-          <p:cNvSpPr/>
-          <p:nvPr/>
-        </p:nvSpPr>
-        <p:spPr>
-          <a:xfrm>
-            <a:off x="5254752" y="4169664"/>
-            <a:ext cx="685800" cy="384048"/>
-          </a:xfrm>
-          <a:prstGeom prst="rect">
-            <a:avLst>
-              <a:gd name="adj" fmla="val 9524"/>
-            </a:avLst>
-          </a:prstGeom>
-          <a:solidFill>
-            <a:srgbClr val="FFFFFF"/>
-          </a:solidFill>
-          <a:ln w="12700">
-            <a:solidFill>
-              <a:srgbClr val="DB2777"/>
-            </a:solidFill>
-            <a:prstDash val="solid"/>
-          </a:ln>
-        </p:spPr>
-      </p:sp>
-      <p:sp>
-        <p:nvSpPr>
-          <p:cNvPr id="49" name="Text 47"/>
-          <p:cNvSpPr/>
-          <p:nvPr/>
-        </p:nvSpPr>
-        <p:spPr>
-          <a:xfrm>
-            <a:off x="5254752" y="4169664"/>
-            <a:ext cx="685800" cy="384048"/>
-          </a:xfrm>
-          <a:prstGeom prst="rect">
-            <a:avLst/>
-          </a:prstGeom>
-          <a:noFill/>
-          <a:ln/>
-        </p:spPr>
-        <p:txBody>
-          <a:bodyPr wrap="square" lIns="0" tIns="0" rIns="0" bIns="0" rtlCol="0" anchor="ctr"/>
-          <a:lstStyle/>
-          <a:p>
-            <a:pPr algn="ctr" indent="0" marL="0">
-              <a:buNone/>
-            </a:pPr>
-            <a:r>
-              <a:rPr lang="en-US" sz="900" b="1" dirty="0">
-                <a:solidFill>
-                  <a:srgbClr val="9D174D"/>
-                </a:solidFill>
-                <a:latin typeface="Trebuchet MS" pitchFamily="34" charset="0"/>
-                <a:ea typeface="Trebuchet MS" pitchFamily="34" charset="-122"/>
-                <a:cs typeface="Trebuchet MS" pitchFamily="34" charset="-120"/>
-              </a:rPr>
-              <a:t>a</a:t>
-            </a:r>
-            <a:endParaRPr lang="en-US" sz="900" dirty="0"/>
-          </a:p>
-        </p:txBody>
-      </p:sp>
-      <p:sp>
-        <p:nvSpPr>
-          <p:cNvPr id="50" name="Shape 48"/>
-          <p:cNvSpPr/>
-          <p:nvPr/>
-        </p:nvSpPr>
-        <p:spPr>
-          <a:xfrm>
-            <a:off x="6062472" y="4169664"/>
-            <a:ext cx="685800" cy="384048"/>
-          </a:xfrm>
-          <a:prstGeom prst="rect">
-            <a:avLst>
-              <a:gd name="adj" fmla="val 9524"/>
-            </a:avLst>
-          </a:prstGeom>
-          <a:solidFill>
-            <a:srgbClr val="FFFFFF"/>
-          </a:solidFill>
-          <a:ln w="12700">
-            <a:solidFill>
-              <a:srgbClr val="DB2777"/>
-            </a:solidFill>
-            <a:prstDash val="solid"/>
-          </a:ln>
-        </p:spPr>
-      </p:sp>
-      <p:sp>
-        <p:nvSpPr>
-          <p:cNvPr id="51" name="Text 49"/>
-          <p:cNvSpPr/>
-          <p:nvPr/>
-        </p:nvSpPr>
-        <p:spPr>
-          <a:xfrm>
-            <a:off x="6062472" y="4169664"/>
-            <a:ext cx="685800" cy="384048"/>
-          </a:xfrm>
-          <a:prstGeom prst="rect">
-            <a:avLst/>
-          </a:prstGeom>
-          <a:noFill/>
-          <a:ln/>
-        </p:spPr>
-        <p:txBody>
-          <a:bodyPr wrap="square" lIns="0" tIns="0" rIns="0" bIns="0" rtlCol="0" anchor="ctr"/>
-          <a:lstStyle/>
-          <a:p>
-            <a:pPr algn="ctr" indent="0" marL="0">
-              <a:buNone/>
-            </a:pPr>
-            <a:r>
-              <a:rPr lang="en-US" sz="900" b="1" dirty="0">
-                <a:solidFill>
-                  <a:srgbClr val="9D174D"/>
-                </a:solidFill>
-                <a:latin typeface="Trebuchet MS" pitchFamily="34" charset="0"/>
-                <a:ea typeface="Trebuchet MS" pitchFamily="34" charset="-122"/>
-                <a:cs typeface="Trebuchet MS" pitchFamily="34" charset="-120"/>
-              </a:rPr>
-              <a:t>c</a:t>
-            </a:r>
-            <a:endParaRPr lang="en-US" sz="900" dirty="0"/>
-          </a:p>
-        </p:txBody>
-      </p:sp>
-      <p:sp>
-        <p:nvSpPr>
-          <p:cNvPr id="52" name="Text 50"/>
-          <p:cNvSpPr/>
-          <p:nvPr/>
-        </p:nvSpPr>
-        <p:spPr>
-          <a:xfrm>
-            <a:off x="6062472" y="4572000"/>
-            <a:ext cx="685800" cy="219456"/>
-          </a:xfrm>
-          <a:prstGeom prst="rect">
-            <a:avLst/>
-          </a:prstGeom>
-          <a:noFill/>
-          <a:ln/>
-        </p:spPr>
-        <p:txBody>
-          <a:bodyPr wrap="square" lIns="0" tIns="0" rIns="0" bIns="0" rtlCol="0" anchor="t"/>
-          <a:lstStyle/>
-          <a:p>
-            <a:pPr algn="ctr" indent="0" marL="0">
-              <a:buNone/>
-            </a:pPr>
-            <a:r>
-              <a:rPr lang="en-US" sz="750" i="1" dirty="0">
-                <a:solidFill>
-                  <a:srgbClr val="94A3B8"/>
-                </a:solidFill>
-                <a:latin typeface="Calibri" pitchFamily="34" charset="0"/>
-                <a:ea typeface="Calibri" pitchFamily="34" charset="-122"/>
-                <a:cs typeface="Calibri" pitchFamily="34" charset="-120"/>
-              </a:rPr>
-              <a:t>/s/</a:t>
-            </a:r>
-            <a:endParaRPr lang="en-US" sz="750" dirty="0"/>
-          </a:p>
-        </p:txBody>
-      </p:sp>
-      <p:sp>
-        <p:nvSpPr>
-          <p:cNvPr id="53" name="Shape 51"/>
-          <p:cNvSpPr/>
-          <p:nvPr/>
-        </p:nvSpPr>
-        <p:spPr>
-          <a:xfrm>
-            <a:off x="6870192" y="4169664"/>
-            <a:ext cx="685800" cy="384048"/>
-          </a:xfrm>
-          <a:prstGeom prst="rect">
-            <a:avLst>
-              <a:gd name="adj" fmla="val 9524"/>
-            </a:avLst>
-          </a:prstGeom>
-          <a:solidFill>
-            <a:srgbClr val="FFFFFF"/>
-          </a:solidFill>
-          <a:ln w="12700">
-            <a:solidFill>
-              <a:srgbClr val="DB2777"/>
-            </a:solidFill>
-            <a:prstDash val="solid"/>
-          </a:ln>
-        </p:spPr>
-      </p:sp>
-      <p:sp>
-        <p:nvSpPr>
-          <p:cNvPr id="54" name="Text 52"/>
-          <p:cNvSpPr/>
-          <p:nvPr/>
-        </p:nvSpPr>
-        <p:spPr>
-          <a:xfrm>
-            <a:off x="6870192" y="4169664"/>
-            <a:ext cx="685800" cy="384048"/>
-          </a:xfrm>
-          <a:prstGeom prst="rect">
-            <a:avLst/>
-          </a:prstGeom>
-          <a:noFill/>
-          <a:ln/>
-        </p:spPr>
-        <p:txBody>
-          <a:bodyPr wrap="square" lIns="0" tIns="0" rIns="0" bIns="0" rtlCol="0" anchor="ctr"/>
-          <a:lstStyle/>
-          <a:p>
-            <a:pPr algn="ctr" indent="0" marL="0">
-              <a:buNone/>
-            </a:pPr>
-            <a:r>
-              <a:rPr lang="en-US" sz="900" b="1" dirty="0">
-                <a:solidFill>
-                  <a:srgbClr val="9D174D"/>
-                </a:solidFill>
-                <a:latin typeface="Trebuchet MS" pitchFamily="34" charset="0"/>
-                <a:ea typeface="Trebuchet MS" pitchFamily="34" charset="-122"/>
-                <a:cs typeface="Trebuchet MS" pitchFamily="34" charset="-120"/>
-              </a:rPr>
-              <a:t>i</a:t>
-            </a:r>
-            <a:endParaRPr lang="en-US" sz="900" dirty="0"/>
-          </a:p>
-        </p:txBody>
-      </p:sp>
-      <p:sp>
-        <p:nvSpPr>
-          <p:cNvPr id="55" name="Shape 53"/>
-          <p:cNvSpPr/>
-          <p:nvPr/>
-        </p:nvSpPr>
-        <p:spPr>
-          <a:xfrm>
-            <a:off x="7677912" y="4169664"/>
-            <a:ext cx="685800" cy="384048"/>
-          </a:xfrm>
-          <a:prstGeom prst="rect">
-            <a:avLst>
-              <a:gd name="adj" fmla="val 9524"/>
-            </a:avLst>
-          </a:prstGeom>
-          <a:solidFill>
-            <a:srgbClr val="FFFFFF"/>
-          </a:solidFill>
-          <a:ln w="12700">
-            <a:solidFill>
-              <a:srgbClr val="DB2777"/>
-            </a:solidFill>
-            <a:prstDash val="solid"/>
-          </a:ln>
-        </p:spPr>
-      </p:sp>
-      <p:sp>
-        <p:nvSpPr>
-          <p:cNvPr id="56" name="Text 54"/>
-          <p:cNvSpPr/>
-          <p:nvPr/>
-        </p:nvSpPr>
-        <p:spPr>
-          <a:xfrm>
-            <a:off x="7677912" y="4169664"/>
-            <a:ext cx="685800" cy="384048"/>
-          </a:xfrm>
-          <a:prstGeom prst="rect">
-            <a:avLst/>
-          </a:prstGeom>
-          <a:noFill/>
-          <a:ln/>
-        </p:spPr>
-        <p:txBody>
-          <a:bodyPr wrap="square" lIns="0" tIns="0" rIns="0" bIns="0" rtlCol="0" anchor="ctr"/>
-          <a:lstStyle/>
-          <a:p>
-            <a:pPr algn="ctr" indent="0" marL="0">
-              <a:buNone/>
-            </a:pPr>
-            <a:r>
-              <a:rPr lang="en-US" sz="900" b="1" dirty="0">
-                <a:solidFill>
-                  <a:srgbClr val="9D174D"/>
-                </a:solidFill>
-                <a:latin typeface="Trebuchet MS" pitchFamily="34" charset="0"/>
-                <a:ea typeface="Trebuchet MS" pitchFamily="34" charset="-122"/>
-                <a:cs typeface="Trebuchet MS" pitchFamily="34" charset="-120"/>
-              </a:rPr>
-              <a:t>ng</a:t>
+              <a:t>d</a:t>
             </a:r>
             <a:endParaRPr lang="en-US" sz="900" dirty="0"/>
           </a:p>
@@ -38325,7 +38076,7 @@
                 <a:ea typeface="Trebuchet MS" pitchFamily="34" charset="-122"/>
                 <a:cs typeface="Trebuchet MS" pitchFamily="34" charset="-120"/>
               </a:rPr>
-              <a:t>ir-</a:t>
+              <a:t>re-</a:t>
             </a:r>
             <a:endParaRPr lang="en-US" sz="1300" dirty="0"/>
           </a:p>
@@ -38517,7 +38268,7 @@
                 <a:ea typeface="Trebuchet MS" pitchFamily="34" charset="-122"/>
                 <a:cs typeface="Trebuchet MS" pitchFamily="34" charset="-120"/>
               </a:rPr>
-              <a:t>un-</a:t>
+              <a:t>ir-</a:t>
             </a:r>
             <a:endParaRPr lang="en-US" sz="1300" dirty="0"/>
           </a:p>
@@ -38670,7 +38421,7 @@
                 <a:ea typeface="Trebuchet MS" pitchFamily="34" charset="-122"/>
                 <a:cs typeface="Trebuchet MS" pitchFamily="34" charset="-120"/>
               </a:rPr>
-              <a:t>re-</a:t>
+              <a:t>un-</a:t>
             </a:r>
             <a:endParaRPr lang="en-US" sz="1300" dirty="0"/>
           </a:p>
@@ -38823,7 +38574,7 @@
                 <a:ea typeface="Trebuchet MS" pitchFamily="34" charset="-122"/>
                 <a:cs typeface="Trebuchet MS" pitchFamily="34" charset="-120"/>
               </a:rPr>
-              <a:t>pre-</a:t>
+              <a:t>non-</a:t>
             </a:r>
             <a:endParaRPr lang="en-US" sz="1300" dirty="0"/>
           </a:p>
@@ -38976,7 +38727,7 @@
                 <a:ea typeface="Trebuchet MS" pitchFamily="34" charset="-122"/>
                 <a:cs typeface="Trebuchet MS" pitchFamily="34" charset="-120"/>
               </a:rPr>
-              <a:t>non-</a:t>
+              <a:t>self-</a:t>
             </a:r>
             <a:endParaRPr lang="en-US" sz="1300" dirty="0"/>
           </a:p>
@@ -39065,7 +38816,7 @@
                 <a:ea typeface="Trebuchet MS" pitchFamily="34" charset="-122"/>
                 <a:cs typeface="Trebuchet MS" pitchFamily="34" charset="-120"/>
               </a:rPr>
-              <a:t>-s</a:t>
+              <a:t>-er</a:t>
             </a:r>
             <a:endParaRPr lang="en-US" sz="1300" dirty="0"/>
           </a:p>
@@ -39566,7 +39317,7 @@
                 <a:ea typeface="Trebuchet MS" pitchFamily="34" charset="-122"/>
                 <a:cs typeface="Trebuchet MS" pitchFamily="34" charset="-120"/>
               </a:rPr>
-              <a:t>replacements</a:t>
+              <a:t>replacer</a:t>
             </a:r>
             <a:endParaRPr lang="en-US" sz="1200" dirty="0"/>
           </a:p>
@@ -40820,7 +40571,7 @@
                 <a:ea typeface="Calibri" pitchFamily="34" charset="-122"/>
                 <a:cs typeface="Calibri" pitchFamily="34" charset="-120"/>
               </a:rPr>
-              <a:t>1.  The word 'irreplaceable' means something so special it cannot be swapped for anything else.</a:t>
+              <a:t>1.  The suffix '-able' in 'replaceable' means 'without'.</a:t>
             </a:r>
             <a:endParaRPr lang="en-US" sz="1300" dirty="0"/>
           </a:p>
@@ -40843,11 +40594,11 @@
             </a:avLst>
           </a:prstGeom>
           <a:solidFill>
-            <a:srgbClr val="DCFCE7"/>
-          </a:solidFill>
-          <a:ln w="12700">
-            <a:solidFill>
-              <a:srgbClr val="16A34A"/>
+            <a:srgbClr val="FEE2E2"/>
+          </a:solidFill>
+          <a:ln w="12700">
+            <a:solidFill>
+              <a:srgbClr val="DC2626"/>
             </a:solidFill>
             <a:prstDash val="solid"/>
           </a:ln>
@@ -40880,13 +40631,13 @@
             <a:r>
               <a:rPr lang="en-US" sz="1100" b="1" dirty="0">
                 <a:solidFill>
-                  <a:srgbClr val="16A34A"/>
+                  <a:srgbClr val="DC2626"/>
                 </a:solidFill>
                 <a:latin typeface="Trebuchet MS" pitchFamily="34" charset="0"/>
                 <a:ea typeface="Trebuchet MS" pitchFamily="34" charset="-122"/>
                 <a:cs typeface="Trebuchet MS" pitchFamily="34" charset="-120"/>
               </a:rPr>
-              <a:t>TRUE</a:t>
+              <a:t>FALSE</a:t>
             </a:r>
             <a:endParaRPr lang="en-US" sz="1100" dirty="0"/>
           </a:p>
@@ -40959,7 +40710,7 @@
                 <a:ea typeface="Calibri" pitchFamily="34" charset="-122"/>
                 <a:cs typeface="Calibri" pitchFamily="34" charset="-120"/>
               </a:rPr>
-              <a:t>2.  The root 'replace' comes from the Greek language.</a:t>
+              <a:t>2.  Adding '-ment' to 'replace' makes the noun 'replacement'.</a:t>
             </a:r>
             <a:endParaRPr lang="en-US" sz="1300" dirty="0"/>
           </a:p>
@@ -40982,11 +40733,11 @@
             </a:avLst>
           </a:prstGeom>
           <a:solidFill>
-            <a:srgbClr val="FEE2E2"/>
-          </a:solidFill>
-          <a:ln w="12700">
-            <a:solidFill>
-              <a:srgbClr val="DC2626"/>
+            <a:srgbClr val="DCFCE7"/>
+          </a:solidFill>
+          <a:ln w="12700">
+            <a:solidFill>
+              <a:srgbClr val="16A34A"/>
             </a:solidFill>
             <a:prstDash val="solid"/>
           </a:ln>
@@ -41019,13 +40770,13 @@
             <a:r>
               <a:rPr lang="en-US" sz="1100" b="1" dirty="0">
                 <a:solidFill>
-                  <a:srgbClr val="DC2626"/>
+                  <a:srgbClr val="16A34A"/>
                 </a:solidFill>
                 <a:latin typeface="Trebuchet MS" pitchFamily="34" charset="0"/>
                 <a:ea typeface="Trebuchet MS" pitchFamily="34" charset="-122"/>
                 <a:cs typeface="Trebuchet MS" pitchFamily="34" charset="-120"/>
               </a:rPr>
-              <a:t>FALSE</a:t>
+              <a:t>TRUE</a:t>
             </a:r>
             <a:endParaRPr lang="en-US" sz="1100" dirty="0"/>
           </a:p>
@@ -41098,7 +40849,7 @@
                 <a:ea typeface="Calibri" pitchFamily="34" charset="-122"/>
                 <a:cs typeface="Calibri" pitchFamily="34" charset="-120"/>
               </a:rPr>
-              <a:t>3.  The suffix '-ment' in 'replacement' turns the verb replace into a noun.</a:t>
+              <a:t>3.  The word 'irreplaceable' means something that can be easily swapped out.</a:t>
             </a:r>
             <a:endParaRPr lang="en-US" sz="1300" dirty="0"/>
           </a:p>
@@ -41121,11 +40872,11 @@
             </a:avLst>
           </a:prstGeom>
           <a:solidFill>
-            <a:srgbClr val="DCFCE7"/>
-          </a:solidFill>
-          <a:ln w="12700">
-            <a:solidFill>
-              <a:srgbClr val="16A34A"/>
+            <a:srgbClr val="FEE2E2"/>
+          </a:solidFill>
+          <a:ln w="12700">
+            <a:solidFill>
+              <a:srgbClr val="DC2626"/>
             </a:solidFill>
             <a:prstDash val="solid"/>
           </a:ln>
@@ -41158,13 +40909,13 @@
             <a:r>
               <a:rPr lang="en-US" sz="1100" b="1" dirty="0">
                 <a:solidFill>
-                  <a:srgbClr val="16A34A"/>
+                  <a:srgbClr val="DC2626"/>
                 </a:solidFill>
                 <a:latin typeface="Trebuchet MS" pitchFamily="34" charset="0"/>
                 <a:ea typeface="Trebuchet MS" pitchFamily="34" charset="-122"/>
                 <a:cs typeface="Trebuchet MS" pitchFamily="34" charset="-120"/>
               </a:rPr>
-              <a:t>TRUE</a:t>
+              <a:t>FALSE</a:t>
             </a:r>
             <a:endParaRPr lang="en-US" sz="1100" dirty="0"/>
           </a:p>
@@ -41237,7 +40988,7 @@
                 <a:ea typeface="Calibri" pitchFamily="34" charset="-122"/>
                 <a:cs typeface="Calibri" pitchFamily="34" charset="-120"/>
               </a:rPr>
-              <a:t>4.  A 'replacement' is a person or thing that takes the place of another.</a:t>
+              <a:t>4.  The prefix 'ir-' in 'irreplaceable' means 'not'.</a:t>
             </a:r>
             <a:endParaRPr lang="en-US" sz="1300" dirty="0"/>
           </a:p>
@@ -41376,7 +41127,7 @@
                 <a:ea typeface="Calibri" pitchFamily="34" charset="-122"/>
                 <a:cs typeface="Calibri" pitchFamily="34" charset="-120"/>
               </a:rPr>
-              <a:t>5.  The prefix 'ir-' in 'irreplaceable' means 'again'.</a:t>
+              <a:t>5.  The root 'replace' comes from Latin and relates to the idea of place or position.</a:t>
             </a:r>
             <a:endParaRPr lang="en-US" sz="1300" dirty="0"/>
           </a:p>
@@ -41399,11 +41150,11 @@
             </a:avLst>
           </a:prstGeom>
           <a:solidFill>
-            <a:srgbClr val="FEE2E2"/>
-          </a:solidFill>
-          <a:ln w="12700">
-            <a:solidFill>
-              <a:srgbClr val="DC2626"/>
+            <a:srgbClr val="DCFCE7"/>
+          </a:solidFill>
+          <a:ln w="12700">
+            <a:solidFill>
+              <a:srgbClr val="16A34A"/>
             </a:solidFill>
             <a:prstDash val="solid"/>
           </a:ln>
@@ -41436,13 +41187,13 @@
             <a:r>
               <a:rPr lang="en-US" sz="1100" b="1" dirty="0">
                 <a:solidFill>
-                  <a:srgbClr val="DC2626"/>
+                  <a:srgbClr val="16A34A"/>
                 </a:solidFill>
                 <a:latin typeface="Trebuchet MS" pitchFamily="34" charset="0"/>
                 <a:ea typeface="Trebuchet MS" pitchFamily="34" charset="-122"/>
                 <a:cs typeface="Trebuchet MS" pitchFamily="34" charset="-120"/>
               </a:rPr>
-              <a:t>FALSE</a:t>
+              <a:t>TRUE</a:t>
             </a:r>
             <a:endParaRPr lang="en-US" sz="1100" dirty="0"/>
           </a:p>
@@ -41910,7 +41661,7 @@
                 <a:ea typeface="Calibri" pitchFamily="34" charset="-122"/>
                 <a:cs typeface="Calibri" pitchFamily="34" charset="-120"/>
               </a:rPr>
-              <a:t>Origin: Latin: replacere</a:t>
+              <a:t>Origin: Latin: placea</a:t>
             </a:r>
             <a:endParaRPr lang="en-US" sz="1100" dirty="0"/>
           </a:p>
@@ -42411,7 +42162,7 @@
                 <a:ea typeface="Trebuchet MS" pitchFamily="34" charset="-122"/>
                 <a:cs typeface="Trebuchet MS" pitchFamily="34" charset="-120"/>
               </a:rPr>
-              <a:t>replacements</a:t>
+              <a:t>replacer</a:t>
             </a:r>
             <a:endParaRPr lang="en-US" sz="1300" dirty="0"/>
           </a:p>
@@ -43004,7 +42755,7 @@
                 <a:ea typeface="Trebuchet MS" pitchFamily="34" charset="-122"/>
                 <a:cs typeface="Trebuchet MS" pitchFamily="34" charset="-120"/>
               </a:rPr>
-              <a:t>ir-</a:t>
+              <a:t>re-</a:t>
             </a:r>
             <a:endParaRPr lang="en-US" sz="1300" dirty="0"/>
           </a:p>
@@ -43196,7 +42947,7 @@
                 <a:ea typeface="Trebuchet MS" pitchFamily="34" charset="-122"/>
                 <a:cs typeface="Trebuchet MS" pitchFamily="34" charset="-120"/>
               </a:rPr>
-              <a:t>un-</a:t>
+              <a:t>ir-</a:t>
             </a:r>
             <a:endParaRPr lang="en-US" sz="1300" dirty="0"/>
           </a:p>
@@ -43349,7 +43100,7 @@
                 <a:ea typeface="Trebuchet MS" pitchFamily="34" charset="-122"/>
                 <a:cs typeface="Trebuchet MS" pitchFamily="34" charset="-120"/>
               </a:rPr>
-              <a:t>re-</a:t>
+              <a:t>un-</a:t>
             </a:r>
             <a:endParaRPr lang="en-US" sz="1300" dirty="0"/>
           </a:p>
@@ -43502,7 +43253,7 @@
                 <a:ea typeface="Trebuchet MS" pitchFamily="34" charset="-122"/>
                 <a:cs typeface="Trebuchet MS" pitchFamily="34" charset="-120"/>
               </a:rPr>
-              <a:t>pre-</a:t>
+              <a:t>non-</a:t>
             </a:r>
             <a:endParaRPr lang="en-US" sz="1300" dirty="0"/>
           </a:p>
@@ -43655,7 +43406,7 @@
                 <a:ea typeface="Trebuchet MS" pitchFamily="34" charset="-122"/>
                 <a:cs typeface="Trebuchet MS" pitchFamily="34" charset="-120"/>
               </a:rPr>
-              <a:t>non-</a:t>
+              <a:t>self-</a:t>
             </a:r>
             <a:endParaRPr lang="en-US" sz="1300" dirty="0"/>
           </a:p>
@@ -43744,7 +43495,7 @@
                 <a:ea typeface="Trebuchet MS" pitchFamily="34" charset="-122"/>
                 <a:cs typeface="Trebuchet MS" pitchFamily="34" charset="-120"/>
               </a:rPr>
-              <a:t>-s</a:t>
+              <a:t>-er</a:t>
             </a:r>
             <a:endParaRPr lang="en-US" sz="1300" dirty="0"/>
           </a:p>
@@ -43856,7 +43607,7 @@
                 <a:ea typeface="Trebuchet MS" pitchFamily="34" charset="-122"/>
                 <a:cs typeface="Trebuchet MS" pitchFamily="34" charset="-120"/>
               </a:rPr>
-              <a:t>ir-</a:t>
+              <a:t>re-</a:t>
             </a:r>
             <a:endParaRPr lang="en-US" sz="1300" dirty="0"/>
           </a:p>
@@ -45072,7 +44823,7 @@
                 <a:ea typeface="Calibri" pitchFamily="34" charset="-122"/>
                 <a:cs typeface="Calibri" pitchFamily="34" charset="-120"/>
               </a:rPr>
-              <a:t>More than one person or thing that takes the place of another.</a:t>
+              <a:t>A person or thing that replaces something else.</a:t>
             </a:r>
             <a:endParaRPr lang="en-US" sz="1200" dirty="0"/>
           </a:p>
@@ -45350,7 +45101,7 @@
                 <a:ea typeface="Calibri" pitchFamily="34" charset="-122"/>
                 <a:cs typeface="Calibri" pitchFamily="34" charset="-120"/>
               </a:rPr>
-              <a:t>So special or unique that nothing else can take its place.</a:t>
+              <a:t>So special or unique that nothing else could ever take its place.</a:t>
             </a:r>
             <a:endParaRPr lang="en-US" sz="1200" dirty="0"/>
           </a:p>
@@ -45423,7 +45174,7 @@
                 <a:ea typeface="Trebuchet MS" pitchFamily="34" charset="-122"/>
                 <a:cs typeface="Trebuchet MS" pitchFamily="34" charset="-120"/>
               </a:rPr>
-              <a:t>replacements</a:t>
+              <a:t>replacer</a:t>
             </a:r>
             <a:endParaRPr lang="en-US" sz="1200" dirty="0"/>
           </a:p>
@@ -45984,7 +45735,7 @@
                 <a:ea typeface="Calibri" pitchFamily="34" charset="-122"/>
                 <a:cs typeface="Calibri" pitchFamily="34" charset="-120"/>
               </a:rPr>
-              <a:t>The teacher asked Sam to find a replacement for the broken pencil sharpener before class started.</a:t>
+              <a:t>The teacher asked a student to replace the broken pencil with a new one from the supply box.</a:t>
             </a:r>
             <a:endParaRPr lang="en-US" sz="1500" dirty="0"/>
           </a:p>
@@ -46148,7 +45899,7 @@
                 <a:ea typeface="Calibri" pitchFamily="34" charset="-122"/>
                 <a:cs typeface="Calibri" pitchFamily="34" charset="-120"/>
               </a:rPr>
-              <a:t>After the storm, the council decided that the old bridge was irreplaceable because of its historical value.</a:t>
+              <a:t>The goalkeeper found out she was irreplaceable after the team lost every game while she was away.</a:t>
             </a:r>
             <a:endParaRPr lang="en-US" sz="1500" dirty="0"/>
           </a:p>
@@ -46312,7 +46063,7 @@
                 <a:ea typeface="Calibri" pitchFamily="34" charset="-122"/>
                 <a:cs typeface="Calibri" pitchFamily="34" charset="-120"/>
               </a:rPr>
-              <a:t>We are replacing all the old library books with brand new copies this term.</a:t>
+              <a:t>The mechanic organised a replacement part so the car could be fixed before the weekend.</a:t>
             </a:r>
             <a:endParaRPr lang="en-US" sz="1500" dirty="0"/>
           </a:p>
